--- a/outputs/thesis_defense_presentation.pptx
+++ b/outputs/thesis_defense_presentation.pptx
@@ -5678,8 +5678,8 @@
         </p:nvSpPr>
         <p:spPr>
           <a:xfrm>
-            <a:off x="914400" y="2011680"/>
-            <a:ext cx="10362895" cy="1645920"/>
+            <a:off x="914400" y="1828800"/>
+            <a:ext cx="10362895" cy="1920240"/>
           </a:xfrm>
           <a:prstGeom prst="rect">
             <a:avLst/>
@@ -5693,7 +5693,7 @@
           <a:lstStyle/>
           <a:p>
             <a:pPr algn="ctr">
-              <a:defRPr sz="3600" b="1">
+              <a:defRPr sz="3400" b="1">
                 <a:solidFill>
                   <a:srgbClr val="FFFFFF"/>
                 </a:solidFill>
@@ -5716,7 +5716,43 @@
       </p:sp>
       <p:sp>
         <p:nvSpPr>
-          <p:cNvPr id="4" name="Rectangle 3"/>
+          <p:cNvPr id="4" name="TextBox 3"/>
+          <p:cNvSpPr txBox="1"/>
+          <p:nvPr/>
+        </p:nvSpPr>
+        <p:spPr>
+          <a:xfrm>
+            <a:off x="914400" y="4343400"/>
+            <a:ext cx="10362895" cy="274320"/>
+          </a:xfrm>
+          <a:prstGeom prst="rect">
+            <a:avLst/>
+          </a:prstGeom>
+          <a:noFill/>
+        </p:spPr>
+        <p:txBody>
+          <a:bodyPr wrap="square">
+            <a:spAutoFit/>
+          </a:bodyPr>
+          <a:lstStyle/>
+          <a:p>
+            <a:pPr algn="ctr">
+              <a:defRPr sz="1200" b="0">
+                <a:solidFill>
+                  <a:srgbClr val="E86C00"/>
+                </a:solidFill>
+                <a:latin typeface="Calibri"/>
+              </a:defRPr>
+            </a:pPr>
+            <a:r>
+              <a:t>Research Demonstration — Not for clinical use</a:t>
+            </a:r>
+          </a:p>
+        </p:txBody>
+      </p:sp>
+      <p:sp>
+        <p:nvSpPr>
+          <p:cNvPr id="5" name="Rectangle 4"/>
           <p:cNvSpPr/>
           <p:nvPr/>
         </p:nvSpPr>
@@ -5759,7 +5795,7 @@
       </p:sp>
       <p:sp>
         <p:nvSpPr>
-          <p:cNvPr id="5" name="TextBox 4"/>
+          <p:cNvPr id="6" name="TextBox 5"/>
           <p:cNvSpPr txBox="1"/>
           <p:nvPr/>
         </p:nvSpPr>
@@ -5788,20 +5824,56 @@
               </a:defRPr>
             </a:pPr>
             <a:r>
-              <a:t>MSc Thesis Defense</a:t>
-            </a:r>
-          </a:p>
-        </p:txBody>
-      </p:sp>
-      <p:sp>
-        <p:nvSpPr>
-          <p:cNvPr id="6" name="TextBox 5"/>
+              <a:t>Author: Μάριος Χρήστος Συρμακέζης</a:t>
+            </a:r>
+          </a:p>
+        </p:txBody>
+      </p:sp>
+      <p:sp>
+        <p:nvSpPr>
+          <p:cNvPr id="7" name="TextBox 6"/>
           <p:cNvSpPr txBox="1"/>
           <p:nvPr/>
         </p:nvSpPr>
         <p:spPr>
           <a:xfrm>
-            <a:off x="914400" y="5120640"/>
+            <a:off x="914400" y="4892040"/>
+            <a:ext cx="10362895" cy="411480"/>
+          </a:xfrm>
+          <a:prstGeom prst="rect">
+            <a:avLst/>
+          </a:prstGeom>
+          <a:noFill/>
+        </p:spPr>
+        <p:txBody>
+          <a:bodyPr wrap="square">
+            <a:spAutoFit/>
+          </a:bodyPr>
+          <a:lstStyle/>
+          <a:p>
+            <a:pPr algn="ctr">
+              <a:defRPr sz="1800" b="0">
+                <a:solidFill>
+                  <a:srgbClr val="D6E8F7"/>
+                </a:solidFill>
+                <a:latin typeface="Calibri"/>
+              </a:defRPr>
+            </a:pPr>
+            <a:r>
+              <a:t>MSc Thesis Defense</a:t>
+            </a:r>
+          </a:p>
+        </p:txBody>
+      </p:sp>
+      <p:sp>
+        <p:nvSpPr>
+          <p:cNvPr id="8" name="TextBox 7"/>
+          <p:cNvSpPr txBox="1"/>
+          <p:nvPr/>
+        </p:nvSpPr>
+        <p:spPr>
+          <a:xfrm>
+            <a:off x="914400" y="5303520"/>
             <a:ext cx="10362895" cy="457200"/>
           </a:xfrm>
           <a:prstGeom prst="rect">
@@ -5831,13 +5903,13 @@
       </p:sp>
       <p:sp>
         <p:nvSpPr>
-          <p:cNvPr id="7" name="TextBox 6"/>
+          <p:cNvPr id="9" name="TextBox 8"/>
           <p:cNvSpPr txBox="1"/>
           <p:nvPr/>
         </p:nvSpPr>
         <p:spPr>
           <a:xfrm>
-            <a:off x="914400" y="5669280"/>
+            <a:off x="914400" y="5715000"/>
             <a:ext cx="10362895" cy="457200"/>
           </a:xfrm>
           <a:prstGeom prst="rect">
@@ -5879,7 +5951,7 @@
     <p:bg>
       <p:bgPr>
         <a:solidFill>
-          <a:srgbClr val="FFFFFF"/>
+          <a:srgbClr val="F8FBFF"/>
         </a:solidFill>
         <a:effectLst/>
       </p:bgPr>
@@ -5944,9 +6016,52 @@
           </a:p>
         </p:txBody>
       </p:sp>
+      <p:sp>
+        <p:nvSpPr>
+          <p:cNvPr id="3" name="Rectangle 2"/>
+          <p:cNvSpPr/>
+          <p:nvPr/>
+        </p:nvSpPr>
+        <p:spPr>
+          <a:xfrm>
+            <a:off x="0" y="987552"/>
+            <a:ext cx="12191695" cy="18288"/>
+          </a:xfrm>
+          <a:prstGeom prst="rect">
+            <a:avLst/>
+          </a:prstGeom>
+          <a:solidFill>
+            <a:srgbClr val="3B82F6"/>
+          </a:solidFill>
+          <a:ln>
+            <a:noFill/>
+          </a:ln>
+        </p:spPr>
+        <p:style>
+          <a:lnRef idx="1">
+            <a:schemeClr val="accent1"/>
+          </a:lnRef>
+          <a:fillRef idx="3">
+            <a:schemeClr val="accent1"/>
+          </a:fillRef>
+          <a:effectRef idx="2">
+            <a:schemeClr val="accent1"/>
+          </a:effectRef>
+          <a:fontRef idx="minor">
+            <a:schemeClr val="lt1"/>
+          </a:fontRef>
+        </p:style>
+        <p:txBody>
+          <a:bodyPr rtlCol="0" anchor="ctr"/>
+          <a:lstStyle/>
+          <a:p>
+            <a:pPr algn="ctr"/>
+          </a:p>
+        </p:txBody>
+      </p:sp>
       <p:pic>
         <p:nvPicPr>
-          <p:cNvPr id="3" name="Picture 2" descr="fig_pipeline_overview_thesis.png"/>
+          <p:cNvPr id="4" name="Picture 3" descr="fig_pipeline_overview_thesis.png"/>
           <p:cNvPicPr>
             <a:picLocks noChangeAspect="1"/>
           </p:cNvPicPr>
@@ -5970,14 +6085,110 @@
       </p:pic>
       <p:sp>
         <p:nvSpPr>
-          <p:cNvPr id="4" name="TextBox 3"/>
+          <p:cNvPr id="5" name="Rectangle 4"/>
+          <p:cNvSpPr/>
+          <p:nvPr/>
+        </p:nvSpPr>
+        <p:spPr>
+          <a:xfrm>
+            <a:off x="1981047" y="4234363"/>
+            <a:ext cx="8229600" cy="292608"/>
+          </a:xfrm>
+          <a:prstGeom prst="rect">
+            <a:avLst/>
+          </a:prstGeom>
+          <a:solidFill>
+            <a:srgbClr val="F2F2F2"/>
+          </a:solidFill>
+          <a:ln>
+            <a:noFill/>
+          </a:ln>
+        </p:spPr>
+        <p:style>
+          <a:lnRef idx="1">
+            <a:schemeClr val="accent1"/>
+          </a:lnRef>
+          <a:fillRef idx="3">
+            <a:schemeClr val="accent1"/>
+          </a:fillRef>
+          <a:effectRef idx="2">
+            <a:schemeClr val="accent1"/>
+          </a:effectRef>
+          <a:fontRef idx="minor">
+            <a:schemeClr val="lt1"/>
+          </a:fontRef>
+        </p:style>
+        <p:txBody>
+          <a:bodyPr rtlCol="0" anchor="ctr" wrap="square" lIns="73152" rIns="73152"/>
+          <a:lstStyle/>
+          <a:p>
+            <a:pPr algn="ctr">
+              <a:defRPr sz="850">
+                <a:solidFill>
+                  <a:srgbClr val="666666"/>
+                </a:solidFill>
+                <a:latin typeface="Calibri"/>
+              </a:defRPr>
+            </a:pPr>
+            <a:r>
+              <a:t>Pipeline A: WAV → Preprocessing → Feature Extraction → ML → Metrics  |  Pipeline B: CSV → ML → Metrics | Ref: fig:pipeline-overview-thesis</a:t>
+            </a:r>
+          </a:p>
+        </p:txBody>
+      </p:sp>
+      <p:sp>
+        <p:nvSpPr>
+          <p:cNvPr id="6" name="Rectangle 5"/>
+          <p:cNvSpPr/>
+          <p:nvPr/>
+        </p:nvSpPr>
+        <p:spPr>
+          <a:xfrm>
+            <a:off x="457200" y="6455664"/>
+            <a:ext cx="11247120" cy="9144"/>
+          </a:xfrm>
+          <a:prstGeom prst="rect">
+            <a:avLst/>
+          </a:prstGeom>
+          <a:solidFill>
+            <a:srgbClr val="E86C00"/>
+          </a:solidFill>
+          <a:ln>
+            <a:noFill/>
+          </a:ln>
+        </p:spPr>
+        <p:style>
+          <a:lnRef idx="1">
+            <a:schemeClr val="accent1"/>
+          </a:lnRef>
+          <a:fillRef idx="3">
+            <a:schemeClr val="accent1"/>
+          </a:fillRef>
+          <a:effectRef idx="2">
+            <a:schemeClr val="accent1"/>
+          </a:effectRef>
+          <a:fontRef idx="minor">
+            <a:schemeClr val="lt1"/>
+          </a:fontRef>
+        </p:style>
+        <p:txBody>
+          <a:bodyPr rtlCol="0" anchor="ctr"/>
+          <a:lstStyle/>
+          <a:p>
+            <a:pPr algn="ctr"/>
+          </a:p>
+        </p:txBody>
+      </p:sp>
+      <p:sp>
+        <p:nvSpPr>
+          <p:cNvPr id="7" name="TextBox 6"/>
           <p:cNvSpPr txBox="1"/>
           <p:nvPr/>
         </p:nvSpPr>
         <p:spPr>
           <a:xfrm>
-            <a:off x="914400" y="6217920"/>
-            <a:ext cx="10332720" cy="457200"/>
+            <a:off x="457200" y="6492240"/>
+            <a:ext cx="11247120" cy="219456"/>
           </a:xfrm>
           <a:prstGeom prst="rect">
             <a:avLst/>
@@ -5990,16 +6201,16 @@
           </a:bodyPr>
           <a:lstStyle/>
           <a:p>
-            <a:pPr algn="ctr">
-              <a:defRPr sz="1300" b="0">
+            <a:pPr algn="r">
+              <a:defRPr sz="900" b="0">
                 <a:solidFill>
-                  <a:srgbClr val="666666"/>
+                  <a:srgbClr val="E86C00"/>
                 </a:solidFill>
                 <a:latin typeface="Calibri"/>
               </a:defRPr>
             </a:pPr>
             <a:r>
-              <a:t>Pipeline A: WAV → Preprocessing → Feature Extraction → ML → Metrics  |  Pipeline B: CSV → ML → Metrics</a:t>
+              <a:t>Διπλωματική Εργασία - Μάρτιος 2026</a:t>
             </a:r>
           </a:p>
         </p:txBody>
@@ -6018,7 +6229,7 @@
     <p:bg>
       <p:bgPr>
         <a:solidFill>
-          <a:srgbClr val="FFFFFF"/>
+          <a:srgbClr val="F8FBFF"/>
         </a:solidFill>
         <a:effectLst/>
       </p:bgPr>
@@ -6083,9 +6294,52 @@
           </a:p>
         </p:txBody>
       </p:sp>
+      <p:sp>
+        <p:nvSpPr>
+          <p:cNvPr id="3" name="Rectangle 2"/>
+          <p:cNvSpPr/>
+          <p:nvPr/>
+        </p:nvSpPr>
+        <p:spPr>
+          <a:xfrm>
+            <a:off x="0" y="987552"/>
+            <a:ext cx="12191695" cy="18288"/>
+          </a:xfrm>
+          <a:prstGeom prst="rect">
+            <a:avLst/>
+          </a:prstGeom>
+          <a:solidFill>
+            <a:srgbClr val="3B82F6"/>
+          </a:solidFill>
+          <a:ln>
+            <a:noFill/>
+          </a:ln>
+        </p:spPr>
+        <p:style>
+          <a:lnRef idx="1">
+            <a:schemeClr val="accent1"/>
+          </a:lnRef>
+          <a:fillRef idx="3">
+            <a:schemeClr val="accent1"/>
+          </a:fillRef>
+          <a:effectRef idx="2">
+            <a:schemeClr val="accent1"/>
+          </a:effectRef>
+          <a:fontRef idx="minor">
+            <a:schemeClr val="lt1"/>
+          </a:fontRef>
+        </p:style>
+        <p:txBody>
+          <a:bodyPr rtlCol="0" anchor="ctr"/>
+          <a:lstStyle/>
+          <a:p>
+            <a:pPr algn="ctr"/>
+          </a:p>
+        </p:txBody>
+      </p:sp>
       <p:graphicFrame>
         <p:nvGraphicFramePr>
-          <p:cNvPr id="3" name="Table 2"/>
+          <p:cNvPr id="4" name="Table 3"/>
           <p:cNvGraphicFramePr>
             <a:graphicFrameLocks noGrp="1"/>
           </p:cNvGraphicFramePr>
@@ -6093,7 +6347,7 @@
         </p:nvGraphicFramePr>
         <p:xfrm>
           <a:off x="457200" y="1371600"/>
-          <a:ext cx="11247120" cy="4114800"/>
+          <a:ext cx="11247120" cy="3538728"/>
         </p:xfrm>
         <a:graphic>
           <a:graphicData uri="http://schemas.openxmlformats.org/drawingml/2006/table">
@@ -6106,7 +6360,7 @@
                 <a:gridCol w="1405890"/>
                 <a:gridCol w="7029450"/>
               </a:tblGrid>
-              <a:tr h="457200">
+              <a:tr h="393192">
                 <a:tc>
                   <a:txBody>
                     <a:bodyPr/>
@@ -6180,7 +6434,7 @@
                   </a:tcPr>
                 </a:tc>
               </a:tr>
-              <a:tr h="457200">
+              <a:tr h="393192">
                 <a:tc>
                   <a:txBody>
                     <a:bodyPr/>
@@ -6254,7 +6508,7 @@
                   </a:tcPr>
                 </a:tc>
               </a:tr>
-              <a:tr h="457200">
+              <a:tr h="393192">
                 <a:tc>
                   <a:txBody>
                     <a:bodyPr/>
@@ -6328,7 +6582,7 @@
                   </a:tcPr>
                 </a:tc>
               </a:tr>
-              <a:tr h="457200">
+              <a:tr h="393192">
                 <a:tc>
                   <a:txBody>
                     <a:bodyPr/>
@@ -6402,7 +6656,7 @@
                   </a:tcPr>
                 </a:tc>
               </a:tr>
-              <a:tr h="457200">
+              <a:tr h="393192">
                 <a:tc>
                   <a:txBody>
                     <a:bodyPr/>
@@ -6476,7 +6730,7 @@
                   </a:tcPr>
                 </a:tc>
               </a:tr>
-              <a:tr h="457200">
+              <a:tr h="393192">
                 <a:tc>
                   <a:txBody>
                     <a:bodyPr/>
@@ -6550,7 +6804,7 @@
                   </a:tcPr>
                 </a:tc>
               </a:tr>
-              <a:tr h="457200">
+              <a:tr h="393192">
                 <a:tc>
                   <a:txBody>
                     <a:bodyPr/>
@@ -6624,7 +6878,7 @@
                   </a:tcPr>
                 </a:tc>
               </a:tr>
-              <a:tr h="457200">
+              <a:tr h="393192">
                 <a:tc>
                   <a:txBody>
                     <a:bodyPr/>
@@ -6698,7 +6952,7 @@
                   </a:tcPr>
                 </a:tc>
               </a:tr>
-              <a:tr h="457200">
+              <a:tr h="393192">
                 <a:tc>
                   <a:txBody>
                     <a:bodyPr/>
@@ -6776,6 +7030,138 @@
           </a:graphicData>
         </a:graphic>
       </p:graphicFrame>
+      <p:sp>
+        <p:nvSpPr>
+          <p:cNvPr id="5" name="Rectangle 4"/>
+          <p:cNvSpPr/>
+          <p:nvPr/>
+        </p:nvSpPr>
+        <p:spPr>
+          <a:xfrm>
+            <a:off x="457200" y="6108192"/>
+            <a:ext cx="11247120" cy="237744"/>
+          </a:xfrm>
+          <a:prstGeom prst="rect">
+            <a:avLst/>
+          </a:prstGeom>
+          <a:solidFill>
+            <a:srgbClr val="F2F2F2"/>
+          </a:solidFill>
+          <a:ln>
+            <a:noFill/>
+          </a:ln>
+        </p:spPr>
+        <p:style>
+          <a:lnRef idx="1">
+            <a:schemeClr val="accent1"/>
+          </a:lnRef>
+          <a:fillRef idx="3">
+            <a:schemeClr val="accent1"/>
+          </a:fillRef>
+          <a:effectRef idx="2">
+            <a:schemeClr val="accent1"/>
+          </a:effectRef>
+          <a:fontRef idx="minor">
+            <a:schemeClr val="lt1"/>
+          </a:fontRef>
+        </p:style>
+        <p:txBody>
+          <a:bodyPr rtlCol="0" anchor="ctr" wrap="square" lIns="109728" rIns="109728" tIns="18288"/>
+          <a:lstStyle/>
+          <a:p>
+            <a:pPr algn="l">
+              <a:defRPr sz="1000">
+                <a:solidFill>
+                  <a:srgbClr val="666666"/>
+                </a:solidFill>
+                <a:latin typeface="Calibri"/>
+              </a:defRPr>
+            </a:pPr>
+            <a:r>
+              <a:t>Table 4.4: Feature counts by configuration | tab:feature-counts | Source: Thesis manuscript and computed results</a:t>
+            </a:r>
+          </a:p>
+        </p:txBody>
+      </p:sp>
+      <p:sp>
+        <p:nvSpPr>
+          <p:cNvPr id="6" name="Rectangle 5"/>
+          <p:cNvSpPr/>
+          <p:nvPr/>
+        </p:nvSpPr>
+        <p:spPr>
+          <a:xfrm>
+            <a:off x="457200" y="6455664"/>
+            <a:ext cx="11247120" cy="9144"/>
+          </a:xfrm>
+          <a:prstGeom prst="rect">
+            <a:avLst/>
+          </a:prstGeom>
+          <a:solidFill>
+            <a:srgbClr val="E86C00"/>
+          </a:solidFill>
+          <a:ln>
+            <a:noFill/>
+          </a:ln>
+        </p:spPr>
+        <p:style>
+          <a:lnRef idx="1">
+            <a:schemeClr val="accent1"/>
+          </a:lnRef>
+          <a:fillRef idx="3">
+            <a:schemeClr val="accent1"/>
+          </a:fillRef>
+          <a:effectRef idx="2">
+            <a:schemeClr val="accent1"/>
+          </a:effectRef>
+          <a:fontRef idx="minor">
+            <a:schemeClr val="lt1"/>
+          </a:fontRef>
+        </p:style>
+        <p:txBody>
+          <a:bodyPr rtlCol="0" anchor="ctr"/>
+          <a:lstStyle/>
+          <a:p>
+            <a:pPr algn="ctr"/>
+          </a:p>
+        </p:txBody>
+      </p:sp>
+      <p:sp>
+        <p:nvSpPr>
+          <p:cNvPr id="7" name="TextBox 6"/>
+          <p:cNvSpPr txBox="1"/>
+          <p:nvPr/>
+        </p:nvSpPr>
+        <p:spPr>
+          <a:xfrm>
+            <a:off x="457200" y="6492240"/>
+            <a:ext cx="11247120" cy="219456"/>
+          </a:xfrm>
+          <a:prstGeom prst="rect">
+            <a:avLst/>
+          </a:prstGeom>
+          <a:noFill/>
+        </p:spPr>
+        <p:txBody>
+          <a:bodyPr wrap="square">
+            <a:spAutoFit/>
+          </a:bodyPr>
+          <a:lstStyle/>
+          <a:p>
+            <a:pPr algn="r">
+              <a:defRPr sz="900" b="0">
+                <a:solidFill>
+                  <a:srgbClr val="E86C00"/>
+                </a:solidFill>
+                <a:latin typeface="Calibri"/>
+              </a:defRPr>
+            </a:pPr>
+            <a:r>
+              <a:t>Διπλωματική Εργασία - Μάρτιος 2026</a:t>
+            </a:r>
+          </a:p>
+        </p:txBody>
+      </p:sp>
     </p:spTree>
   </p:cSld>
   <p:clrMapOvr>
@@ -6790,7 +7176,7 @@
     <p:bg>
       <p:bgPr>
         <a:solidFill>
-          <a:srgbClr val="FFFFFF"/>
+          <a:srgbClr val="F8FBFF"/>
         </a:solidFill>
         <a:effectLst/>
       </p:bgPr>
@@ -6855,9 +7241,52 @@
           </a:p>
         </p:txBody>
       </p:sp>
+      <p:sp>
+        <p:nvSpPr>
+          <p:cNvPr id="3" name="Rectangle 2"/>
+          <p:cNvSpPr/>
+          <p:nvPr/>
+        </p:nvSpPr>
+        <p:spPr>
+          <a:xfrm>
+            <a:off x="0" y="987552"/>
+            <a:ext cx="12191695" cy="18288"/>
+          </a:xfrm>
+          <a:prstGeom prst="rect">
+            <a:avLst/>
+          </a:prstGeom>
+          <a:solidFill>
+            <a:srgbClr val="3B82F6"/>
+          </a:solidFill>
+          <a:ln>
+            <a:noFill/>
+          </a:ln>
+        </p:spPr>
+        <p:style>
+          <a:lnRef idx="1">
+            <a:schemeClr val="accent1"/>
+          </a:lnRef>
+          <a:fillRef idx="3">
+            <a:schemeClr val="accent1"/>
+          </a:fillRef>
+          <a:effectRef idx="2">
+            <a:schemeClr val="accent1"/>
+          </a:effectRef>
+          <a:fontRef idx="minor">
+            <a:schemeClr val="lt1"/>
+          </a:fontRef>
+        </p:style>
+        <p:txBody>
+          <a:bodyPr rtlCol="0" anchor="ctr"/>
+          <a:lstStyle/>
+          <a:p>
+            <a:pPr algn="ctr"/>
+          </a:p>
+        </p:txBody>
+      </p:sp>
       <p:graphicFrame>
         <p:nvGraphicFramePr>
-          <p:cNvPr id="3" name="Table 2"/>
+          <p:cNvPr id="4" name="Table 3"/>
           <p:cNvGraphicFramePr>
             <a:graphicFrameLocks noGrp="1"/>
           </p:cNvGraphicFramePr>
@@ -6865,7 +7294,7 @@
         </p:nvGraphicFramePr>
         <p:xfrm>
           <a:off x="457200" y="1371600"/>
-          <a:ext cx="11247118" cy="2743200"/>
+          <a:ext cx="11247118" cy="2359152"/>
         </p:xfrm>
         <a:graphic>
           <a:graphicData uri="http://schemas.openxmlformats.org/drawingml/2006/table">
@@ -6878,7 +7307,7 @@
                 <a:gridCol w="3951690"/>
                 <a:gridCol w="3647714"/>
               </a:tblGrid>
-              <a:tr h="457200">
+              <a:tr h="393192">
                 <a:tc>
                   <a:txBody>
                     <a:bodyPr/>
@@ -6952,7 +7381,7 @@
                   </a:tcPr>
                 </a:tc>
               </a:tr>
-              <a:tr h="457200">
+              <a:tr h="393192">
                 <a:tc>
                   <a:txBody>
                     <a:bodyPr/>
@@ -7026,7 +7455,7 @@
                   </a:tcPr>
                 </a:tc>
               </a:tr>
-              <a:tr h="457200">
+              <a:tr h="393192">
                 <a:tc>
                   <a:txBody>
                     <a:bodyPr/>
@@ -7100,7 +7529,7 @@
                   </a:tcPr>
                 </a:tc>
               </a:tr>
-              <a:tr h="457200">
+              <a:tr h="393192">
                 <a:tc>
                   <a:txBody>
                     <a:bodyPr/>
@@ -7174,7 +7603,7 @@
                   </a:tcPr>
                 </a:tc>
               </a:tr>
-              <a:tr h="457200">
+              <a:tr h="393192">
                 <a:tc>
                   <a:txBody>
                     <a:bodyPr/>
@@ -7248,7 +7677,7 @@
                   </a:tcPr>
                 </a:tc>
               </a:tr>
-              <a:tr h="457200">
+              <a:tr h="393192">
                 <a:tc>
                   <a:txBody>
                     <a:bodyPr/>
@@ -7326,6 +7755,138 @@
           </a:graphicData>
         </a:graphic>
       </p:graphicFrame>
+      <p:sp>
+        <p:nvSpPr>
+          <p:cNvPr id="5" name="Rectangle 4"/>
+          <p:cNvSpPr/>
+          <p:nvPr/>
+        </p:nvSpPr>
+        <p:spPr>
+          <a:xfrm>
+            <a:off x="457200" y="6108192"/>
+            <a:ext cx="11247120" cy="237744"/>
+          </a:xfrm>
+          <a:prstGeom prst="rect">
+            <a:avLst/>
+          </a:prstGeom>
+          <a:solidFill>
+            <a:srgbClr val="F2F2F2"/>
+          </a:solidFill>
+          <a:ln>
+            <a:noFill/>
+          </a:ln>
+        </p:spPr>
+        <p:style>
+          <a:lnRef idx="1">
+            <a:schemeClr val="accent1"/>
+          </a:lnRef>
+          <a:fillRef idx="3">
+            <a:schemeClr val="accent1"/>
+          </a:fillRef>
+          <a:effectRef idx="2">
+            <a:schemeClr val="accent1"/>
+          </a:effectRef>
+          <a:fontRef idx="minor">
+            <a:schemeClr val="lt1"/>
+          </a:fontRef>
+        </p:style>
+        <p:txBody>
+          <a:bodyPr rtlCol="0" anchor="ctr" wrap="square" lIns="109728" rIns="109728" tIns="18288"/>
+          <a:lstStyle/>
+          <a:p>
+            <a:pPr algn="l">
+              <a:defRPr sz="1000">
+                <a:solidFill>
+                  <a:srgbClr val="666666"/>
+                </a:solidFill>
+                <a:latin typeface="Calibri"/>
+              </a:defRPr>
+            </a:pPr>
+            <a:r>
+              <a:t>Table 4.5: Model specifications | tab:model-specs | Source: Thesis manuscript and computed results</a:t>
+            </a:r>
+          </a:p>
+        </p:txBody>
+      </p:sp>
+      <p:sp>
+        <p:nvSpPr>
+          <p:cNvPr id="6" name="Rectangle 5"/>
+          <p:cNvSpPr/>
+          <p:nvPr/>
+        </p:nvSpPr>
+        <p:spPr>
+          <a:xfrm>
+            <a:off x="457200" y="6455664"/>
+            <a:ext cx="11247120" cy="9144"/>
+          </a:xfrm>
+          <a:prstGeom prst="rect">
+            <a:avLst/>
+          </a:prstGeom>
+          <a:solidFill>
+            <a:srgbClr val="E86C00"/>
+          </a:solidFill>
+          <a:ln>
+            <a:noFill/>
+          </a:ln>
+        </p:spPr>
+        <p:style>
+          <a:lnRef idx="1">
+            <a:schemeClr val="accent1"/>
+          </a:lnRef>
+          <a:fillRef idx="3">
+            <a:schemeClr val="accent1"/>
+          </a:fillRef>
+          <a:effectRef idx="2">
+            <a:schemeClr val="accent1"/>
+          </a:effectRef>
+          <a:fontRef idx="minor">
+            <a:schemeClr val="lt1"/>
+          </a:fontRef>
+        </p:style>
+        <p:txBody>
+          <a:bodyPr rtlCol="0" anchor="ctr"/>
+          <a:lstStyle/>
+          <a:p>
+            <a:pPr algn="ctr"/>
+          </a:p>
+        </p:txBody>
+      </p:sp>
+      <p:sp>
+        <p:nvSpPr>
+          <p:cNvPr id="7" name="TextBox 6"/>
+          <p:cNvSpPr txBox="1"/>
+          <p:nvPr/>
+        </p:nvSpPr>
+        <p:spPr>
+          <a:xfrm>
+            <a:off x="457200" y="6492240"/>
+            <a:ext cx="11247120" cy="219456"/>
+          </a:xfrm>
+          <a:prstGeom prst="rect">
+            <a:avLst/>
+          </a:prstGeom>
+          <a:noFill/>
+        </p:spPr>
+        <p:txBody>
+          <a:bodyPr wrap="square">
+            <a:spAutoFit/>
+          </a:bodyPr>
+          <a:lstStyle/>
+          <a:p>
+            <a:pPr algn="r">
+              <a:defRPr sz="900" b="0">
+                <a:solidFill>
+                  <a:srgbClr val="E86C00"/>
+                </a:solidFill>
+                <a:latin typeface="Calibri"/>
+              </a:defRPr>
+            </a:pPr>
+            <a:r>
+              <a:t>Διπλωματική Εργασία - Μάρτιος 2026</a:t>
+            </a:r>
+          </a:p>
+        </p:txBody>
+      </p:sp>
     </p:spTree>
   </p:cSld>
   <p:clrMapOvr>
@@ -7340,7 +7901,7 @@
     <p:bg>
       <p:bgPr>
         <a:solidFill>
-          <a:srgbClr val="FFFFFF"/>
+          <a:srgbClr val="F8FBFF"/>
         </a:solidFill>
         <a:effectLst/>
       </p:bgPr>
@@ -7407,7 +7968,50 @@
       </p:sp>
       <p:sp>
         <p:nvSpPr>
-          <p:cNvPr id="3" name="TextBox 2"/>
+          <p:cNvPr id="3" name="Rectangle 2"/>
+          <p:cNvSpPr/>
+          <p:nvPr/>
+        </p:nvSpPr>
+        <p:spPr>
+          <a:xfrm>
+            <a:off x="0" y="987552"/>
+            <a:ext cx="12191695" cy="18288"/>
+          </a:xfrm>
+          <a:prstGeom prst="rect">
+            <a:avLst/>
+          </a:prstGeom>
+          <a:solidFill>
+            <a:srgbClr val="3B82F6"/>
+          </a:solidFill>
+          <a:ln>
+            <a:noFill/>
+          </a:ln>
+        </p:spPr>
+        <p:style>
+          <a:lnRef idx="1">
+            <a:schemeClr val="accent1"/>
+          </a:lnRef>
+          <a:fillRef idx="3">
+            <a:schemeClr val="accent1"/>
+          </a:fillRef>
+          <a:effectRef idx="2">
+            <a:schemeClr val="accent1"/>
+          </a:effectRef>
+          <a:fontRef idx="minor">
+            <a:schemeClr val="lt1"/>
+          </a:fontRef>
+        </p:style>
+        <p:txBody>
+          <a:bodyPr rtlCol="0" anchor="ctr"/>
+          <a:lstStyle/>
+          <a:p>
+            <a:pPr algn="ctr"/>
+          </a:p>
+        </p:txBody>
+      </p:sp>
+      <p:sp>
+        <p:nvSpPr>
+          <p:cNvPr id="4" name="TextBox 3"/>
           <p:cNvSpPr txBox="1"/>
           <p:nvPr/>
         </p:nvSpPr>
@@ -7599,6 +8203,85 @@
           </a:p>
         </p:txBody>
       </p:sp>
+      <p:sp>
+        <p:nvSpPr>
+          <p:cNvPr id="5" name="Rectangle 4"/>
+          <p:cNvSpPr/>
+          <p:nvPr/>
+        </p:nvSpPr>
+        <p:spPr>
+          <a:xfrm>
+            <a:off x="457200" y="6455664"/>
+            <a:ext cx="11247120" cy="9144"/>
+          </a:xfrm>
+          <a:prstGeom prst="rect">
+            <a:avLst/>
+          </a:prstGeom>
+          <a:solidFill>
+            <a:srgbClr val="E86C00"/>
+          </a:solidFill>
+          <a:ln>
+            <a:noFill/>
+          </a:ln>
+        </p:spPr>
+        <p:style>
+          <a:lnRef idx="1">
+            <a:schemeClr val="accent1"/>
+          </a:lnRef>
+          <a:fillRef idx="3">
+            <a:schemeClr val="accent1"/>
+          </a:fillRef>
+          <a:effectRef idx="2">
+            <a:schemeClr val="accent1"/>
+          </a:effectRef>
+          <a:fontRef idx="minor">
+            <a:schemeClr val="lt1"/>
+          </a:fontRef>
+        </p:style>
+        <p:txBody>
+          <a:bodyPr rtlCol="0" anchor="ctr"/>
+          <a:lstStyle/>
+          <a:p>
+            <a:pPr algn="ctr"/>
+          </a:p>
+        </p:txBody>
+      </p:sp>
+      <p:sp>
+        <p:nvSpPr>
+          <p:cNvPr id="6" name="TextBox 5"/>
+          <p:cNvSpPr txBox="1"/>
+          <p:nvPr/>
+        </p:nvSpPr>
+        <p:spPr>
+          <a:xfrm>
+            <a:off x="457200" y="6492240"/>
+            <a:ext cx="11247120" cy="219456"/>
+          </a:xfrm>
+          <a:prstGeom prst="rect">
+            <a:avLst/>
+          </a:prstGeom>
+          <a:noFill/>
+        </p:spPr>
+        <p:txBody>
+          <a:bodyPr wrap="square">
+            <a:spAutoFit/>
+          </a:bodyPr>
+          <a:lstStyle/>
+          <a:p>
+            <a:pPr algn="r">
+              <a:defRPr sz="900" b="0">
+                <a:solidFill>
+                  <a:srgbClr val="E86C00"/>
+                </a:solidFill>
+                <a:latin typeface="Calibri"/>
+              </a:defRPr>
+            </a:pPr>
+            <a:r>
+              <a:t>Διπλωματική Εργασία - Μάρτιος 2026</a:t>
+            </a:r>
+          </a:p>
+        </p:txBody>
+      </p:sp>
     </p:spTree>
   </p:cSld>
   <p:clrMapOvr>
@@ -7613,7 +8296,7 @@
     <p:bg>
       <p:bgPr>
         <a:solidFill>
-          <a:srgbClr val="FFFFFF"/>
+          <a:srgbClr val="F8FBFF"/>
         </a:solidFill>
         <a:effectLst/>
       </p:bgPr>
@@ -7678,9 +8361,52 @@
           </a:p>
         </p:txBody>
       </p:sp>
+      <p:sp>
+        <p:nvSpPr>
+          <p:cNvPr id="3" name="Rectangle 2"/>
+          <p:cNvSpPr/>
+          <p:nvPr/>
+        </p:nvSpPr>
+        <p:spPr>
+          <a:xfrm>
+            <a:off x="0" y="987552"/>
+            <a:ext cx="12191695" cy="18288"/>
+          </a:xfrm>
+          <a:prstGeom prst="rect">
+            <a:avLst/>
+          </a:prstGeom>
+          <a:solidFill>
+            <a:srgbClr val="3B82F6"/>
+          </a:solidFill>
+          <a:ln>
+            <a:noFill/>
+          </a:ln>
+        </p:spPr>
+        <p:style>
+          <a:lnRef idx="1">
+            <a:schemeClr val="accent1"/>
+          </a:lnRef>
+          <a:fillRef idx="3">
+            <a:schemeClr val="accent1"/>
+          </a:fillRef>
+          <a:effectRef idx="2">
+            <a:schemeClr val="accent1"/>
+          </a:effectRef>
+          <a:fontRef idx="minor">
+            <a:schemeClr val="lt1"/>
+          </a:fontRef>
+        </p:style>
+        <p:txBody>
+          <a:bodyPr rtlCol="0" anchor="ctr"/>
+          <a:lstStyle/>
+          <a:p>
+            <a:pPr algn="ctr"/>
+          </a:p>
+        </p:txBody>
+      </p:sp>
       <p:graphicFrame>
         <p:nvGraphicFramePr>
-          <p:cNvPr id="3" name="Table 2"/>
+          <p:cNvPr id="4" name="Table 3"/>
           <p:cNvGraphicFramePr>
             <a:graphicFrameLocks noGrp="1"/>
           </p:cNvGraphicFramePr>
@@ -7688,7 +8414,7 @@
         </p:nvGraphicFramePr>
         <p:xfrm>
           <a:off x="457200" y="1371600"/>
-          <a:ext cx="11247120" cy="2286000"/>
+          <a:ext cx="11247120" cy="1965960"/>
         </p:xfrm>
         <a:graphic>
           <a:graphicData uri="http://schemas.openxmlformats.org/drawingml/2006/table">
@@ -7702,7 +8428,7 @@
                 <a:gridCol w="1874520"/>
                 <a:gridCol w="4686300"/>
               </a:tblGrid>
-              <a:tr h="457200">
+              <a:tr h="393192">
                 <a:tc>
                   <a:txBody>
                     <a:bodyPr/>
@@ -7800,7 +8526,7 @@
                   </a:tcPr>
                 </a:tc>
               </a:tr>
-              <a:tr h="457200">
+              <a:tr h="393192">
                 <a:tc>
                   <a:txBody>
                     <a:bodyPr/>
@@ -7898,7 +8624,7 @@
                   </a:tcPr>
                 </a:tc>
               </a:tr>
-              <a:tr h="457200">
+              <a:tr h="393192">
                 <a:tc>
                   <a:txBody>
                     <a:bodyPr/>
@@ -7996,7 +8722,7 @@
                   </a:tcPr>
                 </a:tc>
               </a:tr>
-              <a:tr h="457200">
+              <a:tr h="393192">
                 <a:tc>
                   <a:txBody>
                     <a:bodyPr/>
@@ -8094,7 +8820,7 @@
                   </a:tcPr>
                 </a:tc>
               </a:tr>
-              <a:tr h="457200">
+              <a:tr h="393192">
                 <a:tc>
                   <a:txBody>
                     <a:bodyPr/>
@@ -8198,7 +8924,139 @@
       </p:graphicFrame>
       <p:sp>
         <p:nvSpPr>
-          <p:cNvPr id="4" name="TextBox 3"/>
+          <p:cNvPr id="5" name="Rectangle 4"/>
+          <p:cNvSpPr/>
+          <p:nvPr/>
+        </p:nvSpPr>
+        <p:spPr>
+          <a:xfrm>
+            <a:off x="457200" y="6108192"/>
+            <a:ext cx="11247120" cy="237744"/>
+          </a:xfrm>
+          <a:prstGeom prst="rect">
+            <a:avLst/>
+          </a:prstGeom>
+          <a:solidFill>
+            <a:srgbClr val="F2F2F2"/>
+          </a:solidFill>
+          <a:ln>
+            <a:noFill/>
+          </a:ln>
+        </p:spPr>
+        <p:style>
+          <a:lnRef idx="1">
+            <a:schemeClr val="accent1"/>
+          </a:lnRef>
+          <a:fillRef idx="3">
+            <a:schemeClr val="accent1"/>
+          </a:fillRef>
+          <a:effectRef idx="2">
+            <a:schemeClr val="accent1"/>
+          </a:effectRef>
+          <a:fontRef idx="minor">
+            <a:schemeClr val="lt1"/>
+          </a:fontRef>
+        </p:style>
+        <p:txBody>
+          <a:bodyPr rtlCol="0" anchor="ctr" wrap="square" lIns="109728" rIns="109728" tIns="18288"/>
+          <a:lstStyle/>
+          <a:p>
+            <a:pPr algn="l">
+              <a:defRPr sz="1000">
+                <a:solidFill>
+                  <a:srgbClr val="666666"/>
+                </a:solidFill>
+                <a:latin typeface="Calibri"/>
+              </a:defRPr>
+            </a:pPr>
+            <a:r>
+              <a:t>Table 5.1: Experimental conditions C1–C4 | tab:conditions | Source: Thesis manuscript and computed results</a:t>
+            </a:r>
+          </a:p>
+        </p:txBody>
+      </p:sp>
+      <p:sp>
+        <p:nvSpPr>
+          <p:cNvPr id="6" name="Rectangle 5"/>
+          <p:cNvSpPr/>
+          <p:nvPr/>
+        </p:nvSpPr>
+        <p:spPr>
+          <a:xfrm>
+            <a:off x="457200" y="6455664"/>
+            <a:ext cx="11247120" cy="9144"/>
+          </a:xfrm>
+          <a:prstGeom prst="rect">
+            <a:avLst/>
+          </a:prstGeom>
+          <a:solidFill>
+            <a:srgbClr val="E86C00"/>
+          </a:solidFill>
+          <a:ln>
+            <a:noFill/>
+          </a:ln>
+        </p:spPr>
+        <p:style>
+          <a:lnRef idx="1">
+            <a:schemeClr val="accent1"/>
+          </a:lnRef>
+          <a:fillRef idx="3">
+            <a:schemeClr val="accent1"/>
+          </a:fillRef>
+          <a:effectRef idx="2">
+            <a:schemeClr val="accent1"/>
+          </a:effectRef>
+          <a:fontRef idx="minor">
+            <a:schemeClr val="lt1"/>
+          </a:fontRef>
+        </p:style>
+        <p:txBody>
+          <a:bodyPr rtlCol="0" anchor="ctr"/>
+          <a:lstStyle/>
+          <a:p>
+            <a:pPr algn="ctr"/>
+          </a:p>
+        </p:txBody>
+      </p:sp>
+      <p:sp>
+        <p:nvSpPr>
+          <p:cNvPr id="7" name="TextBox 6"/>
+          <p:cNvSpPr txBox="1"/>
+          <p:nvPr/>
+        </p:nvSpPr>
+        <p:spPr>
+          <a:xfrm>
+            <a:off x="457200" y="6492240"/>
+            <a:ext cx="11247120" cy="219456"/>
+          </a:xfrm>
+          <a:prstGeom prst="rect">
+            <a:avLst/>
+          </a:prstGeom>
+          <a:noFill/>
+        </p:spPr>
+        <p:txBody>
+          <a:bodyPr wrap="square">
+            <a:spAutoFit/>
+          </a:bodyPr>
+          <a:lstStyle/>
+          <a:p>
+            <a:pPr algn="r">
+              <a:defRPr sz="900" b="0">
+                <a:solidFill>
+                  <a:srgbClr val="E86C00"/>
+                </a:solidFill>
+                <a:latin typeface="Calibri"/>
+              </a:defRPr>
+            </a:pPr>
+            <a:r>
+              <a:t>Διπλωματική Εργασία - Μάρτιος 2026</a:t>
+            </a:r>
+          </a:p>
+        </p:txBody>
+      </p:sp>
+      <p:sp>
+        <p:nvSpPr>
+          <p:cNvPr id="8" name="TextBox 7"/>
           <p:cNvSpPr txBox="1"/>
           <p:nvPr/>
         </p:nvSpPr>
@@ -8373,6 +9231,85 @@
           </a:p>
         </p:txBody>
       </p:sp>
+      <p:sp>
+        <p:nvSpPr>
+          <p:cNvPr id="5" name="Rectangle 4"/>
+          <p:cNvSpPr/>
+          <p:nvPr/>
+        </p:nvSpPr>
+        <p:spPr>
+          <a:xfrm>
+            <a:off x="457200" y="6455664"/>
+            <a:ext cx="11247120" cy="9144"/>
+          </a:xfrm>
+          <a:prstGeom prst="rect">
+            <a:avLst/>
+          </a:prstGeom>
+          <a:solidFill>
+            <a:srgbClr val="E86C00"/>
+          </a:solidFill>
+          <a:ln>
+            <a:noFill/>
+          </a:ln>
+        </p:spPr>
+        <p:style>
+          <a:lnRef idx="1">
+            <a:schemeClr val="accent1"/>
+          </a:lnRef>
+          <a:fillRef idx="3">
+            <a:schemeClr val="accent1"/>
+          </a:fillRef>
+          <a:effectRef idx="2">
+            <a:schemeClr val="accent1"/>
+          </a:effectRef>
+          <a:fontRef idx="minor">
+            <a:schemeClr val="lt1"/>
+          </a:fontRef>
+        </p:style>
+        <p:txBody>
+          <a:bodyPr rtlCol="0" anchor="ctr"/>
+          <a:lstStyle/>
+          <a:p>
+            <a:pPr algn="ctr"/>
+          </a:p>
+        </p:txBody>
+      </p:sp>
+      <p:sp>
+        <p:nvSpPr>
+          <p:cNvPr id="6" name="TextBox 5"/>
+          <p:cNvSpPr txBox="1"/>
+          <p:nvPr/>
+        </p:nvSpPr>
+        <p:spPr>
+          <a:xfrm>
+            <a:off x="457200" y="6492240"/>
+            <a:ext cx="11247120" cy="219456"/>
+          </a:xfrm>
+          <a:prstGeom prst="rect">
+            <a:avLst/>
+          </a:prstGeom>
+          <a:noFill/>
+        </p:spPr>
+        <p:txBody>
+          <a:bodyPr wrap="square">
+            <a:spAutoFit/>
+          </a:bodyPr>
+          <a:lstStyle/>
+          <a:p>
+            <a:pPr algn="r">
+              <a:defRPr sz="900" b="0">
+                <a:solidFill>
+                  <a:srgbClr val="E86C00"/>
+                </a:solidFill>
+                <a:latin typeface="Calibri"/>
+              </a:defRPr>
+            </a:pPr>
+            <a:r>
+              <a:t>Διπλωματική Εργασία - Μάρτιος 2026</a:t>
+            </a:r>
+          </a:p>
+        </p:txBody>
+      </p:sp>
     </p:spTree>
   </p:cSld>
   <p:clrMapOvr>
@@ -8387,7 +9324,7 @@
     <p:bg>
       <p:bgPr>
         <a:solidFill>
-          <a:srgbClr val="FFFFFF"/>
+          <a:srgbClr val="F8FBFF"/>
         </a:solidFill>
         <a:effectLst/>
       </p:bgPr>
@@ -8452,9 +9389,52 @@
           </a:p>
         </p:txBody>
       </p:sp>
+      <p:sp>
+        <p:nvSpPr>
+          <p:cNvPr id="3" name="Rectangle 2"/>
+          <p:cNvSpPr/>
+          <p:nvPr/>
+        </p:nvSpPr>
+        <p:spPr>
+          <a:xfrm>
+            <a:off x="0" y="987552"/>
+            <a:ext cx="12191695" cy="18288"/>
+          </a:xfrm>
+          <a:prstGeom prst="rect">
+            <a:avLst/>
+          </a:prstGeom>
+          <a:solidFill>
+            <a:srgbClr val="3B82F6"/>
+          </a:solidFill>
+          <a:ln>
+            <a:noFill/>
+          </a:ln>
+        </p:spPr>
+        <p:style>
+          <a:lnRef idx="1">
+            <a:schemeClr val="accent1"/>
+          </a:lnRef>
+          <a:fillRef idx="3">
+            <a:schemeClr val="accent1"/>
+          </a:fillRef>
+          <a:effectRef idx="2">
+            <a:schemeClr val="accent1"/>
+          </a:effectRef>
+          <a:fontRef idx="minor">
+            <a:schemeClr val="lt1"/>
+          </a:fontRef>
+        </p:style>
+        <p:txBody>
+          <a:bodyPr rtlCol="0" anchor="ctr"/>
+          <a:lstStyle/>
+          <a:p>
+            <a:pPr algn="ctr"/>
+          </a:p>
+        </p:txBody>
+      </p:sp>
       <p:graphicFrame>
         <p:nvGraphicFramePr>
-          <p:cNvPr id="3" name="Table 2"/>
+          <p:cNvPr id="4" name="Table 3"/>
           <p:cNvGraphicFramePr>
             <a:graphicFrameLocks noGrp="1"/>
           </p:cNvGraphicFramePr>
@@ -8462,7 +9442,7 @@
         </p:nvGraphicFramePr>
         <p:xfrm>
           <a:off x="457200" y="1371600"/>
-          <a:ext cx="11247118" cy="1828800"/>
+          <a:ext cx="11247118" cy="1572768"/>
         </p:xfrm>
         <a:graphic>
           <a:graphicData uri="http://schemas.openxmlformats.org/drawingml/2006/table">
@@ -8476,7 +9456,7 @@
                 <a:gridCol w="2445026"/>
                 <a:gridCol w="3178533"/>
               </a:tblGrid>
-              <a:tr h="457200">
+              <a:tr h="393192">
                 <a:tc>
                   <a:txBody>
                     <a:bodyPr/>
@@ -8574,7 +9554,7 @@
                   </a:tcPr>
                 </a:tc>
               </a:tr>
-              <a:tr h="457200">
+              <a:tr h="393192">
                 <a:tc>
                   <a:txBody>
                     <a:bodyPr/>
@@ -8672,7 +9652,7 @@
                   </a:tcPr>
                 </a:tc>
               </a:tr>
-              <a:tr h="457200">
+              <a:tr h="393192">
                 <a:tc>
                   <a:txBody>
                     <a:bodyPr/>
@@ -8770,7 +9750,7 @@
                   </a:tcPr>
                 </a:tc>
               </a:tr>
-              <a:tr h="457200">
+              <a:tr h="393192">
                 <a:tc>
                   <a:txBody>
                     <a:bodyPr/>
@@ -8874,7 +9854,139 @@
       </p:graphicFrame>
       <p:sp>
         <p:nvSpPr>
-          <p:cNvPr id="4" name="TextBox 3"/>
+          <p:cNvPr id="5" name="Rectangle 4"/>
+          <p:cNvSpPr/>
+          <p:nvPr/>
+        </p:nvSpPr>
+        <p:spPr>
+          <a:xfrm>
+            <a:off x="457200" y="6108192"/>
+            <a:ext cx="11247120" cy="237744"/>
+          </a:xfrm>
+          <a:prstGeom prst="rect">
+            <a:avLst/>
+          </a:prstGeom>
+          <a:solidFill>
+            <a:srgbClr val="F2F2F2"/>
+          </a:solidFill>
+          <a:ln>
+            <a:noFill/>
+          </a:ln>
+        </p:spPr>
+        <p:style>
+          <a:lnRef idx="1">
+            <a:schemeClr val="accent1"/>
+          </a:lnRef>
+          <a:fillRef idx="3">
+            <a:schemeClr val="accent1"/>
+          </a:fillRef>
+          <a:effectRef idx="2">
+            <a:schemeClr val="accent1"/>
+          </a:effectRef>
+          <a:fontRef idx="minor">
+            <a:schemeClr val="lt1"/>
+          </a:fontRef>
+        </p:style>
+        <p:txBody>
+          <a:bodyPr rtlCol="0" anchor="ctr" wrap="square" lIns="109728" rIns="109728" tIns="18288"/>
+          <a:lstStyle/>
+          <a:p>
+            <a:pPr algn="l">
+              <a:defRPr sz="1000">
+                <a:solidFill>
+                  <a:srgbClr val="666666"/>
+                </a:solidFill>
+                <a:latin typeface="Calibri"/>
+              </a:defRPr>
+            </a:pPr>
+            <a:r>
+              <a:t>Table 6.1: Best ROC-AUC summary | tab:best-results-summary | Source: Thesis manuscript and computed results</a:t>
+            </a:r>
+          </a:p>
+        </p:txBody>
+      </p:sp>
+      <p:sp>
+        <p:nvSpPr>
+          <p:cNvPr id="6" name="Rectangle 5"/>
+          <p:cNvSpPr/>
+          <p:nvPr/>
+        </p:nvSpPr>
+        <p:spPr>
+          <a:xfrm>
+            <a:off x="457200" y="6455664"/>
+            <a:ext cx="11247120" cy="9144"/>
+          </a:xfrm>
+          <a:prstGeom prst="rect">
+            <a:avLst/>
+          </a:prstGeom>
+          <a:solidFill>
+            <a:srgbClr val="E86C00"/>
+          </a:solidFill>
+          <a:ln>
+            <a:noFill/>
+          </a:ln>
+        </p:spPr>
+        <p:style>
+          <a:lnRef idx="1">
+            <a:schemeClr val="accent1"/>
+          </a:lnRef>
+          <a:fillRef idx="3">
+            <a:schemeClr val="accent1"/>
+          </a:fillRef>
+          <a:effectRef idx="2">
+            <a:schemeClr val="accent1"/>
+          </a:effectRef>
+          <a:fontRef idx="minor">
+            <a:schemeClr val="lt1"/>
+          </a:fontRef>
+        </p:style>
+        <p:txBody>
+          <a:bodyPr rtlCol="0" anchor="ctr"/>
+          <a:lstStyle/>
+          <a:p>
+            <a:pPr algn="ctr"/>
+          </a:p>
+        </p:txBody>
+      </p:sp>
+      <p:sp>
+        <p:nvSpPr>
+          <p:cNvPr id="7" name="TextBox 6"/>
+          <p:cNvSpPr txBox="1"/>
+          <p:nvPr/>
+        </p:nvSpPr>
+        <p:spPr>
+          <a:xfrm>
+            <a:off x="457200" y="6492240"/>
+            <a:ext cx="11247120" cy="219456"/>
+          </a:xfrm>
+          <a:prstGeom prst="rect">
+            <a:avLst/>
+          </a:prstGeom>
+          <a:noFill/>
+        </p:spPr>
+        <p:txBody>
+          <a:bodyPr wrap="square">
+            <a:spAutoFit/>
+          </a:bodyPr>
+          <a:lstStyle/>
+          <a:p>
+            <a:pPr algn="r">
+              <a:defRPr sz="900" b="0">
+                <a:solidFill>
+                  <a:srgbClr val="E86C00"/>
+                </a:solidFill>
+                <a:latin typeface="Calibri"/>
+              </a:defRPr>
+            </a:pPr>
+            <a:r>
+              <a:t>Διπλωματική Εργασία - Μάρτιος 2026</a:t>
+            </a:r>
+          </a:p>
+        </p:txBody>
+      </p:sp>
+      <p:sp>
+        <p:nvSpPr>
+          <p:cNvPr id="8" name="TextBox 7"/>
           <p:cNvSpPr txBox="1"/>
           <p:nvPr/>
         </p:nvSpPr>
@@ -8941,7 +10053,7 @@
     <p:bg>
       <p:bgPr>
         <a:solidFill>
-          <a:srgbClr val="FFFFFF"/>
+          <a:srgbClr val="F8FBFF"/>
         </a:solidFill>
         <a:effectLst/>
       </p:bgPr>
@@ -9006,9 +10118,52 @@
           </a:p>
         </p:txBody>
       </p:sp>
+      <p:sp>
+        <p:nvSpPr>
+          <p:cNvPr id="3" name="Rectangle 2"/>
+          <p:cNvSpPr/>
+          <p:nvPr/>
+        </p:nvSpPr>
+        <p:spPr>
+          <a:xfrm>
+            <a:off x="0" y="987552"/>
+            <a:ext cx="12191695" cy="18288"/>
+          </a:xfrm>
+          <a:prstGeom prst="rect">
+            <a:avLst/>
+          </a:prstGeom>
+          <a:solidFill>
+            <a:srgbClr val="3B82F6"/>
+          </a:solidFill>
+          <a:ln>
+            <a:noFill/>
+          </a:ln>
+        </p:spPr>
+        <p:style>
+          <a:lnRef idx="1">
+            <a:schemeClr val="accent1"/>
+          </a:lnRef>
+          <a:fillRef idx="3">
+            <a:schemeClr val="accent1"/>
+          </a:fillRef>
+          <a:effectRef idx="2">
+            <a:schemeClr val="accent1"/>
+          </a:effectRef>
+          <a:fontRef idx="minor">
+            <a:schemeClr val="lt1"/>
+          </a:fontRef>
+        </p:style>
+        <p:txBody>
+          <a:bodyPr rtlCol="0" anchor="ctr"/>
+          <a:lstStyle/>
+          <a:p>
+            <a:pPr algn="ctr"/>
+          </a:p>
+        </p:txBody>
+      </p:sp>
       <p:pic>
         <p:nvPicPr>
-          <p:cNvPr id="3" name="Picture 2" descr="fig_roc_readtext.png"/>
+          <p:cNvPr id="4" name="Picture 3" descr="fig_roc_readtext.png"/>
           <p:cNvPicPr>
             <a:picLocks noChangeAspect="1"/>
           </p:cNvPicPr>
@@ -9032,28 +10187,45 @@
       </p:pic>
       <p:sp>
         <p:nvSpPr>
-          <p:cNvPr id="4" name="TextBox 3"/>
-          <p:cNvSpPr txBox="1"/>
+          <p:cNvPr id="5" name="Rectangle 4"/>
+          <p:cNvSpPr/>
           <p:nvPr/>
         </p:nvSpPr>
         <p:spPr>
           <a:xfrm>
-            <a:off x="365760" y="5943600"/>
-            <a:ext cx="5303520" cy="457200"/>
+            <a:off x="365760" y="5724144"/>
+            <a:ext cx="5161764" cy="292608"/>
           </a:xfrm>
           <a:prstGeom prst="rect">
             <a:avLst/>
           </a:prstGeom>
-          <a:noFill/>
+          <a:solidFill>
+            <a:srgbClr val="F2F2F2"/>
+          </a:solidFill>
+          <a:ln>
+            <a:noFill/>
+          </a:ln>
         </p:spPr>
-        <p:txBody>
-          <a:bodyPr wrap="square">
-            <a:spAutoFit/>
-          </a:bodyPr>
+        <p:style>
+          <a:lnRef idx="1">
+            <a:schemeClr val="accent1"/>
+          </a:lnRef>
+          <a:fillRef idx="3">
+            <a:schemeClr val="accent1"/>
+          </a:fillRef>
+          <a:effectRef idx="2">
+            <a:schemeClr val="accent1"/>
+          </a:effectRef>
+          <a:fontRef idx="minor">
+            <a:schemeClr val="lt1"/>
+          </a:fontRef>
+        </p:style>
+        <p:txBody>
+          <a:bodyPr rtlCol="0" anchor="ctr" wrap="square" lIns="73152" rIns="73152"/>
           <a:lstStyle/>
           <a:p>
             <a:pPr algn="ctr">
-              <a:defRPr sz="1200" b="0">
+              <a:defRPr sz="850">
                 <a:solidFill>
                   <a:srgbClr val="666666"/>
                 </a:solidFill>
@@ -9061,14 +10233,14 @@
               </a:defRPr>
             </a:pPr>
             <a:r>
-              <a:t>(a) ReadText — SVM leads (0.834)</a:t>
+              <a:t>(a) ReadText — SVM leads (0.834) | Ref: fig:roc-readtext-main</a:t>
             </a:r>
           </a:p>
         </p:txBody>
       </p:sp>
       <p:pic>
         <p:nvPicPr>
-          <p:cNvPr id="5" name="Picture 4" descr="fig_roc_spontaneous.png"/>
+          <p:cNvPr id="6" name="Picture 5" descr="fig_roc_spontaneous.png"/>
           <p:cNvPicPr>
             <a:picLocks noChangeAspect="1"/>
           </p:cNvPicPr>
@@ -9092,14 +10264,110 @@
       </p:pic>
       <p:sp>
         <p:nvSpPr>
-          <p:cNvPr id="6" name="TextBox 5"/>
+          <p:cNvPr id="7" name="Rectangle 6"/>
+          <p:cNvSpPr/>
+          <p:nvPr/>
+        </p:nvSpPr>
+        <p:spPr>
+          <a:xfrm>
+            <a:off x="6309360" y="5724144"/>
+            <a:ext cx="5161764" cy="292608"/>
+          </a:xfrm>
+          <a:prstGeom prst="rect">
+            <a:avLst/>
+          </a:prstGeom>
+          <a:solidFill>
+            <a:srgbClr val="F2F2F2"/>
+          </a:solidFill>
+          <a:ln>
+            <a:noFill/>
+          </a:ln>
+        </p:spPr>
+        <p:style>
+          <a:lnRef idx="1">
+            <a:schemeClr val="accent1"/>
+          </a:lnRef>
+          <a:fillRef idx="3">
+            <a:schemeClr val="accent1"/>
+          </a:fillRef>
+          <a:effectRef idx="2">
+            <a:schemeClr val="accent1"/>
+          </a:effectRef>
+          <a:fontRef idx="minor">
+            <a:schemeClr val="lt1"/>
+          </a:fontRef>
+        </p:style>
+        <p:txBody>
+          <a:bodyPr rtlCol="0" anchor="ctr" wrap="square" lIns="73152" rIns="73152"/>
+          <a:lstStyle/>
+          <a:p>
+            <a:pPr algn="ctr">
+              <a:defRPr sz="850">
+                <a:solidFill>
+                  <a:srgbClr val="666666"/>
+                </a:solidFill>
+                <a:latin typeface="Calibri"/>
+              </a:defRPr>
+            </a:pPr>
+            <a:r>
+              <a:t>(b) SpontaneousDialogue — RF leads (0.857) | Ref: fig:roc-spontaneous-main</a:t>
+            </a:r>
+          </a:p>
+        </p:txBody>
+      </p:sp>
+      <p:sp>
+        <p:nvSpPr>
+          <p:cNvPr id="8" name="Rectangle 7"/>
+          <p:cNvSpPr/>
+          <p:nvPr/>
+        </p:nvSpPr>
+        <p:spPr>
+          <a:xfrm>
+            <a:off x="457200" y="6455664"/>
+            <a:ext cx="11247120" cy="9144"/>
+          </a:xfrm>
+          <a:prstGeom prst="rect">
+            <a:avLst/>
+          </a:prstGeom>
+          <a:solidFill>
+            <a:srgbClr val="E86C00"/>
+          </a:solidFill>
+          <a:ln>
+            <a:noFill/>
+          </a:ln>
+        </p:spPr>
+        <p:style>
+          <a:lnRef idx="1">
+            <a:schemeClr val="accent1"/>
+          </a:lnRef>
+          <a:fillRef idx="3">
+            <a:schemeClr val="accent1"/>
+          </a:fillRef>
+          <a:effectRef idx="2">
+            <a:schemeClr val="accent1"/>
+          </a:effectRef>
+          <a:fontRef idx="minor">
+            <a:schemeClr val="lt1"/>
+          </a:fontRef>
+        </p:style>
+        <p:txBody>
+          <a:bodyPr rtlCol="0" anchor="ctr"/>
+          <a:lstStyle/>
+          <a:p>
+            <a:pPr algn="ctr"/>
+          </a:p>
+        </p:txBody>
+      </p:sp>
+      <p:sp>
+        <p:nvSpPr>
+          <p:cNvPr id="9" name="TextBox 8"/>
           <p:cNvSpPr txBox="1"/>
           <p:nvPr/>
         </p:nvSpPr>
         <p:spPr>
           <a:xfrm>
-            <a:off x="6309360" y="5943600"/>
-            <a:ext cx="5303520" cy="457200"/>
+            <a:off x="457200" y="6492240"/>
+            <a:ext cx="11247120" cy="219456"/>
           </a:xfrm>
           <a:prstGeom prst="rect">
             <a:avLst/>
@@ -9112,16 +10380,16 @@
           </a:bodyPr>
           <a:lstStyle/>
           <a:p>
-            <a:pPr algn="ctr">
-              <a:defRPr sz="1200" b="0">
+            <a:pPr algn="r">
+              <a:defRPr sz="900" b="0">
                 <a:solidFill>
-                  <a:srgbClr val="666666"/>
+                  <a:srgbClr val="E86C00"/>
                 </a:solidFill>
                 <a:latin typeface="Calibri"/>
               </a:defRPr>
             </a:pPr>
             <a:r>
-              <a:t>(b) SpontaneousDialogue — RF leads (0.857)</a:t>
+              <a:t>Διπλωματική Εργασία - Μάρτιος 2026</a:t>
             </a:r>
           </a:p>
         </p:txBody>
@@ -9140,7 +10408,7 @@
     <p:bg>
       <p:bgPr>
         <a:solidFill>
-          <a:srgbClr val="FFFFFF"/>
+          <a:srgbClr val="F8FBFF"/>
         </a:solidFill>
         <a:effectLst/>
       </p:bgPr>
@@ -9205,9 +10473,52 @@
           </a:p>
         </p:txBody>
       </p:sp>
+      <p:sp>
+        <p:nvSpPr>
+          <p:cNvPr id="3" name="Rectangle 2"/>
+          <p:cNvSpPr/>
+          <p:nvPr/>
+        </p:nvSpPr>
+        <p:spPr>
+          <a:xfrm>
+            <a:off x="0" y="987552"/>
+            <a:ext cx="12191695" cy="18288"/>
+          </a:xfrm>
+          <a:prstGeom prst="rect">
+            <a:avLst/>
+          </a:prstGeom>
+          <a:solidFill>
+            <a:srgbClr val="3B82F6"/>
+          </a:solidFill>
+          <a:ln>
+            <a:noFill/>
+          </a:ln>
+        </p:spPr>
+        <p:style>
+          <a:lnRef idx="1">
+            <a:schemeClr val="accent1"/>
+          </a:lnRef>
+          <a:fillRef idx="3">
+            <a:schemeClr val="accent1"/>
+          </a:fillRef>
+          <a:effectRef idx="2">
+            <a:schemeClr val="accent1"/>
+          </a:effectRef>
+          <a:fontRef idx="minor">
+            <a:schemeClr val="lt1"/>
+          </a:fontRef>
+        </p:style>
+        <p:txBody>
+          <a:bodyPr rtlCol="0" anchor="ctr"/>
+          <a:lstStyle/>
+          <a:p>
+            <a:pPr algn="ctr"/>
+          </a:p>
+        </p:txBody>
+      </p:sp>
       <p:pic>
         <p:nvPicPr>
-          <p:cNvPr id="3" name="Picture 2" descr="fig_roc_dataset_b.png"/>
+          <p:cNvPr id="4" name="Picture 3" descr="fig_roc_dataset_b.png"/>
           <p:cNvPicPr>
             <a:picLocks noChangeAspect="1"/>
           </p:cNvPicPr>
@@ -9231,28 +10542,45 @@
       </p:pic>
       <p:sp>
         <p:nvSpPr>
-          <p:cNvPr id="4" name="TextBox 3"/>
-          <p:cNvSpPr txBox="1"/>
+          <p:cNvPr id="5" name="Rectangle 4"/>
+          <p:cNvSpPr/>
           <p:nvPr/>
         </p:nvSpPr>
         <p:spPr>
           <a:xfrm>
-            <a:off x="274320" y="5760720"/>
-            <a:ext cx="3474720" cy="457200"/>
+            <a:off x="274320" y="4289627"/>
+            <a:ext cx="3474720" cy="292608"/>
           </a:xfrm>
           <a:prstGeom prst="rect">
             <a:avLst/>
           </a:prstGeom>
-          <a:noFill/>
+          <a:solidFill>
+            <a:srgbClr val="F2F2F2"/>
+          </a:solidFill>
+          <a:ln>
+            <a:noFill/>
+          </a:ln>
         </p:spPr>
-        <p:txBody>
-          <a:bodyPr wrap="square">
-            <a:spAutoFit/>
-          </a:bodyPr>
+        <p:style>
+          <a:lnRef idx="1">
+            <a:schemeClr val="accent1"/>
+          </a:lnRef>
+          <a:fillRef idx="3">
+            <a:schemeClr val="accent1"/>
+          </a:fillRef>
+          <a:effectRef idx="2">
+            <a:schemeClr val="accent1"/>
+          </a:effectRef>
+          <a:fontRef idx="minor">
+            <a:schemeClr val="lt1"/>
+          </a:fontRef>
+        </p:style>
+        <p:txBody>
+          <a:bodyPr rtlCol="0" anchor="ctr" wrap="square" lIns="73152" rIns="73152"/>
           <a:lstStyle/>
           <a:p>
             <a:pPr algn="ctr">
-              <a:defRPr sz="1100" b="0">
+              <a:defRPr sz="850">
                 <a:solidFill>
                   <a:srgbClr val="666666"/>
                 </a:solidFill>
@@ -9260,14 +10588,14 @@
               </a:defRPr>
             </a:pPr>
             <a:r>
-              <a:t>(a) Dataset B — All models &gt; 0.86</a:t>
+              <a:t>(a) Dataset B — All models &gt; 0.86 | Ref: fig:roc-datasetb-main</a:t>
             </a:r>
           </a:p>
         </p:txBody>
       </p:sp>
       <p:pic>
         <p:nvPicPr>
-          <p:cNvPr id="5" name="Picture 4" descr="fig_confusion_readtext.png"/>
+          <p:cNvPr id="6" name="Picture 5" descr="fig_confusion_readtext.png"/>
           <p:cNvPicPr>
             <a:picLocks noChangeAspect="1"/>
           </p:cNvPicPr>
@@ -9291,28 +10619,45 @@
       </p:pic>
       <p:sp>
         <p:nvSpPr>
-          <p:cNvPr id="6" name="TextBox 5"/>
-          <p:cNvSpPr txBox="1"/>
+          <p:cNvPr id="7" name="Rectangle 6"/>
+          <p:cNvSpPr/>
           <p:nvPr/>
         </p:nvSpPr>
         <p:spPr>
           <a:xfrm>
-            <a:off x="4206240" y="5760720"/>
-            <a:ext cx="3474720" cy="457200"/>
+            <a:off x="4206240" y="2014682"/>
+            <a:ext cx="3474720" cy="292608"/>
           </a:xfrm>
           <a:prstGeom prst="rect">
             <a:avLst/>
           </a:prstGeom>
-          <a:noFill/>
+          <a:solidFill>
+            <a:srgbClr val="F2F2F2"/>
+          </a:solidFill>
+          <a:ln>
+            <a:noFill/>
+          </a:ln>
         </p:spPr>
-        <p:txBody>
-          <a:bodyPr wrap="square">
-            <a:spAutoFit/>
-          </a:bodyPr>
+        <p:style>
+          <a:lnRef idx="1">
+            <a:schemeClr val="accent1"/>
+          </a:lnRef>
+          <a:fillRef idx="3">
+            <a:schemeClr val="accent1"/>
+          </a:fillRef>
+          <a:effectRef idx="2">
+            <a:schemeClr val="accent1"/>
+          </a:effectRef>
+          <a:fontRef idx="minor">
+            <a:schemeClr val="lt1"/>
+          </a:fontRef>
+        </p:style>
+        <p:txBody>
+          <a:bodyPr rtlCol="0" anchor="ctr" wrap="square" lIns="73152" rIns="73152"/>
           <a:lstStyle/>
           <a:p>
             <a:pPr algn="ctr">
-              <a:defRPr sz="1100" b="0">
+              <a:defRPr sz="850">
                 <a:solidFill>
                   <a:srgbClr val="666666"/>
                 </a:solidFill>
@@ -9320,14 +10665,14 @@
               </a:defRPr>
             </a:pPr>
             <a:r>
-              <a:t>(b) CM: ReadText (RF)</a:t>
+              <a:t>(b) CM: ReadText (RF) | Ref: fig:confusion-readtext</a:t>
             </a:r>
           </a:p>
         </p:txBody>
       </p:sp>
       <p:pic>
         <p:nvPicPr>
-          <p:cNvPr id="7" name="Picture 6" descr="fig_confusion_spontaneous.png"/>
+          <p:cNvPr id="8" name="Picture 7" descr="fig_confusion_spontaneous.png"/>
           <p:cNvPicPr>
             <a:picLocks noChangeAspect="1"/>
           </p:cNvPicPr>
@@ -9351,14 +10696,110 @@
       </p:pic>
       <p:sp>
         <p:nvSpPr>
-          <p:cNvPr id="8" name="TextBox 7"/>
+          <p:cNvPr id="9" name="Rectangle 8"/>
+          <p:cNvSpPr/>
+          <p:nvPr/>
+        </p:nvSpPr>
+        <p:spPr>
+          <a:xfrm>
+            <a:off x="8138160" y="2014682"/>
+            <a:ext cx="3474720" cy="292608"/>
+          </a:xfrm>
+          <a:prstGeom prst="rect">
+            <a:avLst/>
+          </a:prstGeom>
+          <a:solidFill>
+            <a:srgbClr val="F2F2F2"/>
+          </a:solidFill>
+          <a:ln>
+            <a:noFill/>
+          </a:ln>
+        </p:spPr>
+        <p:style>
+          <a:lnRef idx="1">
+            <a:schemeClr val="accent1"/>
+          </a:lnRef>
+          <a:fillRef idx="3">
+            <a:schemeClr val="accent1"/>
+          </a:fillRef>
+          <a:effectRef idx="2">
+            <a:schemeClr val="accent1"/>
+          </a:effectRef>
+          <a:fontRef idx="minor">
+            <a:schemeClr val="lt1"/>
+          </a:fontRef>
+        </p:style>
+        <p:txBody>
+          <a:bodyPr rtlCol="0" anchor="ctr" wrap="square" lIns="73152" rIns="73152"/>
+          <a:lstStyle/>
+          <a:p>
+            <a:pPr algn="ctr">
+              <a:defRPr sz="850">
+                <a:solidFill>
+                  <a:srgbClr val="666666"/>
+                </a:solidFill>
+                <a:latin typeface="Calibri"/>
+              </a:defRPr>
+            </a:pPr>
+            <a:r>
+              <a:t>(c) CM: Spontaneous (RF) | Ref: fig:confusion-spontaneous</a:t>
+            </a:r>
+          </a:p>
+        </p:txBody>
+      </p:sp>
+      <p:sp>
+        <p:nvSpPr>
+          <p:cNvPr id="10" name="Rectangle 9"/>
+          <p:cNvSpPr/>
+          <p:nvPr/>
+        </p:nvSpPr>
+        <p:spPr>
+          <a:xfrm>
+            <a:off x="457200" y="6455664"/>
+            <a:ext cx="11247120" cy="9144"/>
+          </a:xfrm>
+          <a:prstGeom prst="rect">
+            <a:avLst/>
+          </a:prstGeom>
+          <a:solidFill>
+            <a:srgbClr val="E86C00"/>
+          </a:solidFill>
+          <a:ln>
+            <a:noFill/>
+          </a:ln>
+        </p:spPr>
+        <p:style>
+          <a:lnRef idx="1">
+            <a:schemeClr val="accent1"/>
+          </a:lnRef>
+          <a:fillRef idx="3">
+            <a:schemeClr val="accent1"/>
+          </a:fillRef>
+          <a:effectRef idx="2">
+            <a:schemeClr val="accent1"/>
+          </a:effectRef>
+          <a:fontRef idx="minor">
+            <a:schemeClr val="lt1"/>
+          </a:fontRef>
+        </p:style>
+        <p:txBody>
+          <a:bodyPr rtlCol="0" anchor="ctr"/>
+          <a:lstStyle/>
+          <a:p>
+            <a:pPr algn="ctr"/>
+          </a:p>
+        </p:txBody>
+      </p:sp>
+      <p:sp>
+        <p:nvSpPr>
+          <p:cNvPr id="11" name="TextBox 10"/>
           <p:cNvSpPr txBox="1"/>
           <p:nvPr/>
         </p:nvSpPr>
         <p:spPr>
           <a:xfrm>
-            <a:off x="8138160" y="5760720"/>
-            <a:ext cx="3474720" cy="457200"/>
+            <a:off x="457200" y="6492240"/>
+            <a:ext cx="11247120" cy="219456"/>
           </a:xfrm>
           <a:prstGeom prst="rect">
             <a:avLst/>
@@ -9371,16 +10812,16 @@
           </a:bodyPr>
           <a:lstStyle/>
           <a:p>
-            <a:pPr algn="ctr">
-              <a:defRPr sz="1100" b="0">
+            <a:pPr algn="r">
+              <a:defRPr sz="900" b="0">
                 <a:solidFill>
-                  <a:srgbClr val="666666"/>
+                  <a:srgbClr val="E86C00"/>
                 </a:solidFill>
                 <a:latin typeface="Calibri"/>
               </a:defRPr>
             </a:pPr>
             <a:r>
-              <a:t>(c) CM: Spontaneous (RF)</a:t>
+              <a:t>Διπλωματική Εργασία - Μάρτιος 2026</a:t>
             </a:r>
           </a:p>
         </p:txBody>
@@ -9399,7 +10840,7 @@
     <p:bg>
       <p:bgPr>
         <a:solidFill>
-          <a:srgbClr val="FFFFFF"/>
+          <a:srgbClr val="F8FBFF"/>
         </a:solidFill>
         <a:effectLst/>
       </p:bgPr>
@@ -9464,9 +10905,52 @@
           </a:p>
         </p:txBody>
       </p:sp>
+      <p:sp>
+        <p:nvSpPr>
+          <p:cNvPr id="3" name="Rectangle 2"/>
+          <p:cNvSpPr/>
+          <p:nvPr/>
+        </p:nvSpPr>
+        <p:spPr>
+          <a:xfrm>
+            <a:off x="0" y="987552"/>
+            <a:ext cx="12191695" cy="18288"/>
+          </a:xfrm>
+          <a:prstGeom prst="rect">
+            <a:avLst/>
+          </a:prstGeom>
+          <a:solidFill>
+            <a:srgbClr val="3B82F6"/>
+          </a:solidFill>
+          <a:ln>
+            <a:noFill/>
+          </a:ln>
+        </p:spPr>
+        <p:style>
+          <a:lnRef idx="1">
+            <a:schemeClr val="accent1"/>
+          </a:lnRef>
+          <a:fillRef idx="3">
+            <a:schemeClr val="accent1"/>
+          </a:fillRef>
+          <a:effectRef idx="2">
+            <a:schemeClr val="accent1"/>
+          </a:effectRef>
+          <a:fontRef idx="minor">
+            <a:schemeClr val="lt1"/>
+          </a:fontRef>
+        </p:style>
+        <p:txBody>
+          <a:bodyPr rtlCol="0" anchor="ctr"/>
+          <a:lstStyle/>
+          <a:p>
+            <a:pPr algn="ctr"/>
+          </a:p>
+        </p:txBody>
+      </p:sp>
       <p:graphicFrame>
         <p:nvGraphicFramePr>
-          <p:cNvPr id="3" name="Table 2"/>
+          <p:cNvPr id="4" name="Table 3"/>
           <p:cNvGraphicFramePr>
             <a:graphicFrameLocks noGrp="1"/>
           </p:cNvGraphicFramePr>
@@ -9474,7 +10958,7 @@
         </p:nvGraphicFramePr>
         <p:xfrm>
           <a:off x="457200" y="1371600"/>
-          <a:ext cx="11247120" cy="2743200"/>
+          <a:ext cx="11247120" cy="2359152"/>
         </p:xfrm>
         <a:graphic>
           <a:graphicData uri="http://schemas.openxmlformats.org/drawingml/2006/table">
@@ -9488,7 +10972,7 @@
                 <a:gridCol w="2249424"/>
                 <a:gridCol w="3374136"/>
               </a:tblGrid>
-              <a:tr h="457200">
+              <a:tr h="393192">
                 <a:tc>
                   <a:txBody>
                     <a:bodyPr/>
@@ -9586,7 +11070,7 @@
                   </a:tcPr>
                 </a:tc>
               </a:tr>
-              <a:tr h="457200">
+              <a:tr h="393192">
                 <a:tc>
                   <a:txBody>
                     <a:bodyPr/>
@@ -9684,7 +11168,7 @@
                   </a:tcPr>
                 </a:tc>
               </a:tr>
-              <a:tr h="457200">
+              <a:tr h="393192">
                 <a:tc>
                   <a:txBody>
                     <a:bodyPr/>
@@ -9782,7 +11266,7 @@
                   </a:tcPr>
                 </a:tc>
               </a:tr>
-              <a:tr h="457200">
+              <a:tr h="393192">
                 <a:tc>
                   <a:txBody>
                     <a:bodyPr/>
@@ -9880,7 +11364,7 @@
                   </a:tcPr>
                 </a:tc>
               </a:tr>
-              <a:tr h="457200">
+              <a:tr h="393192">
                 <a:tc>
                   <a:txBody>
                     <a:bodyPr/>
@@ -9978,7 +11462,7 @@
                   </a:tcPr>
                 </a:tc>
               </a:tr>
-              <a:tr h="457200">
+              <a:tr h="393192">
                 <a:tc>
                   <a:txBody>
                     <a:bodyPr/>
@@ -10082,7 +11566,139 @@
       </p:graphicFrame>
       <p:sp>
         <p:nvSpPr>
-          <p:cNvPr id="4" name="TextBox 3"/>
+          <p:cNvPr id="5" name="Rectangle 4"/>
+          <p:cNvSpPr/>
+          <p:nvPr/>
+        </p:nvSpPr>
+        <p:spPr>
+          <a:xfrm>
+            <a:off x="457200" y="6108192"/>
+            <a:ext cx="11247120" cy="237744"/>
+          </a:xfrm>
+          <a:prstGeom prst="rect">
+            <a:avLst/>
+          </a:prstGeom>
+          <a:solidFill>
+            <a:srgbClr val="F2F2F2"/>
+          </a:solidFill>
+          <a:ln>
+            <a:noFill/>
+          </a:ln>
+        </p:spPr>
+        <p:style>
+          <a:lnRef idx="1">
+            <a:schemeClr val="accent1"/>
+          </a:lnRef>
+          <a:fillRef idx="3">
+            <a:schemeClr val="accent1"/>
+          </a:fillRef>
+          <a:effectRef idx="2">
+            <a:schemeClr val="accent1"/>
+          </a:effectRef>
+          <a:fontRef idx="minor">
+            <a:schemeClr val="lt1"/>
+          </a:fontRef>
+        </p:style>
+        <p:txBody>
+          <a:bodyPr rtlCol="0" anchor="ctr" wrap="square" lIns="109728" rIns="109728" tIns="18288"/>
+          <a:lstStyle/>
+          <a:p>
+            <a:pPr algn="l">
+              <a:defRPr sz="1000">
+                <a:solidFill>
+                  <a:srgbClr val="666666"/>
+                </a:solidFill>
+                <a:latin typeface="Calibri"/>
+              </a:defRPr>
+            </a:pPr>
+            <a:r>
+              <a:t>Table 6.3: Feature ablation effect | tab:ablation-main | Source: Thesis manuscript and computed results</a:t>
+            </a:r>
+          </a:p>
+        </p:txBody>
+      </p:sp>
+      <p:sp>
+        <p:nvSpPr>
+          <p:cNvPr id="6" name="Rectangle 5"/>
+          <p:cNvSpPr/>
+          <p:nvPr/>
+        </p:nvSpPr>
+        <p:spPr>
+          <a:xfrm>
+            <a:off x="457200" y="6455664"/>
+            <a:ext cx="11247120" cy="9144"/>
+          </a:xfrm>
+          <a:prstGeom prst="rect">
+            <a:avLst/>
+          </a:prstGeom>
+          <a:solidFill>
+            <a:srgbClr val="E86C00"/>
+          </a:solidFill>
+          <a:ln>
+            <a:noFill/>
+          </a:ln>
+        </p:spPr>
+        <p:style>
+          <a:lnRef idx="1">
+            <a:schemeClr val="accent1"/>
+          </a:lnRef>
+          <a:fillRef idx="3">
+            <a:schemeClr val="accent1"/>
+          </a:fillRef>
+          <a:effectRef idx="2">
+            <a:schemeClr val="accent1"/>
+          </a:effectRef>
+          <a:fontRef idx="minor">
+            <a:schemeClr val="lt1"/>
+          </a:fontRef>
+        </p:style>
+        <p:txBody>
+          <a:bodyPr rtlCol="0" anchor="ctr"/>
+          <a:lstStyle/>
+          <a:p>
+            <a:pPr algn="ctr"/>
+          </a:p>
+        </p:txBody>
+      </p:sp>
+      <p:sp>
+        <p:nvSpPr>
+          <p:cNvPr id="7" name="TextBox 6"/>
+          <p:cNvSpPr txBox="1"/>
+          <p:nvPr/>
+        </p:nvSpPr>
+        <p:spPr>
+          <a:xfrm>
+            <a:off x="457200" y="6492240"/>
+            <a:ext cx="11247120" cy="219456"/>
+          </a:xfrm>
+          <a:prstGeom prst="rect">
+            <a:avLst/>
+          </a:prstGeom>
+          <a:noFill/>
+        </p:spPr>
+        <p:txBody>
+          <a:bodyPr wrap="square">
+            <a:spAutoFit/>
+          </a:bodyPr>
+          <a:lstStyle/>
+          <a:p>
+            <a:pPr algn="r">
+              <a:defRPr sz="900" b="0">
+                <a:solidFill>
+                  <a:srgbClr val="E86C00"/>
+                </a:solidFill>
+                <a:latin typeface="Calibri"/>
+              </a:defRPr>
+            </a:pPr>
+            <a:r>
+              <a:t>Διπλωματική Εργασία - Μάρτιος 2026</a:t>
+            </a:r>
+          </a:p>
+        </p:txBody>
+      </p:sp>
+      <p:sp>
+        <p:nvSpPr>
+          <p:cNvPr id="8" name="TextBox 7"/>
           <p:cNvSpPr txBox="1"/>
           <p:nvPr/>
         </p:nvSpPr>
@@ -10130,7 +11746,7 @@
     <p:bg>
       <p:bgPr>
         <a:solidFill>
-          <a:srgbClr val="FFFFFF"/>
+          <a:srgbClr val="F8FBFF"/>
         </a:solidFill>
         <a:effectLst/>
       </p:bgPr>
@@ -10197,7 +11813,50 @@
       </p:sp>
       <p:sp>
         <p:nvSpPr>
-          <p:cNvPr id="3" name="TextBox 2"/>
+          <p:cNvPr id="3" name="Rectangle 2"/>
+          <p:cNvSpPr/>
+          <p:nvPr/>
+        </p:nvSpPr>
+        <p:spPr>
+          <a:xfrm>
+            <a:off x="0" y="987552"/>
+            <a:ext cx="12191695" cy="18288"/>
+          </a:xfrm>
+          <a:prstGeom prst="rect">
+            <a:avLst/>
+          </a:prstGeom>
+          <a:solidFill>
+            <a:srgbClr val="3B82F6"/>
+          </a:solidFill>
+          <a:ln>
+            <a:noFill/>
+          </a:ln>
+        </p:spPr>
+        <p:style>
+          <a:lnRef idx="1">
+            <a:schemeClr val="accent1"/>
+          </a:lnRef>
+          <a:fillRef idx="3">
+            <a:schemeClr val="accent1"/>
+          </a:fillRef>
+          <a:effectRef idx="2">
+            <a:schemeClr val="accent1"/>
+          </a:effectRef>
+          <a:fontRef idx="minor">
+            <a:schemeClr val="lt1"/>
+          </a:fontRef>
+        </p:style>
+        <p:txBody>
+          <a:bodyPr rtlCol="0" anchor="ctr"/>
+          <a:lstStyle/>
+          <a:p>
+            <a:pPr algn="ctr"/>
+          </a:p>
+        </p:txBody>
+      </p:sp>
+      <p:sp>
+        <p:nvSpPr>
+          <p:cNvPr id="4" name="TextBox 3"/>
           <p:cNvSpPr txBox="1"/>
           <p:nvPr/>
         </p:nvSpPr>
@@ -10370,6 +12029,85 @@
           </a:p>
         </p:txBody>
       </p:sp>
+      <p:sp>
+        <p:nvSpPr>
+          <p:cNvPr id="5" name="Rectangle 4"/>
+          <p:cNvSpPr/>
+          <p:nvPr/>
+        </p:nvSpPr>
+        <p:spPr>
+          <a:xfrm>
+            <a:off x="457200" y="6455664"/>
+            <a:ext cx="11247120" cy="9144"/>
+          </a:xfrm>
+          <a:prstGeom prst="rect">
+            <a:avLst/>
+          </a:prstGeom>
+          <a:solidFill>
+            <a:srgbClr val="E86C00"/>
+          </a:solidFill>
+          <a:ln>
+            <a:noFill/>
+          </a:ln>
+        </p:spPr>
+        <p:style>
+          <a:lnRef idx="1">
+            <a:schemeClr val="accent1"/>
+          </a:lnRef>
+          <a:fillRef idx="3">
+            <a:schemeClr val="accent1"/>
+          </a:fillRef>
+          <a:effectRef idx="2">
+            <a:schemeClr val="accent1"/>
+          </a:effectRef>
+          <a:fontRef idx="minor">
+            <a:schemeClr val="lt1"/>
+          </a:fontRef>
+        </p:style>
+        <p:txBody>
+          <a:bodyPr rtlCol="0" anchor="ctr"/>
+          <a:lstStyle/>
+          <a:p>
+            <a:pPr algn="ctr"/>
+          </a:p>
+        </p:txBody>
+      </p:sp>
+      <p:sp>
+        <p:nvSpPr>
+          <p:cNvPr id="6" name="TextBox 5"/>
+          <p:cNvSpPr txBox="1"/>
+          <p:nvPr/>
+        </p:nvSpPr>
+        <p:spPr>
+          <a:xfrm>
+            <a:off x="457200" y="6492240"/>
+            <a:ext cx="11247120" cy="219456"/>
+          </a:xfrm>
+          <a:prstGeom prst="rect">
+            <a:avLst/>
+          </a:prstGeom>
+          <a:noFill/>
+        </p:spPr>
+        <p:txBody>
+          <a:bodyPr wrap="square">
+            <a:spAutoFit/>
+          </a:bodyPr>
+          <a:lstStyle/>
+          <a:p>
+            <a:pPr algn="r">
+              <a:defRPr sz="900" b="0">
+                <a:solidFill>
+                  <a:srgbClr val="E86C00"/>
+                </a:solidFill>
+                <a:latin typeface="Calibri"/>
+              </a:defRPr>
+            </a:pPr>
+            <a:r>
+              <a:t>Διπλωματική Εργασία - Μάρτιος 2026</a:t>
+            </a:r>
+          </a:p>
+        </p:txBody>
+      </p:sp>
     </p:spTree>
   </p:cSld>
   <p:clrMapOvr>
@@ -10384,7 +12122,7 @@
     <p:bg>
       <p:bgPr>
         <a:solidFill>
-          <a:srgbClr val="FFFFFF"/>
+          <a:srgbClr val="F8FBFF"/>
         </a:solidFill>
         <a:effectLst/>
       </p:bgPr>
@@ -10449,9 +12187,52 @@
           </a:p>
         </p:txBody>
       </p:sp>
+      <p:sp>
+        <p:nvSpPr>
+          <p:cNvPr id="3" name="Rectangle 2"/>
+          <p:cNvSpPr/>
+          <p:nvPr/>
+        </p:nvSpPr>
+        <p:spPr>
+          <a:xfrm>
+            <a:off x="0" y="987552"/>
+            <a:ext cx="12191695" cy="18288"/>
+          </a:xfrm>
+          <a:prstGeom prst="rect">
+            <a:avLst/>
+          </a:prstGeom>
+          <a:solidFill>
+            <a:srgbClr val="3B82F6"/>
+          </a:solidFill>
+          <a:ln>
+            <a:noFill/>
+          </a:ln>
+        </p:spPr>
+        <p:style>
+          <a:lnRef idx="1">
+            <a:schemeClr val="accent1"/>
+          </a:lnRef>
+          <a:fillRef idx="3">
+            <a:schemeClr val="accent1"/>
+          </a:fillRef>
+          <a:effectRef idx="2">
+            <a:schemeClr val="accent1"/>
+          </a:effectRef>
+          <a:fontRef idx="minor">
+            <a:schemeClr val="lt1"/>
+          </a:fontRef>
+        </p:style>
+        <p:txBody>
+          <a:bodyPr rtlCol="0" anchor="ctr"/>
+          <a:lstStyle/>
+          <a:p>
+            <a:pPr algn="ctr"/>
+          </a:p>
+        </p:txBody>
+      </p:sp>
       <p:graphicFrame>
         <p:nvGraphicFramePr>
-          <p:cNvPr id="3" name="Table 2"/>
+          <p:cNvPr id="4" name="Table 3"/>
           <p:cNvGraphicFramePr>
             <a:graphicFrameLocks noGrp="1"/>
           </p:cNvGraphicFramePr>
@@ -10459,7 +12240,7 @@
         </p:nvGraphicFramePr>
         <p:xfrm>
           <a:off x="457200" y="1371600"/>
-          <a:ext cx="11247120" cy="2286000"/>
+          <a:ext cx="11247120" cy="1965960"/>
         </p:xfrm>
         <a:graphic>
           <a:graphicData uri="http://schemas.openxmlformats.org/drawingml/2006/table">
@@ -10472,7 +12253,7 @@
                 <a:gridCol w="4217670"/>
                 <a:gridCol w="2811780"/>
               </a:tblGrid>
-              <a:tr h="457200">
+              <a:tr h="393192">
                 <a:tc>
                   <a:txBody>
                     <a:bodyPr/>
@@ -10546,7 +12327,7 @@
                   </a:tcPr>
                 </a:tc>
               </a:tr>
-              <a:tr h="457200">
+              <a:tr h="393192">
                 <a:tc>
                   <a:txBody>
                     <a:bodyPr/>
@@ -10620,7 +12401,7 @@
                   </a:tcPr>
                 </a:tc>
               </a:tr>
-              <a:tr h="457200">
+              <a:tr h="393192">
                 <a:tc>
                   <a:txBody>
                     <a:bodyPr/>
@@ -10694,7 +12475,7 @@
                   </a:tcPr>
                 </a:tc>
               </a:tr>
-              <a:tr h="457200">
+              <a:tr h="393192">
                 <a:tc>
                   <a:txBody>
                     <a:bodyPr/>
@@ -10768,7 +12549,7 @@
                   </a:tcPr>
                 </a:tc>
               </a:tr>
-              <a:tr h="457200">
+              <a:tr h="393192">
                 <a:tc>
                   <a:txBody>
                     <a:bodyPr/>
@@ -10848,7 +12629,139 @@
       </p:graphicFrame>
       <p:sp>
         <p:nvSpPr>
-          <p:cNvPr id="4" name="TextBox 3"/>
+          <p:cNvPr id="5" name="Rectangle 4"/>
+          <p:cNvSpPr/>
+          <p:nvPr/>
+        </p:nvSpPr>
+        <p:spPr>
+          <a:xfrm>
+            <a:off x="457200" y="6108192"/>
+            <a:ext cx="11247120" cy="237744"/>
+          </a:xfrm>
+          <a:prstGeom prst="rect">
+            <a:avLst/>
+          </a:prstGeom>
+          <a:solidFill>
+            <a:srgbClr val="F2F2F2"/>
+          </a:solidFill>
+          <a:ln>
+            <a:noFill/>
+          </a:ln>
+        </p:spPr>
+        <p:style>
+          <a:lnRef idx="1">
+            <a:schemeClr val="accent1"/>
+          </a:lnRef>
+          <a:fillRef idx="3">
+            <a:schemeClr val="accent1"/>
+          </a:fillRef>
+          <a:effectRef idx="2">
+            <a:schemeClr val="accent1"/>
+          </a:effectRef>
+          <a:fontRef idx="minor">
+            <a:schemeClr val="lt1"/>
+          </a:fontRef>
+        </p:style>
+        <p:txBody>
+          <a:bodyPr rtlCol="0" anchor="ctr" wrap="square" lIns="109728" rIns="109728" tIns="18288"/>
+          <a:lstStyle/>
+          <a:p>
+            <a:pPr algn="l">
+              <a:defRPr sz="1000">
+                <a:solidFill>
+                  <a:srgbClr val="666666"/>
+                </a:solidFill>
+                <a:latin typeface="Calibri"/>
+              </a:defRPr>
+            </a:pPr>
+            <a:r>
+              <a:t>Table 6.4: Class weighting effect | tab:weighting-main | Source: Thesis manuscript and computed results</a:t>
+            </a:r>
+          </a:p>
+        </p:txBody>
+      </p:sp>
+      <p:sp>
+        <p:nvSpPr>
+          <p:cNvPr id="6" name="Rectangle 5"/>
+          <p:cNvSpPr/>
+          <p:nvPr/>
+        </p:nvSpPr>
+        <p:spPr>
+          <a:xfrm>
+            <a:off x="457200" y="6455664"/>
+            <a:ext cx="11247120" cy="9144"/>
+          </a:xfrm>
+          <a:prstGeom prst="rect">
+            <a:avLst/>
+          </a:prstGeom>
+          <a:solidFill>
+            <a:srgbClr val="E86C00"/>
+          </a:solidFill>
+          <a:ln>
+            <a:noFill/>
+          </a:ln>
+        </p:spPr>
+        <p:style>
+          <a:lnRef idx="1">
+            <a:schemeClr val="accent1"/>
+          </a:lnRef>
+          <a:fillRef idx="3">
+            <a:schemeClr val="accent1"/>
+          </a:fillRef>
+          <a:effectRef idx="2">
+            <a:schemeClr val="accent1"/>
+          </a:effectRef>
+          <a:fontRef idx="minor">
+            <a:schemeClr val="lt1"/>
+          </a:fontRef>
+        </p:style>
+        <p:txBody>
+          <a:bodyPr rtlCol="0" anchor="ctr"/>
+          <a:lstStyle/>
+          <a:p>
+            <a:pPr algn="ctr"/>
+          </a:p>
+        </p:txBody>
+      </p:sp>
+      <p:sp>
+        <p:nvSpPr>
+          <p:cNvPr id="7" name="TextBox 6"/>
+          <p:cNvSpPr txBox="1"/>
+          <p:nvPr/>
+        </p:nvSpPr>
+        <p:spPr>
+          <a:xfrm>
+            <a:off x="457200" y="6492240"/>
+            <a:ext cx="11247120" cy="219456"/>
+          </a:xfrm>
+          <a:prstGeom prst="rect">
+            <a:avLst/>
+          </a:prstGeom>
+          <a:noFill/>
+        </p:spPr>
+        <p:txBody>
+          <a:bodyPr wrap="square">
+            <a:spAutoFit/>
+          </a:bodyPr>
+          <a:lstStyle/>
+          <a:p>
+            <a:pPr algn="r">
+              <a:defRPr sz="900" b="0">
+                <a:solidFill>
+                  <a:srgbClr val="E86C00"/>
+                </a:solidFill>
+                <a:latin typeface="Calibri"/>
+              </a:defRPr>
+            </a:pPr>
+            <a:r>
+              <a:t>Διπλωματική Εργασία - Μάρτιος 2026</a:t>
+            </a:r>
+          </a:p>
+        </p:txBody>
+      </p:sp>
+      <p:sp>
+        <p:nvSpPr>
+          <p:cNvPr id="8" name="TextBox 7"/>
           <p:cNvSpPr txBox="1"/>
           <p:nvPr/>
         </p:nvSpPr>
@@ -10915,7 +12828,7 @@
     <p:bg>
       <p:bgPr>
         <a:solidFill>
-          <a:srgbClr val="FFFFFF"/>
+          <a:srgbClr val="F8FBFF"/>
         </a:solidFill>
         <a:effectLst/>
       </p:bgPr>
@@ -10980,9 +12893,52 @@
           </a:p>
         </p:txBody>
       </p:sp>
+      <p:sp>
+        <p:nvSpPr>
+          <p:cNvPr id="3" name="Rectangle 2"/>
+          <p:cNvSpPr/>
+          <p:nvPr/>
+        </p:nvSpPr>
+        <p:spPr>
+          <a:xfrm>
+            <a:off x="0" y="987552"/>
+            <a:ext cx="12191695" cy="18288"/>
+          </a:xfrm>
+          <a:prstGeom prst="rect">
+            <a:avLst/>
+          </a:prstGeom>
+          <a:solidFill>
+            <a:srgbClr val="3B82F6"/>
+          </a:solidFill>
+          <a:ln>
+            <a:noFill/>
+          </a:ln>
+        </p:spPr>
+        <p:style>
+          <a:lnRef idx="1">
+            <a:schemeClr val="accent1"/>
+          </a:lnRef>
+          <a:fillRef idx="3">
+            <a:schemeClr val="accent1"/>
+          </a:fillRef>
+          <a:effectRef idx="2">
+            <a:schemeClr val="accent1"/>
+          </a:effectRef>
+          <a:fontRef idx="minor">
+            <a:schemeClr val="lt1"/>
+          </a:fontRef>
+        </p:style>
+        <p:txBody>
+          <a:bodyPr rtlCol="0" anchor="ctr"/>
+          <a:lstStyle/>
+          <a:p>
+            <a:pPr algn="ctr"/>
+          </a:p>
+        </p:txBody>
+      </p:sp>
       <p:graphicFrame>
         <p:nvGraphicFramePr>
-          <p:cNvPr id="3" name="Table 2"/>
+          <p:cNvPr id="4" name="Table 3"/>
           <p:cNvGraphicFramePr>
             <a:graphicFrameLocks noGrp="1"/>
           </p:cNvGraphicFramePr>
@@ -10990,7 +12946,7 @@
         </p:nvGraphicFramePr>
         <p:xfrm>
           <a:off x="457200" y="1371600"/>
-          <a:ext cx="11247118" cy="2286000"/>
+          <a:ext cx="11247118" cy="1965960"/>
         </p:xfrm>
         <a:graphic>
           <a:graphicData uri="http://schemas.openxmlformats.org/drawingml/2006/table">
@@ -11003,7 +12959,7 @@
                 <a:gridCol w="3847698"/>
                 <a:gridCol w="3847698"/>
               </a:tblGrid>
-              <a:tr h="457200">
+              <a:tr h="393192">
                 <a:tc>
                   <a:txBody>
                     <a:bodyPr/>
@@ -11077,7 +13033,7 @@
                   </a:tcPr>
                 </a:tc>
               </a:tr>
-              <a:tr h="457200">
+              <a:tr h="393192">
                 <a:tc>
                   <a:txBody>
                     <a:bodyPr/>
@@ -11151,7 +13107,7 @@
                   </a:tcPr>
                 </a:tc>
               </a:tr>
-              <a:tr h="457200">
+              <a:tr h="393192">
                 <a:tc>
                   <a:txBody>
                     <a:bodyPr/>
@@ -11225,7 +13181,7 @@
                   </a:tcPr>
                 </a:tc>
               </a:tr>
-              <a:tr h="457200">
+              <a:tr h="393192">
                 <a:tc>
                   <a:txBody>
                     <a:bodyPr/>
@@ -11299,7 +13255,7 @@
                   </a:tcPr>
                 </a:tc>
               </a:tr>
-              <a:tr h="457200">
+              <a:tr h="393192">
                 <a:tc>
                   <a:txBody>
                     <a:bodyPr/>
@@ -11379,7 +13335,139 @@
       </p:graphicFrame>
       <p:sp>
         <p:nvSpPr>
-          <p:cNvPr id="4" name="TextBox 3"/>
+          <p:cNvPr id="5" name="Rectangle 4"/>
+          <p:cNvSpPr/>
+          <p:nvPr/>
+        </p:nvSpPr>
+        <p:spPr>
+          <a:xfrm>
+            <a:off x="457200" y="6108192"/>
+            <a:ext cx="11247120" cy="237744"/>
+          </a:xfrm>
+          <a:prstGeom prst="rect">
+            <a:avLst/>
+          </a:prstGeom>
+          <a:solidFill>
+            <a:srgbClr val="F2F2F2"/>
+          </a:solidFill>
+          <a:ln>
+            <a:noFill/>
+          </a:ln>
+        </p:spPr>
+        <p:style>
+          <a:lnRef idx="1">
+            <a:schemeClr val="accent1"/>
+          </a:lnRef>
+          <a:fillRef idx="3">
+            <a:schemeClr val="accent1"/>
+          </a:fillRef>
+          <a:effectRef idx="2">
+            <a:schemeClr val="accent1"/>
+          </a:effectRef>
+          <a:fontRef idx="minor">
+            <a:schemeClr val="lt1"/>
+          </a:fontRef>
+        </p:style>
+        <p:txBody>
+          <a:bodyPr rtlCol="0" anchor="ctr" wrap="square" lIns="109728" rIns="109728" tIns="18288"/>
+          <a:lstStyle/>
+          <a:p>
+            <a:pPr algn="l">
+              <a:defRPr sz="1000">
+                <a:solidFill>
+                  <a:srgbClr val="666666"/>
+                </a:solidFill>
+                <a:latin typeface="Calibri"/>
+              </a:defRPr>
+            </a:pPr>
+            <a:r>
+              <a:t>Table 6.5: Variance comparison | tab:variance-summary | Source: Thesis manuscript and computed results</a:t>
+            </a:r>
+          </a:p>
+        </p:txBody>
+      </p:sp>
+      <p:sp>
+        <p:nvSpPr>
+          <p:cNvPr id="6" name="Rectangle 5"/>
+          <p:cNvSpPr/>
+          <p:nvPr/>
+        </p:nvSpPr>
+        <p:spPr>
+          <a:xfrm>
+            <a:off x="457200" y="6455664"/>
+            <a:ext cx="11247120" cy="9144"/>
+          </a:xfrm>
+          <a:prstGeom prst="rect">
+            <a:avLst/>
+          </a:prstGeom>
+          <a:solidFill>
+            <a:srgbClr val="E86C00"/>
+          </a:solidFill>
+          <a:ln>
+            <a:noFill/>
+          </a:ln>
+        </p:spPr>
+        <p:style>
+          <a:lnRef idx="1">
+            <a:schemeClr val="accent1"/>
+          </a:lnRef>
+          <a:fillRef idx="3">
+            <a:schemeClr val="accent1"/>
+          </a:fillRef>
+          <a:effectRef idx="2">
+            <a:schemeClr val="accent1"/>
+          </a:effectRef>
+          <a:fontRef idx="minor">
+            <a:schemeClr val="lt1"/>
+          </a:fontRef>
+        </p:style>
+        <p:txBody>
+          <a:bodyPr rtlCol="0" anchor="ctr"/>
+          <a:lstStyle/>
+          <a:p>
+            <a:pPr algn="ctr"/>
+          </a:p>
+        </p:txBody>
+      </p:sp>
+      <p:sp>
+        <p:nvSpPr>
+          <p:cNvPr id="7" name="TextBox 6"/>
+          <p:cNvSpPr txBox="1"/>
+          <p:nvPr/>
+        </p:nvSpPr>
+        <p:spPr>
+          <a:xfrm>
+            <a:off x="457200" y="6492240"/>
+            <a:ext cx="11247120" cy="219456"/>
+          </a:xfrm>
+          <a:prstGeom prst="rect">
+            <a:avLst/>
+          </a:prstGeom>
+          <a:noFill/>
+        </p:spPr>
+        <p:txBody>
+          <a:bodyPr wrap="square">
+            <a:spAutoFit/>
+          </a:bodyPr>
+          <a:lstStyle/>
+          <a:p>
+            <a:pPr algn="r">
+              <a:defRPr sz="900" b="0">
+                <a:solidFill>
+                  <a:srgbClr val="E86C00"/>
+                </a:solidFill>
+                <a:latin typeface="Calibri"/>
+              </a:defRPr>
+            </a:pPr>
+            <a:r>
+              <a:t>Διπλωματική Εργασία - Μάρτιος 2026</a:t>
+            </a:r>
+          </a:p>
+        </p:txBody>
+      </p:sp>
+      <p:sp>
+        <p:nvSpPr>
+          <p:cNvPr id="8" name="TextBox 7"/>
           <p:cNvSpPr txBox="1"/>
           <p:nvPr/>
         </p:nvSpPr>
@@ -11465,7 +13553,7 @@
     <p:bg>
       <p:bgPr>
         <a:solidFill>
-          <a:srgbClr val="FFFFFF"/>
+          <a:srgbClr val="F8FBFF"/>
         </a:solidFill>
         <a:effectLst/>
       </p:bgPr>
@@ -11530,9 +13618,52 @@
           </a:p>
         </p:txBody>
       </p:sp>
+      <p:sp>
+        <p:nvSpPr>
+          <p:cNvPr id="3" name="Rectangle 2"/>
+          <p:cNvSpPr/>
+          <p:nvPr/>
+        </p:nvSpPr>
+        <p:spPr>
+          <a:xfrm>
+            <a:off x="0" y="987552"/>
+            <a:ext cx="12191695" cy="18288"/>
+          </a:xfrm>
+          <a:prstGeom prst="rect">
+            <a:avLst/>
+          </a:prstGeom>
+          <a:solidFill>
+            <a:srgbClr val="3B82F6"/>
+          </a:solidFill>
+          <a:ln>
+            <a:noFill/>
+          </a:ln>
+        </p:spPr>
+        <p:style>
+          <a:lnRef idx="1">
+            <a:schemeClr val="accent1"/>
+          </a:lnRef>
+          <a:fillRef idx="3">
+            <a:schemeClr val="accent1"/>
+          </a:fillRef>
+          <a:effectRef idx="2">
+            <a:schemeClr val="accent1"/>
+          </a:effectRef>
+          <a:fontRef idx="minor">
+            <a:schemeClr val="lt1"/>
+          </a:fontRef>
+        </p:style>
+        <p:txBody>
+          <a:bodyPr rtlCol="0" anchor="ctr"/>
+          <a:lstStyle/>
+          <a:p>
+            <a:pPr algn="ctr"/>
+          </a:p>
+        </p:txBody>
+      </p:sp>
       <p:pic>
         <p:nvPicPr>
-          <p:cNvPr id="3" name="Picture 2" descr="fig_imp_readtext_cats.png"/>
+          <p:cNvPr id="4" name="Picture 3" descr="fig_imp_readtext_cats.png"/>
           <p:cNvPicPr>
             <a:picLocks noChangeAspect="1"/>
           </p:cNvPicPr>
@@ -11556,28 +13687,45 @@
       </p:pic>
       <p:sp>
         <p:nvSpPr>
-          <p:cNvPr id="4" name="TextBox 3"/>
-          <p:cNvSpPr txBox="1"/>
+          <p:cNvPr id="5" name="Rectangle 4"/>
+          <p:cNvSpPr/>
           <p:nvPr/>
         </p:nvSpPr>
         <p:spPr>
           <a:xfrm>
-            <a:off x="365760" y="5943600"/>
-            <a:ext cx="5303520" cy="457200"/>
+            <a:off x="365760" y="4497082"/>
+            <a:ext cx="5303520" cy="292608"/>
           </a:xfrm>
           <a:prstGeom prst="rect">
             <a:avLst/>
           </a:prstGeom>
-          <a:noFill/>
+          <a:solidFill>
+            <a:srgbClr val="F2F2F2"/>
+          </a:solidFill>
+          <a:ln>
+            <a:noFill/>
+          </a:ln>
         </p:spPr>
-        <p:txBody>
-          <a:bodyPr wrap="square">
-            <a:spAutoFit/>
-          </a:bodyPr>
+        <p:style>
+          <a:lnRef idx="1">
+            <a:schemeClr val="accent1"/>
+          </a:lnRef>
+          <a:fillRef idx="3">
+            <a:schemeClr val="accent1"/>
+          </a:fillRef>
+          <a:effectRef idx="2">
+            <a:schemeClr val="accent1"/>
+          </a:effectRef>
+          <a:fontRef idx="minor">
+            <a:schemeClr val="lt1"/>
+          </a:fontRef>
+        </p:style>
+        <p:txBody>
+          <a:bodyPr rtlCol="0" anchor="ctr" wrap="square" lIns="73152" rIns="73152"/>
           <a:lstStyle/>
           <a:p>
             <a:pPr algn="ctr">
-              <a:defRPr sz="1200" b="0">
+              <a:defRPr sz="850">
                 <a:solidFill>
                   <a:srgbClr val="666666"/>
                 </a:solidFill>
@@ -11585,14 +13733,14 @@
               </a:defRPr>
             </a:pPr>
             <a:r>
-              <a:t>(a) ReadText — MFCCs + pitch dominate</a:t>
+              <a:t>(a) ReadText — MFCCs + pitch dominate | Ref: fig:imp-categories-main</a:t>
             </a:r>
           </a:p>
         </p:txBody>
       </p:sp>
       <p:pic>
         <p:nvPicPr>
-          <p:cNvPr id="5" name="Picture 4" descr="fig_imp_spontaneous_cats.png"/>
+          <p:cNvPr id="6" name="Picture 5" descr="fig_imp_spontaneous_cats.png"/>
           <p:cNvPicPr>
             <a:picLocks noChangeAspect="1"/>
           </p:cNvPicPr>
@@ -11616,14 +13764,110 @@
       </p:pic>
       <p:sp>
         <p:nvSpPr>
-          <p:cNvPr id="6" name="TextBox 5"/>
+          <p:cNvPr id="7" name="Rectangle 6"/>
+          <p:cNvSpPr/>
+          <p:nvPr/>
+        </p:nvSpPr>
+        <p:spPr>
+          <a:xfrm>
+            <a:off x="6309360" y="4497082"/>
+            <a:ext cx="5303520" cy="292608"/>
+          </a:xfrm>
+          <a:prstGeom prst="rect">
+            <a:avLst/>
+          </a:prstGeom>
+          <a:solidFill>
+            <a:srgbClr val="F2F2F2"/>
+          </a:solidFill>
+          <a:ln>
+            <a:noFill/>
+          </a:ln>
+        </p:spPr>
+        <p:style>
+          <a:lnRef idx="1">
+            <a:schemeClr val="accent1"/>
+          </a:lnRef>
+          <a:fillRef idx="3">
+            <a:schemeClr val="accent1"/>
+          </a:fillRef>
+          <a:effectRef idx="2">
+            <a:schemeClr val="accent1"/>
+          </a:effectRef>
+          <a:fontRef idx="minor">
+            <a:schemeClr val="lt1"/>
+          </a:fontRef>
+        </p:style>
+        <p:txBody>
+          <a:bodyPr rtlCol="0" anchor="ctr" wrap="square" lIns="73152" rIns="73152"/>
+          <a:lstStyle/>
+          <a:p>
+            <a:pPr algn="ctr">
+              <a:defRPr sz="850">
+                <a:solidFill>
+                  <a:srgbClr val="666666"/>
+                </a:solidFill>
+                <a:latin typeface="Calibri"/>
+              </a:defRPr>
+            </a:pPr>
+            <a:r>
+              <a:t>(b) SpontaneousDialogue — MFCCs + shimmer dominate | Ref: fig:imp-categories-main</a:t>
+            </a:r>
+          </a:p>
+        </p:txBody>
+      </p:sp>
+      <p:sp>
+        <p:nvSpPr>
+          <p:cNvPr id="8" name="Rectangle 7"/>
+          <p:cNvSpPr/>
+          <p:nvPr/>
+        </p:nvSpPr>
+        <p:spPr>
+          <a:xfrm>
+            <a:off x="457200" y="6455664"/>
+            <a:ext cx="11247120" cy="9144"/>
+          </a:xfrm>
+          <a:prstGeom prst="rect">
+            <a:avLst/>
+          </a:prstGeom>
+          <a:solidFill>
+            <a:srgbClr val="E86C00"/>
+          </a:solidFill>
+          <a:ln>
+            <a:noFill/>
+          </a:ln>
+        </p:spPr>
+        <p:style>
+          <a:lnRef idx="1">
+            <a:schemeClr val="accent1"/>
+          </a:lnRef>
+          <a:fillRef idx="3">
+            <a:schemeClr val="accent1"/>
+          </a:fillRef>
+          <a:effectRef idx="2">
+            <a:schemeClr val="accent1"/>
+          </a:effectRef>
+          <a:fontRef idx="minor">
+            <a:schemeClr val="lt1"/>
+          </a:fontRef>
+        </p:style>
+        <p:txBody>
+          <a:bodyPr rtlCol="0" anchor="ctr"/>
+          <a:lstStyle/>
+          <a:p>
+            <a:pPr algn="ctr"/>
+          </a:p>
+        </p:txBody>
+      </p:sp>
+      <p:sp>
+        <p:nvSpPr>
+          <p:cNvPr id="9" name="TextBox 8"/>
           <p:cNvSpPr txBox="1"/>
           <p:nvPr/>
         </p:nvSpPr>
         <p:spPr>
           <a:xfrm>
-            <a:off x="6309360" y="5943600"/>
-            <a:ext cx="5303520" cy="457200"/>
+            <a:off x="457200" y="6492240"/>
+            <a:ext cx="11247120" cy="219456"/>
           </a:xfrm>
           <a:prstGeom prst="rect">
             <a:avLst/>
@@ -11636,16 +13880,16 @@
           </a:bodyPr>
           <a:lstStyle/>
           <a:p>
-            <a:pPr algn="ctr">
-              <a:defRPr sz="1200" b="0">
+            <a:pPr algn="r">
+              <a:defRPr sz="900" b="0">
                 <a:solidFill>
-                  <a:srgbClr val="666666"/>
+                  <a:srgbClr val="E86C00"/>
                 </a:solidFill>
                 <a:latin typeface="Calibri"/>
               </a:defRPr>
             </a:pPr>
             <a:r>
-              <a:t>(b) SpontaneousDialogue — MFCCs + shimmer dominate</a:t>
+              <a:t>Διπλωματική Εργασία - Μάρτιος 2026</a:t>
             </a:r>
           </a:p>
         </p:txBody>
@@ -11664,7 +13908,7 @@
     <p:bg>
       <p:bgPr>
         <a:solidFill>
-          <a:srgbClr val="FFFFFF"/>
+          <a:srgbClr val="F8FBFF"/>
         </a:solidFill>
         <a:effectLst/>
       </p:bgPr>
@@ -11729,9 +13973,52 @@
           </a:p>
         </p:txBody>
       </p:sp>
+      <p:sp>
+        <p:nvSpPr>
+          <p:cNvPr id="3" name="Rectangle 2"/>
+          <p:cNvSpPr/>
+          <p:nvPr/>
+        </p:nvSpPr>
+        <p:spPr>
+          <a:xfrm>
+            <a:off x="0" y="987552"/>
+            <a:ext cx="12191695" cy="18288"/>
+          </a:xfrm>
+          <a:prstGeom prst="rect">
+            <a:avLst/>
+          </a:prstGeom>
+          <a:solidFill>
+            <a:srgbClr val="3B82F6"/>
+          </a:solidFill>
+          <a:ln>
+            <a:noFill/>
+          </a:ln>
+        </p:spPr>
+        <p:style>
+          <a:lnRef idx="1">
+            <a:schemeClr val="accent1"/>
+          </a:lnRef>
+          <a:fillRef idx="3">
+            <a:schemeClr val="accent1"/>
+          </a:fillRef>
+          <a:effectRef idx="2">
+            <a:schemeClr val="accent1"/>
+          </a:effectRef>
+          <a:fontRef idx="minor">
+            <a:schemeClr val="lt1"/>
+          </a:fontRef>
+        </p:style>
+        <p:txBody>
+          <a:bodyPr rtlCol="0" anchor="ctr"/>
+          <a:lstStyle/>
+          <a:p>
+            <a:pPr algn="ctr"/>
+          </a:p>
+        </p:txBody>
+      </p:sp>
       <p:pic>
         <p:nvPicPr>
-          <p:cNvPr id="3" name="Picture 2" descr="fig_heatmap_readtext_permutation.png"/>
+          <p:cNvPr id="4" name="Picture 3" descr="fig_heatmap_readtext_permutation.png"/>
           <p:cNvPicPr>
             <a:picLocks noChangeAspect="1"/>
           </p:cNvPicPr>
@@ -11755,28 +14042,45 @@
       </p:pic>
       <p:sp>
         <p:nvSpPr>
-          <p:cNvPr id="4" name="TextBox 3"/>
-          <p:cNvSpPr txBox="1"/>
+          <p:cNvPr id="5" name="Rectangle 4"/>
+          <p:cNvSpPr/>
           <p:nvPr/>
         </p:nvSpPr>
         <p:spPr>
           <a:xfrm>
-            <a:off x="365760" y="5943600"/>
-            <a:ext cx="5303520" cy="457200"/>
+            <a:off x="365760" y="5724144"/>
+            <a:ext cx="4186454" cy="292608"/>
           </a:xfrm>
           <a:prstGeom prst="rect">
             <a:avLst/>
           </a:prstGeom>
-          <a:noFill/>
+          <a:solidFill>
+            <a:srgbClr val="F2F2F2"/>
+          </a:solidFill>
+          <a:ln>
+            <a:noFill/>
+          </a:ln>
         </p:spPr>
-        <p:txBody>
-          <a:bodyPr wrap="square">
-            <a:spAutoFit/>
-          </a:bodyPr>
+        <p:style>
+          <a:lnRef idx="1">
+            <a:schemeClr val="accent1"/>
+          </a:lnRef>
+          <a:fillRef idx="3">
+            <a:schemeClr val="accent1"/>
+          </a:fillRef>
+          <a:effectRef idx="2">
+            <a:schemeClr val="accent1"/>
+          </a:effectRef>
+          <a:fontRef idx="minor">
+            <a:schemeClr val="lt1"/>
+          </a:fontRef>
+        </p:style>
+        <p:txBody>
+          <a:bodyPr rtlCol="0" anchor="ctr" wrap="square" lIns="73152" rIns="73152"/>
           <a:lstStyle/>
           <a:p>
             <a:pPr algn="ctr">
-              <a:defRPr sz="1200" b="0">
+              <a:defRPr sz="850">
                 <a:solidFill>
                   <a:srgbClr val="666666"/>
                 </a:solidFill>
@@ -11784,14 +14088,14 @@
               </a:defRPr>
             </a:pPr>
             <a:r>
-              <a:t>(a) ReadText — Feature × Model</a:t>
+              <a:t>(a) ReadText — Feature × Model | Ref: fig:heatmap-readtext-permutation-main</a:t>
             </a:r>
           </a:p>
         </p:txBody>
       </p:sp>
       <p:pic>
         <p:nvPicPr>
-          <p:cNvPr id="5" name="Picture 4" descr="fig_heatmap_spontaneous_permutation.png"/>
+          <p:cNvPr id="6" name="Picture 5" descr="fig_heatmap_spontaneous_permutation.png"/>
           <p:cNvPicPr>
             <a:picLocks noChangeAspect="1"/>
           </p:cNvPicPr>
@@ -11815,14 +14119,110 @@
       </p:pic>
       <p:sp>
         <p:nvSpPr>
-          <p:cNvPr id="6" name="TextBox 5"/>
+          <p:cNvPr id="7" name="Rectangle 6"/>
+          <p:cNvSpPr/>
+          <p:nvPr/>
+        </p:nvSpPr>
+        <p:spPr>
+          <a:xfrm>
+            <a:off x="6309360" y="5724144"/>
+            <a:ext cx="4186454" cy="292608"/>
+          </a:xfrm>
+          <a:prstGeom prst="rect">
+            <a:avLst/>
+          </a:prstGeom>
+          <a:solidFill>
+            <a:srgbClr val="F2F2F2"/>
+          </a:solidFill>
+          <a:ln>
+            <a:noFill/>
+          </a:ln>
+        </p:spPr>
+        <p:style>
+          <a:lnRef idx="1">
+            <a:schemeClr val="accent1"/>
+          </a:lnRef>
+          <a:fillRef idx="3">
+            <a:schemeClr val="accent1"/>
+          </a:fillRef>
+          <a:effectRef idx="2">
+            <a:schemeClr val="accent1"/>
+          </a:effectRef>
+          <a:fontRef idx="minor">
+            <a:schemeClr val="lt1"/>
+          </a:fontRef>
+        </p:style>
+        <p:txBody>
+          <a:bodyPr rtlCol="0" anchor="ctr" wrap="square" lIns="73152" rIns="73152"/>
+          <a:lstStyle/>
+          <a:p>
+            <a:pPr algn="ctr">
+              <a:defRPr sz="850">
+                <a:solidFill>
+                  <a:srgbClr val="666666"/>
+                </a:solidFill>
+                <a:latin typeface="Calibri"/>
+              </a:defRPr>
+            </a:pPr>
+            <a:r>
+              <a:t>(b) SpontaneousDialogue — Feature × Model | Ref: fig:heatmap-spontaneous-permutation-main</a:t>
+            </a:r>
+          </a:p>
+        </p:txBody>
+      </p:sp>
+      <p:sp>
+        <p:nvSpPr>
+          <p:cNvPr id="8" name="Rectangle 7"/>
+          <p:cNvSpPr/>
+          <p:nvPr/>
+        </p:nvSpPr>
+        <p:spPr>
+          <a:xfrm>
+            <a:off x="457200" y="6455664"/>
+            <a:ext cx="11247120" cy="9144"/>
+          </a:xfrm>
+          <a:prstGeom prst="rect">
+            <a:avLst/>
+          </a:prstGeom>
+          <a:solidFill>
+            <a:srgbClr val="E86C00"/>
+          </a:solidFill>
+          <a:ln>
+            <a:noFill/>
+          </a:ln>
+        </p:spPr>
+        <p:style>
+          <a:lnRef idx="1">
+            <a:schemeClr val="accent1"/>
+          </a:lnRef>
+          <a:fillRef idx="3">
+            <a:schemeClr val="accent1"/>
+          </a:fillRef>
+          <a:effectRef idx="2">
+            <a:schemeClr val="accent1"/>
+          </a:effectRef>
+          <a:fontRef idx="minor">
+            <a:schemeClr val="lt1"/>
+          </a:fontRef>
+        </p:style>
+        <p:txBody>
+          <a:bodyPr rtlCol="0" anchor="ctr"/>
+          <a:lstStyle/>
+          <a:p>
+            <a:pPr algn="ctr"/>
+          </a:p>
+        </p:txBody>
+      </p:sp>
+      <p:sp>
+        <p:nvSpPr>
+          <p:cNvPr id="9" name="TextBox 8"/>
           <p:cNvSpPr txBox="1"/>
           <p:nvPr/>
         </p:nvSpPr>
         <p:spPr>
           <a:xfrm>
-            <a:off x="6309360" y="5943600"/>
-            <a:ext cx="5303520" cy="457200"/>
+            <a:off x="457200" y="6492240"/>
+            <a:ext cx="11247120" cy="219456"/>
           </a:xfrm>
           <a:prstGeom prst="rect">
             <a:avLst/>
@@ -11835,16 +14235,16 @@
           </a:bodyPr>
           <a:lstStyle/>
           <a:p>
-            <a:pPr algn="ctr">
-              <a:defRPr sz="1200" b="0">
+            <a:pPr algn="r">
+              <a:defRPr sz="900" b="0">
                 <a:solidFill>
-                  <a:srgbClr val="666666"/>
+                  <a:srgbClr val="E86C00"/>
                 </a:solidFill>
                 <a:latin typeface="Calibri"/>
               </a:defRPr>
             </a:pPr>
             <a:r>
-              <a:t>(b) SpontaneousDialogue — Feature × Model</a:t>
+              <a:t>Διπλωματική Εργασία - Μάρτιος 2026</a:t>
             </a:r>
           </a:p>
         </p:txBody>
@@ -11863,7 +14263,7 @@
     <p:bg>
       <p:bgPr>
         <a:solidFill>
-          <a:srgbClr val="FFFFFF"/>
+          <a:srgbClr val="F8FBFF"/>
         </a:solidFill>
         <a:effectLst/>
       </p:bgPr>
@@ -11928,9 +14328,52 @@
           </a:p>
         </p:txBody>
       </p:sp>
+      <p:sp>
+        <p:nvSpPr>
+          <p:cNvPr id="3" name="Rectangle 2"/>
+          <p:cNvSpPr/>
+          <p:nvPr/>
+        </p:nvSpPr>
+        <p:spPr>
+          <a:xfrm>
+            <a:off x="0" y="987552"/>
+            <a:ext cx="12191695" cy="18288"/>
+          </a:xfrm>
+          <a:prstGeom prst="rect">
+            <a:avLst/>
+          </a:prstGeom>
+          <a:solidFill>
+            <a:srgbClr val="3B82F6"/>
+          </a:solidFill>
+          <a:ln>
+            <a:noFill/>
+          </a:ln>
+        </p:spPr>
+        <p:style>
+          <a:lnRef idx="1">
+            <a:schemeClr val="accent1"/>
+          </a:lnRef>
+          <a:fillRef idx="3">
+            <a:schemeClr val="accent1"/>
+          </a:fillRef>
+          <a:effectRef idx="2">
+            <a:schemeClr val="accent1"/>
+          </a:effectRef>
+          <a:fontRef idx="minor">
+            <a:schemeClr val="lt1"/>
+          </a:fontRef>
+        </p:style>
+        <p:txBody>
+          <a:bodyPr rtlCol="0" anchor="ctr"/>
+          <a:lstStyle/>
+          <a:p>
+            <a:pPr algn="ctr"/>
+          </a:p>
+        </p:txBody>
+      </p:sp>
       <p:graphicFrame>
         <p:nvGraphicFramePr>
-          <p:cNvPr id="3" name="Table 2"/>
+          <p:cNvPr id="4" name="Table 3"/>
           <p:cNvGraphicFramePr>
             <a:graphicFrameLocks noGrp="1"/>
           </p:cNvGraphicFramePr>
@@ -11938,7 +14381,7 @@
         </p:nvGraphicFramePr>
         <p:xfrm>
           <a:off x="457200" y="1371600"/>
-          <a:ext cx="11247120" cy="3200400"/>
+          <a:ext cx="11247120" cy="2752344"/>
         </p:xfrm>
         <a:graphic>
           <a:graphicData uri="http://schemas.openxmlformats.org/drawingml/2006/table">
@@ -11951,7 +14394,7 @@
                 <a:gridCol w="3374136"/>
                 <a:gridCol w="4217670"/>
               </a:tblGrid>
-              <a:tr h="457200">
+              <a:tr h="393192">
                 <a:tc>
                   <a:txBody>
                     <a:bodyPr/>
@@ -12025,7 +14468,7 @@
                   </a:tcPr>
                 </a:tc>
               </a:tr>
-              <a:tr h="457200">
+              <a:tr h="393192">
                 <a:tc>
                   <a:txBody>
                     <a:bodyPr/>
@@ -12099,7 +14542,7 @@
                   </a:tcPr>
                 </a:tc>
               </a:tr>
-              <a:tr h="457200">
+              <a:tr h="393192">
                 <a:tc>
                   <a:txBody>
                     <a:bodyPr/>
@@ -12173,7 +14616,7 @@
                   </a:tcPr>
                 </a:tc>
               </a:tr>
-              <a:tr h="457200">
+              <a:tr h="393192">
                 <a:tc>
                   <a:txBody>
                     <a:bodyPr/>
@@ -12247,7 +14690,7 @@
                   </a:tcPr>
                 </a:tc>
               </a:tr>
-              <a:tr h="457200">
+              <a:tr h="393192">
                 <a:tc>
                   <a:txBody>
                     <a:bodyPr/>
@@ -12321,7 +14764,7 @@
                   </a:tcPr>
                 </a:tc>
               </a:tr>
-              <a:tr h="457200">
+              <a:tr h="393192">
                 <a:tc>
                   <a:txBody>
                     <a:bodyPr/>
@@ -12395,7 +14838,7 @@
                   </a:tcPr>
                 </a:tc>
               </a:tr>
-              <a:tr h="457200">
+              <a:tr h="393192">
                 <a:tc>
                   <a:txBody>
                     <a:bodyPr/>
@@ -12473,6 +14916,138 @@
           </a:graphicData>
         </a:graphic>
       </p:graphicFrame>
+      <p:sp>
+        <p:nvSpPr>
+          <p:cNvPr id="5" name="Rectangle 4"/>
+          <p:cNvSpPr/>
+          <p:nvPr/>
+        </p:nvSpPr>
+        <p:spPr>
+          <a:xfrm>
+            <a:off x="457200" y="6108192"/>
+            <a:ext cx="11247120" cy="237744"/>
+          </a:xfrm>
+          <a:prstGeom prst="rect">
+            <a:avLst/>
+          </a:prstGeom>
+          <a:solidFill>
+            <a:srgbClr val="F2F2F2"/>
+          </a:solidFill>
+          <a:ln>
+            <a:noFill/>
+          </a:ln>
+        </p:spPr>
+        <p:style>
+          <a:lnRef idx="1">
+            <a:schemeClr val="accent1"/>
+          </a:lnRef>
+          <a:fillRef idx="3">
+            <a:schemeClr val="accent1"/>
+          </a:fillRef>
+          <a:effectRef idx="2">
+            <a:schemeClr val="accent1"/>
+          </a:effectRef>
+          <a:fontRef idx="minor">
+            <a:schemeClr val="lt1"/>
+          </a:fontRef>
+        </p:style>
+        <p:txBody>
+          <a:bodyPr rtlCol="0" anchor="ctr" wrap="square" lIns="109728" rIns="109728" tIns="18288"/>
+          <a:lstStyle/>
+          <a:p>
+            <a:pPr algn="l">
+              <a:defRPr sz="1000">
+                <a:solidFill>
+                  <a:srgbClr val="666666"/>
+                </a:solidFill>
+                <a:latin typeface="Calibri"/>
+              </a:defRPr>
+            </a:pPr>
+            <a:r>
+              <a:t>Table 8.2: Validity threats and mitigation | tab:validity-threats-summary | Source: Thesis manuscript and computed results</a:t>
+            </a:r>
+          </a:p>
+        </p:txBody>
+      </p:sp>
+      <p:sp>
+        <p:nvSpPr>
+          <p:cNvPr id="6" name="Rectangle 5"/>
+          <p:cNvSpPr/>
+          <p:nvPr/>
+        </p:nvSpPr>
+        <p:spPr>
+          <a:xfrm>
+            <a:off x="457200" y="6455664"/>
+            <a:ext cx="11247120" cy="9144"/>
+          </a:xfrm>
+          <a:prstGeom prst="rect">
+            <a:avLst/>
+          </a:prstGeom>
+          <a:solidFill>
+            <a:srgbClr val="E86C00"/>
+          </a:solidFill>
+          <a:ln>
+            <a:noFill/>
+          </a:ln>
+        </p:spPr>
+        <p:style>
+          <a:lnRef idx="1">
+            <a:schemeClr val="accent1"/>
+          </a:lnRef>
+          <a:fillRef idx="3">
+            <a:schemeClr val="accent1"/>
+          </a:fillRef>
+          <a:effectRef idx="2">
+            <a:schemeClr val="accent1"/>
+          </a:effectRef>
+          <a:fontRef idx="minor">
+            <a:schemeClr val="lt1"/>
+          </a:fontRef>
+        </p:style>
+        <p:txBody>
+          <a:bodyPr rtlCol="0" anchor="ctr"/>
+          <a:lstStyle/>
+          <a:p>
+            <a:pPr algn="ctr"/>
+          </a:p>
+        </p:txBody>
+      </p:sp>
+      <p:sp>
+        <p:nvSpPr>
+          <p:cNvPr id="7" name="TextBox 6"/>
+          <p:cNvSpPr txBox="1"/>
+          <p:nvPr/>
+        </p:nvSpPr>
+        <p:spPr>
+          <a:xfrm>
+            <a:off x="457200" y="6492240"/>
+            <a:ext cx="11247120" cy="219456"/>
+          </a:xfrm>
+          <a:prstGeom prst="rect">
+            <a:avLst/>
+          </a:prstGeom>
+          <a:noFill/>
+        </p:spPr>
+        <p:txBody>
+          <a:bodyPr wrap="square">
+            <a:spAutoFit/>
+          </a:bodyPr>
+          <a:lstStyle/>
+          <a:p>
+            <a:pPr algn="r">
+              <a:defRPr sz="900" b="0">
+                <a:solidFill>
+                  <a:srgbClr val="E86C00"/>
+                </a:solidFill>
+                <a:latin typeface="Calibri"/>
+              </a:defRPr>
+            </a:pPr>
+            <a:r>
+              <a:t>Διπλωματική Εργασία - Μάρτιος 2026</a:t>
+            </a:r>
+          </a:p>
+        </p:txBody>
+      </p:sp>
     </p:spTree>
   </p:cSld>
   <p:clrMapOvr>
@@ -12487,7 +15062,7 @@
     <p:bg>
       <p:bgPr>
         <a:solidFill>
-          <a:srgbClr val="FFFFFF"/>
+          <a:srgbClr val="F8FBFF"/>
         </a:solidFill>
         <a:effectLst/>
       </p:bgPr>
@@ -13404,7 +15979,7 @@
     <p:bg>
       <p:bgPr>
         <a:solidFill>
-          <a:srgbClr val="FFFFFF"/>
+          <a:srgbClr val="F8FBFF"/>
         </a:solidFill>
         <a:effectLst/>
       </p:bgPr>
@@ -13464,14 +16039,57 @@
               </a:defRPr>
             </a:pPr>
             <a:r>
-              <a:t>[Backup] Full Results — C4: Extended + Weighted (Dataset A)</a:t>
-            </a:r>
+              <a:t>Full Results — C4: Extended + Weighted (Dataset A)</a:t>
+            </a:r>
+          </a:p>
+        </p:txBody>
+      </p:sp>
+      <p:sp>
+        <p:nvSpPr>
+          <p:cNvPr id="3" name="Rectangle 2"/>
+          <p:cNvSpPr/>
+          <p:nvPr/>
+        </p:nvSpPr>
+        <p:spPr>
+          <a:xfrm>
+            <a:off x="0" y="987552"/>
+            <a:ext cx="12191695" cy="18288"/>
+          </a:xfrm>
+          <a:prstGeom prst="rect">
+            <a:avLst/>
+          </a:prstGeom>
+          <a:solidFill>
+            <a:srgbClr val="3B82F6"/>
+          </a:solidFill>
+          <a:ln>
+            <a:noFill/>
+          </a:ln>
+        </p:spPr>
+        <p:style>
+          <a:lnRef idx="1">
+            <a:schemeClr val="accent1"/>
+          </a:lnRef>
+          <a:fillRef idx="3">
+            <a:schemeClr val="accent1"/>
+          </a:fillRef>
+          <a:effectRef idx="2">
+            <a:schemeClr val="accent1"/>
+          </a:effectRef>
+          <a:fontRef idx="minor">
+            <a:schemeClr val="lt1"/>
+          </a:fontRef>
+        </p:style>
+        <p:txBody>
+          <a:bodyPr rtlCol="0" anchor="ctr"/>
+          <a:lstStyle/>
+          <a:p>
+            <a:pPr algn="ctr"/>
           </a:p>
         </p:txBody>
       </p:sp>
       <p:graphicFrame>
         <p:nvGraphicFramePr>
-          <p:cNvPr id="3" name="Table 2"/>
+          <p:cNvPr id="4" name="Table 3"/>
           <p:cNvGraphicFramePr>
             <a:graphicFrameLocks noGrp="1"/>
           </p:cNvGraphicFramePr>
@@ -13479,7 +16097,7 @@
         </p:nvGraphicFramePr>
         <p:xfrm>
           <a:off x="457200" y="1371600"/>
-          <a:ext cx="11247116" cy="5029200"/>
+          <a:ext cx="11247116" cy="4325112"/>
         </p:xfrm>
         <a:graphic>
           <a:graphicData uri="http://schemas.openxmlformats.org/drawingml/2006/table">
@@ -13496,7 +16114,7 @@
                 <a:gridCol w="1606731"/>
                 <a:gridCol w="2008414"/>
               </a:tblGrid>
-              <a:tr h="457200">
+              <a:tr h="393192">
                 <a:tc>
                   <a:txBody>
                     <a:bodyPr/>
@@ -13666,7 +16284,7 @@
                   </a:tcPr>
                 </a:tc>
               </a:tr>
-              <a:tr h="457200">
+              <a:tr h="393192">
                 <a:tc>
                   <a:txBody>
                     <a:bodyPr/>
@@ -13836,7 +16454,7 @@
                   </a:tcPr>
                 </a:tc>
               </a:tr>
-              <a:tr h="457200">
+              <a:tr h="393192">
                 <a:tc>
                   <a:txBody>
                     <a:bodyPr/>
@@ -14006,7 +16624,7 @@
                   </a:tcPr>
                 </a:tc>
               </a:tr>
-              <a:tr h="457200">
+              <a:tr h="393192">
                 <a:tc>
                   <a:txBody>
                     <a:bodyPr/>
@@ -14176,7 +16794,7 @@
                   </a:tcPr>
                 </a:tc>
               </a:tr>
-              <a:tr h="457200">
+              <a:tr h="393192">
                 <a:tc>
                   <a:txBody>
                     <a:bodyPr/>
@@ -14346,7 +16964,7 @@
                   </a:tcPr>
                 </a:tc>
               </a:tr>
-              <a:tr h="457200">
+              <a:tr h="393192">
                 <a:tc>
                   <a:txBody>
                     <a:bodyPr/>
@@ -14516,7 +17134,7 @@
                   </a:tcPr>
                 </a:tc>
               </a:tr>
-              <a:tr h="457200">
+              <a:tr h="393192">
                 <a:tc>
                   <a:txBody>
                     <a:bodyPr/>
@@ -14686,7 +17304,7 @@
                   </a:tcPr>
                 </a:tc>
               </a:tr>
-              <a:tr h="457200">
+              <a:tr h="393192">
                 <a:tc>
                   <a:txBody>
                     <a:bodyPr/>
@@ -14856,7 +17474,7 @@
                   </a:tcPr>
                 </a:tc>
               </a:tr>
-              <a:tr h="457200">
+              <a:tr h="393192">
                 <a:tc>
                   <a:txBody>
                     <a:bodyPr/>
@@ -15026,7 +17644,7 @@
                   </a:tcPr>
                 </a:tc>
               </a:tr>
-              <a:tr h="457200">
+              <a:tr h="393192">
                 <a:tc>
                   <a:txBody>
                     <a:bodyPr/>
@@ -15196,7 +17814,7 @@
                   </a:tcPr>
                 </a:tc>
               </a:tr>
-              <a:tr h="457200">
+              <a:tr h="393192">
                 <a:tc>
                   <a:txBody>
                     <a:bodyPr/>
@@ -15370,6 +17988,138 @@
           </a:graphicData>
         </a:graphic>
       </p:graphicFrame>
+      <p:sp>
+        <p:nvSpPr>
+          <p:cNvPr id="5" name="Rectangle 4"/>
+          <p:cNvSpPr/>
+          <p:nvPr/>
+        </p:nvSpPr>
+        <p:spPr>
+          <a:xfrm>
+            <a:off x="457200" y="6108192"/>
+            <a:ext cx="11247120" cy="237744"/>
+          </a:xfrm>
+          <a:prstGeom prst="rect">
+            <a:avLst/>
+          </a:prstGeom>
+          <a:solidFill>
+            <a:srgbClr val="F2F2F2"/>
+          </a:solidFill>
+          <a:ln>
+            <a:noFill/>
+          </a:ln>
+        </p:spPr>
+        <p:style>
+          <a:lnRef idx="1">
+            <a:schemeClr val="accent1"/>
+          </a:lnRef>
+          <a:fillRef idx="3">
+            <a:schemeClr val="accent1"/>
+          </a:fillRef>
+          <a:effectRef idx="2">
+            <a:schemeClr val="accent1"/>
+          </a:effectRef>
+          <a:fontRef idx="minor">
+            <a:schemeClr val="lt1"/>
+          </a:fontRef>
+        </p:style>
+        <p:txBody>
+          <a:bodyPr rtlCol="0" anchor="ctr" wrap="square" lIns="109728" rIns="109728" tIns="18288"/>
+          <a:lstStyle/>
+          <a:p>
+            <a:pPr algn="l">
+              <a:defRPr sz="1000">
+                <a:solidFill>
+                  <a:srgbClr val="666666"/>
+                </a:solidFill>
+                <a:latin typeface="Calibri"/>
+              </a:defRPr>
+            </a:pPr>
+            <a:r>
+              <a:t>Table 6.7: Full C4 results — Dataset A | tab:results-c4-dataset-a | Source: Thesis manuscript and computed results</a:t>
+            </a:r>
+          </a:p>
+        </p:txBody>
+      </p:sp>
+      <p:sp>
+        <p:nvSpPr>
+          <p:cNvPr id="6" name="Rectangle 5"/>
+          <p:cNvSpPr/>
+          <p:nvPr/>
+        </p:nvSpPr>
+        <p:spPr>
+          <a:xfrm>
+            <a:off x="457200" y="6455664"/>
+            <a:ext cx="11247120" cy="9144"/>
+          </a:xfrm>
+          <a:prstGeom prst="rect">
+            <a:avLst/>
+          </a:prstGeom>
+          <a:solidFill>
+            <a:srgbClr val="E86C00"/>
+          </a:solidFill>
+          <a:ln>
+            <a:noFill/>
+          </a:ln>
+        </p:spPr>
+        <p:style>
+          <a:lnRef idx="1">
+            <a:schemeClr val="accent1"/>
+          </a:lnRef>
+          <a:fillRef idx="3">
+            <a:schemeClr val="accent1"/>
+          </a:fillRef>
+          <a:effectRef idx="2">
+            <a:schemeClr val="accent1"/>
+          </a:effectRef>
+          <a:fontRef idx="minor">
+            <a:schemeClr val="lt1"/>
+          </a:fontRef>
+        </p:style>
+        <p:txBody>
+          <a:bodyPr rtlCol="0" anchor="ctr"/>
+          <a:lstStyle/>
+          <a:p>
+            <a:pPr algn="ctr"/>
+          </a:p>
+        </p:txBody>
+      </p:sp>
+      <p:sp>
+        <p:nvSpPr>
+          <p:cNvPr id="7" name="TextBox 6"/>
+          <p:cNvSpPr txBox="1"/>
+          <p:nvPr/>
+        </p:nvSpPr>
+        <p:spPr>
+          <a:xfrm>
+            <a:off x="457200" y="6492240"/>
+            <a:ext cx="11247120" cy="219456"/>
+          </a:xfrm>
+          <a:prstGeom prst="rect">
+            <a:avLst/>
+          </a:prstGeom>
+          <a:noFill/>
+        </p:spPr>
+        <p:txBody>
+          <a:bodyPr wrap="square">
+            <a:spAutoFit/>
+          </a:bodyPr>
+          <a:lstStyle/>
+          <a:p>
+            <a:pPr algn="r">
+              <a:defRPr sz="900" b="0">
+                <a:solidFill>
+                  <a:srgbClr val="E86C00"/>
+                </a:solidFill>
+                <a:latin typeface="Calibri"/>
+              </a:defRPr>
+            </a:pPr>
+            <a:r>
+              <a:t>Διπλωματική Εργασία - Μάρτιος 2026</a:t>
+            </a:r>
+          </a:p>
+        </p:txBody>
+      </p:sp>
     </p:spTree>
   </p:cSld>
   <p:clrMapOvr>
@@ -15384,7 +18134,7 @@
     <p:bg>
       <p:bgPr>
         <a:solidFill>
-          <a:srgbClr val="FFFFFF"/>
+          <a:srgbClr val="F8FBFF"/>
         </a:solidFill>
         <a:effectLst/>
       </p:bgPr>
@@ -15444,14 +18194,57 @@
               </a:defRPr>
             </a:pPr>
             <a:r>
-              <a:t>[Backup] Full Results — C4: Extended + Weighted (Dataset B)</a:t>
-            </a:r>
+              <a:t>Full Results — C4: Extended + Weighted (Dataset B)</a:t>
+            </a:r>
+          </a:p>
+        </p:txBody>
+      </p:sp>
+      <p:sp>
+        <p:nvSpPr>
+          <p:cNvPr id="3" name="Rectangle 2"/>
+          <p:cNvSpPr/>
+          <p:nvPr/>
+        </p:nvSpPr>
+        <p:spPr>
+          <a:xfrm>
+            <a:off x="0" y="987552"/>
+            <a:ext cx="12191695" cy="18288"/>
+          </a:xfrm>
+          <a:prstGeom prst="rect">
+            <a:avLst/>
+          </a:prstGeom>
+          <a:solidFill>
+            <a:srgbClr val="3B82F6"/>
+          </a:solidFill>
+          <a:ln>
+            <a:noFill/>
+          </a:ln>
+        </p:spPr>
+        <p:style>
+          <a:lnRef idx="1">
+            <a:schemeClr val="accent1"/>
+          </a:lnRef>
+          <a:fillRef idx="3">
+            <a:schemeClr val="accent1"/>
+          </a:fillRef>
+          <a:effectRef idx="2">
+            <a:schemeClr val="accent1"/>
+          </a:effectRef>
+          <a:fontRef idx="minor">
+            <a:schemeClr val="lt1"/>
+          </a:fontRef>
+        </p:style>
+        <p:txBody>
+          <a:bodyPr rtlCol="0" anchor="ctr"/>
+          <a:lstStyle/>
+          <a:p>
+            <a:pPr algn="ctr"/>
           </a:p>
         </p:txBody>
       </p:sp>
       <p:graphicFrame>
         <p:nvGraphicFramePr>
-          <p:cNvPr id="3" name="Table 2"/>
+          <p:cNvPr id="4" name="Table 3"/>
           <p:cNvGraphicFramePr>
             <a:graphicFrameLocks noGrp="1"/>
           </p:cNvGraphicFramePr>
@@ -15459,7 +18252,7 @@
         </p:nvGraphicFramePr>
         <p:xfrm>
           <a:off x="457200" y="1371600"/>
-          <a:ext cx="11247119" cy="2743200"/>
+          <a:ext cx="11247119" cy="2359152"/>
         </p:xfrm>
         <a:graphic>
           <a:graphicData uri="http://schemas.openxmlformats.org/drawingml/2006/table">
@@ -15475,7 +18268,7 @@
                 <a:gridCol w="1775861"/>
                 <a:gridCol w="1775861"/>
               </a:tblGrid>
-              <a:tr h="457200">
+              <a:tr h="393192">
                 <a:tc>
                   <a:txBody>
                     <a:bodyPr/>
@@ -15621,7 +18414,7 @@
                   </a:tcPr>
                 </a:tc>
               </a:tr>
-              <a:tr h="457200">
+              <a:tr h="393192">
                 <a:tc>
                   <a:txBody>
                     <a:bodyPr/>
@@ -15767,7 +18560,7 @@
                   </a:tcPr>
                 </a:tc>
               </a:tr>
-              <a:tr h="457200">
+              <a:tr h="393192">
                 <a:tc>
                   <a:txBody>
                     <a:bodyPr/>
@@ -15913,7 +18706,7 @@
                   </a:tcPr>
                 </a:tc>
               </a:tr>
-              <a:tr h="457200">
+              <a:tr h="393192">
                 <a:tc>
                   <a:txBody>
                     <a:bodyPr/>
@@ -16059,7 +18852,7 @@
                   </a:tcPr>
                 </a:tc>
               </a:tr>
-              <a:tr h="457200">
+              <a:tr h="393192">
                 <a:tc>
                   <a:txBody>
                     <a:bodyPr/>
@@ -16205,7 +18998,7 @@
                   </a:tcPr>
                 </a:tc>
               </a:tr>
-              <a:tr h="457200">
+              <a:tr h="393192">
                 <a:tc>
                   <a:txBody>
                     <a:bodyPr/>
@@ -16355,6 +19148,138 @@
           </a:graphicData>
         </a:graphic>
       </p:graphicFrame>
+      <p:sp>
+        <p:nvSpPr>
+          <p:cNvPr id="5" name="Rectangle 4"/>
+          <p:cNvSpPr/>
+          <p:nvPr/>
+        </p:nvSpPr>
+        <p:spPr>
+          <a:xfrm>
+            <a:off x="457200" y="6108192"/>
+            <a:ext cx="11247120" cy="237744"/>
+          </a:xfrm>
+          <a:prstGeom prst="rect">
+            <a:avLst/>
+          </a:prstGeom>
+          <a:solidFill>
+            <a:srgbClr val="F2F2F2"/>
+          </a:solidFill>
+          <a:ln>
+            <a:noFill/>
+          </a:ln>
+        </p:spPr>
+        <p:style>
+          <a:lnRef idx="1">
+            <a:schemeClr val="accent1"/>
+          </a:lnRef>
+          <a:fillRef idx="3">
+            <a:schemeClr val="accent1"/>
+          </a:fillRef>
+          <a:effectRef idx="2">
+            <a:schemeClr val="accent1"/>
+          </a:effectRef>
+          <a:fontRef idx="minor">
+            <a:schemeClr val="lt1"/>
+          </a:fontRef>
+        </p:style>
+        <p:txBody>
+          <a:bodyPr rtlCol="0" anchor="ctr" wrap="square" lIns="109728" rIns="109728" tIns="18288"/>
+          <a:lstStyle/>
+          <a:p>
+            <a:pPr algn="l">
+              <a:defRPr sz="1000">
+                <a:solidFill>
+                  <a:srgbClr val="666666"/>
+                </a:solidFill>
+                <a:latin typeface="Calibri"/>
+              </a:defRPr>
+            </a:pPr>
+            <a:r>
+              <a:t>Table 6.8: Full C4 results — Dataset B | tab:results-c4-dataset-b | Source: Thesis manuscript and computed results</a:t>
+            </a:r>
+          </a:p>
+        </p:txBody>
+      </p:sp>
+      <p:sp>
+        <p:nvSpPr>
+          <p:cNvPr id="6" name="Rectangle 5"/>
+          <p:cNvSpPr/>
+          <p:nvPr/>
+        </p:nvSpPr>
+        <p:spPr>
+          <a:xfrm>
+            <a:off x="457200" y="6455664"/>
+            <a:ext cx="11247120" cy="9144"/>
+          </a:xfrm>
+          <a:prstGeom prst="rect">
+            <a:avLst/>
+          </a:prstGeom>
+          <a:solidFill>
+            <a:srgbClr val="E86C00"/>
+          </a:solidFill>
+          <a:ln>
+            <a:noFill/>
+          </a:ln>
+        </p:spPr>
+        <p:style>
+          <a:lnRef idx="1">
+            <a:schemeClr val="accent1"/>
+          </a:lnRef>
+          <a:fillRef idx="3">
+            <a:schemeClr val="accent1"/>
+          </a:fillRef>
+          <a:effectRef idx="2">
+            <a:schemeClr val="accent1"/>
+          </a:effectRef>
+          <a:fontRef idx="minor">
+            <a:schemeClr val="lt1"/>
+          </a:fontRef>
+        </p:style>
+        <p:txBody>
+          <a:bodyPr rtlCol="0" anchor="ctr"/>
+          <a:lstStyle/>
+          <a:p>
+            <a:pPr algn="ctr"/>
+          </a:p>
+        </p:txBody>
+      </p:sp>
+      <p:sp>
+        <p:nvSpPr>
+          <p:cNvPr id="7" name="TextBox 6"/>
+          <p:cNvSpPr txBox="1"/>
+          <p:nvPr/>
+        </p:nvSpPr>
+        <p:spPr>
+          <a:xfrm>
+            <a:off x="457200" y="6492240"/>
+            <a:ext cx="11247120" cy="219456"/>
+          </a:xfrm>
+          <a:prstGeom prst="rect">
+            <a:avLst/>
+          </a:prstGeom>
+          <a:noFill/>
+        </p:spPr>
+        <p:txBody>
+          <a:bodyPr wrap="square">
+            <a:spAutoFit/>
+          </a:bodyPr>
+          <a:lstStyle/>
+          <a:p>
+            <a:pPr algn="r">
+              <a:defRPr sz="900" b="0">
+                <a:solidFill>
+                  <a:srgbClr val="E86C00"/>
+                </a:solidFill>
+                <a:latin typeface="Calibri"/>
+              </a:defRPr>
+            </a:pPr>
+            <a:r>
+              <a:t>Διπλωματική Εργασία - Μάρτιος 2026</a:t>
+            </a:r>
+          </a:p>
+        </p:txBody>
+      </p:sp>
     </p:spTree>
   </p:cSld>
   <p:clrMapOvr>
@@ -16369,7 +19294,7 @@
     <p:bg>
       <p:bgPr>
         <a:solidFill>
-          <a:srgbClr val="FFFFFF"/>
+          <a:srgbClr val="F8FBFF"/>
         </a:solidFill>
         <a:effectLst/>
       </p:bgPr>
@@ -16429,14 +19354,57 @@
               </a:defRPr>
             </a:pPr>
             <a:r>
-              <a:t>[Backup] SVM Collapse on SpontaneousDialogue</a:t>
-            </a:r>
-          </a:p>
-        </p:txBody>
-      </p:sp>
-      <p:sp>
-        <p:nvSpPr>
-          <p:cNvPr id="3" name="TextBox 2"/>
+              <a:t>SVM Collapse on SpontaneousDialogue</a:t>
+            </a:r>
+          </a:p>
+        </p:txBody>
+      </p:sp>
+      <p:sp>
+        <p:nvSpPr>
+          <p:cNvPr id="3" name="Rectangle 2"/>
+          <p:cNvSpPr/>
+          <p:nvPr/>
+        </p:nvSpPr>
+        <p:spPr>
+          <a:xfrm>
+            <a:off x="0" y="987552"/>
+            <a:ext cx="12191695" cy="18288"/>
+          </a:xfrm>
+          <a:prstGeom prst="rect">
+            <a:avLst/>
+          </a:prstGeom>
+          <a:solidFill>
+            <a:srgbClr val="3B82F6"/>
+          </a:solidFill>
+          <a:ln>
+            <a:noFill/>
+          </a:ln>
+        </p:spPr>
+        <p:style>
+          <a:lnRef idx="1">
+            <a:schemeClr val="accent1"/>
+          </a:lnRef>
+          <a:fillRef idx="3">
+            <a:schemeClr val="accent1"/>
+          </a:fillRef>
+          <a:effectRef idx="2">
+            <a:schemeClr val="accent1"/>
+          </a:effectRef>
+          <a:fontRef idx="minor">
+            <a:schemeClr val="lt1"/>
+          </a:fontRef>
+        </p:style>
+        <p:txBody>
+          <a:bodyPr rtlCol="0" anchor="ctr"/>
+          <a:lstStyle/>
+          <a:p>
+            <a:pPr algn="ctr"/>
+          </a:p>
+        </p:txBody>
+      </p:sp>
+      <p:sp>
+        <p:nvSpPr>
+          <p:cNvPr id="4" name="TextBox 3"/>
           <p:cNvSpPr txBox="1"/>
           <p:nvPr/>
         </p:nvSpPr>
@@ -16552,6 +19520,85 @@
           </a:p>
         </p:txBody>
       </p:sp>
+      <p:sp>
+        <p:nvSpPr>
+          <p:cNvPr id="5" name="Rectangle 4"/>
+          <p:cNvSpPr/>
+          <p:nvPr/>
+        </p:nvSpPr>
+        <p:spPr>
+          <a:xfrm>
+            <a:off x="457200" y="6455664"/>
+            <a:ext cx="11247120" cy="9144"/>
+          </a:xfrm>
+          <a:prstGeom prst="rect">
+            <a:avLst/>
+          </a:prstGeom>
+          <a:solidFill>
+            <a:srgbClr val="E86C00"/>
+          </a:solidFill>
+          <a:ln>
+            <a:noFill/>
+          </a:ln>
+        </p:spPr>
+        <p:style>
+          <a:lnRef idx="1">
+            <a:schemeClr val="accent1"/>
+          </a:lnRef>
+          <a:fillRef idx="3">
+            <a:schemeClr val="accent1"/>
+          </a:fillRef>
+          <a:effectRef idx="2">
+            <a:schemeClr val="accent1"/>
+          </a:effectRef>
+          <a:fontRef idx="minor">
+            <a:schemeClr val="lt1"/>
+          </a:fontRef>
+        </p:style>
+        <p:txBody>
+          <a:bodyPr rtlCol="0" anchor="ctr"/>
+          <a:lstStyle/>
+          <a:p>
+            <a:pPr algn="ctr"/>
+          </a:p>
+        </p:txBody>
+      </p:sp>
+      <p:sp>
+        <p:nvSpPr>
+          <p:cNvPr id="6" name="TextBox 5"/>
+          <p:cNvSpPr txBox="1"/>
+          <p:nvPr/>
+        </p:nvSpPr>
+        <p:spPr>
+          <a:xfrm>
+            <a:off x="457200" y="6492240"/>
+            <a:ext cx="11247120" cy="219456"/>
+          </a:xfrm>
+          <a:prstGeom prst="rect">
+            <a:avLst/>
+          </a:prstGeom>
+          <a:noFill/>
+        </p:spPr>
+        <p:txBody>
+          <a:bodyPr wrap="square">
+            <a:spAutoFit/>
+          </a:bodyPr>
+          <a:lstStyle/>
+          <a:p>
+            <a:pPr algn="r">
+              <a:defRPr sz="900" b="0">
+                <a:solidFill>
+                  <a:srgbClr val="E86C00"/>
+                </a:solidFill>
+                <a:latin typeface="Calibri"/>
+              </a:defRPr>
+            </a:pPr>
+            <a:r>
+              <a:t>Διπλωματική Εργασία - Μάρτιος 2026</a:t>
+            </a:r>
+          </a:p>
+        </p:txBody>
+      </p:sp>
     </p:spTree>
   </p:cSld>
   <p:clrMapOvr>
@@ -16566,7 +19613,7 @@
     <p:bg>
       <p:bgPr>
         <a:solidFill>
-          <a:srgbClr val="FFFFFF"/>
+          <a:srgbClr val="F8FBFF"/>
         </a:solidFill>
         <a:effectLst/>
       </p:bgPr>
@@ -16633,7 +19680,50 @@
       </p:sp>
       <p:sp>
         <p:nvSpPr>
-          <p:cNvPr id="3" name="TextBox 2"/>
+          <p:cNvPr id="3" name="Rectangle 2"/>
+          <p:cNvSpPr/>
+          <p:nvPr/>
+        </p:nvSpPr>
+        <p:spPr>
+          <a:xfrm>
+            <a:off x="0" y="987552"/>
+            <a:ext cx="12191695" cy="18288"/>
+          </a:xfrm>
+          <a:prstGeom prst="rect">
+            <a:avLst/>
+          </a:prstGeom>
+          <a:solidFill>
+            <a:srgbClr val="3B82F6"/>
+          </a:solidFill>
+          <a:ln>
+            <a:noFill/>
+          </a:ln>
+        </p:spPr>
+        <p:style>
+          <a:lnRef idx="1">
+            <a:schemeClr val="accent1"/>
+          </a:lnRef>
+          <a:fillRef idx="3">
+            <a:schemeClr val="accent1"/>
+          </a:fillRef>
+          <a:effectRef idx="2">
+            <a:schemeClr val="accent1"/>
+          </a:effectRef>
+          <a:fontRef idx="minor">
+            <a:schemeClr val="lt1"/>
+          </a:fontRef>
+        </p:style>
+        <p:txBody>
+          <a:bodyPr rtlCol="0" anchor="ctr"/>
+          <a:lstStyle/>
+          <a:p>
+            <a:pPr algn="ctr"/>
+          </a:p>
+        </p:txBody>
+      </p:sp>
+      <p:sp>
+        <p:nvSpPr>
+          <p:cNvPr id="4" name="TextBox 3"/>
           <p:cNvSpPr txBox="1"/>
           <p:nvPr/>
         </p:nvSpPr>
@@ -16751,7 +19841,7 @@
       </p:sp>
       <p:pic>
         <p:nvPicPr>
-          <p:cNvPr id="4" name="Picture 3" descr="Speech_Language_Assessment_Parkinson_Disease_Diagram.png"/>
+          <p:cNvPr id="5" name="Picture 4" descr="Speech_Language_Assessment_Parkinson_Disease_Diagram.png"/>
           <p:cNvPicPr>
             <a:picLocks noChangeAspect="1"/>
           </p:cNvPicPr>
@@ -16773,6 +19863,138 @@
           </a:prstGeom>
         </p:spPr>
       </p:pic>
+      <p:sp>
+        <p:nvSpPr>
+          <p:cNvPr id="6" name="Rectangle 5"/>
+          <p:cNvSpPr/>
+          <p:nvPr/>
+        </p:nvSpPr>
+        <p:spPr>
+          <a:xfrm>
+            <a:off x="7345375" y="3547872"/>
+            <a:ext cx="4572000" cy="292608"/>
+          </a:xfrm>
+          <a:prstGeom prst="rect">
+            <a:avLst/>
+          </a:prstGeom>
+          <a:solidFill>
+            <a:srgbClr val="F2F2F2"/>
+          </a:solidFill>
+          <a:ln>
+            <a:noFill/>
+          </a:ln>
+        </p:spPr>
+        <p:style>
+          <a:lnRef idx="1">
+            <a:schemeClr val="accent1"/>
+          </a:lnRef>
+          <a:fillRef idx="3">
+            <a:schemeClr val="accent1"/>
+          </a:fillRef>
+          <a:effectRef idx="2">
+            <a:schemeClr val="accent1"/>
+          </a:effectRef>
+          <a:fontRef idx="minor">
+            <a:schemeClr val="lt1"/>
+          </a:fontRef>
+        </p:style>
+        <p:txBody>
+          <a:bodyPr rtlCol="0" anchor="ctr" wrap="square" lIns="73152" rIns="73152"/>
+          <a:lstStyle/>
+          <a:p>
+            <a:pPr algn="ctr">
+              <a:defRPr sz="850">
+                <a:solidFill>
+                  <a:srgbClr val="666666"/>
+                </a:solidFill>
+                <a:latin typeface="Calibri"/>
+              </a:defRPr>
+            </a:pPr>
+            <a:r>
+              <a:t>Figure 1.1: Clinical speech-language assessment in PD | Ref: fig:speech-language-assessment-pd | Source: Adapted from Cao et al. (2025)</a:t>
+            </a:r>
+          </a:p>
+        </p:txBody>
+      </p:sp>
+      <p:sp>
+        <p:nvSpPr>
+          <p:cNvPr id="7" name="Rectangle 6"/>
+          <p:cNvSpPr/>
+          <p:nvPr/>
+        </p:nvSpPr>
+        <p:spPr>
+          <a:xfrm>
+            <a:off x="457200" y="6455664"/>
+            <a:ext cx="11247120" cy="9144"/>
+          </a:xfrm>
+          <a:prstGeom prst="rect">
+            <a:avLst/>
+          </a:prstGeom>
+          <a:solidFill>
+            <a:srgbClr val="E86C00"/>
+          </a:solidFill>
+          <a:ln>
+            <a:noFill/>
+          </a:ln>
+        </p:spPr>
+        <p:style>
+          <a:lnRef idx="1">
+            <a:schemeClr val="accent1"/>
+          </a:lnRef>
+          <a:fillRef idx="3">
+            <a:schemeClr val="accent1"/>
+          </a:fillRef>
+          <a:effectRef idx="2">
+            <a:schemeClr val="accent1"/>
+          </a:effectRef>
+          <a:fontRef idx="minor">
+            <a:schemeClr val="lt1"/>
+          </a:fontRef>
+        </p:style>
+        <p:txBody>
+          <a:bodyPr rtlCol="0" anchor="ctr"/>
+          <a:lstStyle/>
+          <a:p>
+            <a:pPr algn="ctr"/>
+          </a:p>
+        </p:txBody>
+      </p:sp>
+      <p:sp>
+        <p:nvSpPr>
+          <p:cNvPr id="8" name="TextBox 7"/>
+          <p:cNvSpPr txBox="1"/>
+          <p:nvPr/>
+        </p:nvSpPr>
+        <p:spPr>
+          <a:xfrm>
+            <a:off x="457200" y="6492240"/>
+            <a:ext cx="11247120" cy="219456"/>
+          </a:xfrm>
+          <a:prstGeom prst="rect">
+            <a:avLst/>
+          </a:prstGeom>
+          <a:noFill/>
+        </p:spPr>
+        <p:txBody>
+          <a:bodyPr wrap="square">
+            <a:spAutoFit/>
+          </a:bodyPr>
+          <a:lstStyle/>
+          <a:p>
+            <a:pPr algn="r">
+              <a:defRPr sz="900" b="0">
+                <a:solidFill>
+                  <a:srgbClr val="E86C00"/>
+                </a:solidFill>
+                <a:latin typeface="Calibri"/>
+              </a:defRPr>
+            </a:pPr>
+            <a:r>
+              <a:t>Διπλωματική Εργασία - Μάρτιος 2026</a:t>
+            </a:r>
+          </a:p>
+        </p:txBody>
+      </p:sp>
     </p:spTree>
   </p:cSld>
   <p:clrMapOvr>
@@ -16787,7 +20009,7 @@
     <p:bg>
       <p:bgPr>
         <a:solidFill>
-          <a:srgbClr val="FFFFFF"/>
+          <a:srgbClr val="F8FBFF"/>
         </a:solidFill>
         <a:effectLst/>
       </p:bgPr>
@@ -16847,7 +20069,7 @@
               </a:defRPr>
             </a:pPr>
             <a:r>
-              <a:t>[Backup] Demo Application — Research Prototype</a:t>
+              <a:t>Demo Application — Research Prototype</a:t>
             </a:r>
           </a:p>
         </p:txBody>
@@ -16876,9 +20098,62 @@
           </a:prstGeom>
         </p:spPr>
       </p:pic>
+      <p:sp>
+        <p:nvSpPr>
+          <p:cNvPr id="4" name="Rectangle 3"/>
+          <p:cNvSpPr/>
+          <p:nvPr/>
+        </p:nvSpPr>
+        <p:spPr>
+          <a:xfrm>
+            <a:off x="274320" y="5852160"/>
+            <a:ext cx="5029200" cy="292608"/>
+          </a:xfrm>
+          <a:prstGeom prst="rect">
+            <a:avLst/>
+          </a:prstGeom>
+          <a:solidFill>
+            <a:srgbClr val="F2F2F2"/>
+          </a:solidFill>
+          <a:ln>
+            <a:noFill/>
+          </a:ln>
+        </p:spPr>
+        <p:style>
+          <a:lnRef idx="1">
+            <a:schemeClr val="accent1"/>
+          </a:lnRef>
+          <a:fillRef idx="3">
+            <a:schemeClr val="accent1"/>
+          </a:fillRef>
+          <a:effectRef idx="2">
+            <a:schemeClr val="accent1"/>
+          </a:effectRef>
+          <a:fontRef idx="minor">
+            <a:schemeClr val="lt1"/>
+          </a:fontRef>
+        </p:style>
+        <p:txBody>
+          <a:bodyPr rtlCol="0" anchor="ctr" wrap="square" lIns="73152" rIns="73152"/>
+          <a:lstStyle/>
+          <a:p>
+            <a:pPr algn="ctr">
+              <a:defRPr sz="850">
+                <a:solidFill>
+                  <a:srgbClr val="666666"/>
+                </a:solidFill>
+                <a:latin typeface="Calibri"/>
+              </a:defRPr>
+            </a:pPr>
+            <a:r>
+              <a:t>Figure 1.3: Demo application architecture | Ref: fig:demo-architecture-simple</a:t>
+            </a:r>
+          </a:p>
+        </p:txBody>
+      </p:sp>
       <p:pic>
         <p:nvPicPr>
-          <p:cNvPr id="4" name="Picture 3" descr="fig_demo_upload_audio.png"/>
+          <p:cNvPr id="5" name="Picture 4" descr="fig_demo_upload_audio.png"/>
           <p:cNvPicPr>
             <a:picLocks noChangeAspect="1"/>
           </p:cNvPicPr>
@@ -16900,9 +20175,62 @@
           </a:prstGeom>
         </p:spPr>
       </p:pic>
+      <p:sp>
+        <p:nvSpPr>
+          <p:cNvPr id="6" name="Rectangle 5"/>
+          <p:cNvSpPr/>
+          <p:nvPr/>
+        </p:nvSpPr>
+        <p:spPr>
+          <a:xfrm>
+            <a:off x="5943600" y="4118377"/>
+            <a:ext cx="2743200" cy="292608"/>
+          </a:xfrm>
+          <a:prstGeom prst="rect">
+            <a:avLst/>
+          </a:prstGeom>
+          <a:solidFill>
+            <a:srgbClr val="F2F2F2"/>
+          </a:solidFill>
+          <a:ln>
+            <a:noFill/>
+          </a:ln>
+        </p:spPr>
+        <p:style>
+          <a:lnRef idx="1">
+            <a:schemeClr val="accent1"/>
+          </a:lnRef>
+          <a:fillRef idx="3">
+            <a:schemeClr val="accent1"/>
+          </a:fillRef>
+          <a:effectRef idx="2">
+            <a:schemeClr val="accent1"/>
+          </a:effectRef>
+          <a:fontRef idx="minor">
+            <a:schemeClr val="lt1"/>
+          </a:fontRef>
+        </p:style>
+        <p:txBody>
+          <a:bodyPr rtlCol="0" anchor="ctr" wrap="square" lIns="73152" rIns="73152"/>
+          <a:lstStyle/>
+          <a:p>
+            <a:pPr algn="ctr">
+              <a:defRPr sz="850">
+                <a:solidFill>
+                  <a:srgbClr val="666666"/>
+                </a:solidFill>
+                <a:latin typeface="Calibri"/>
+              </a:defRPr>
+            </a:pPr>
+            <a:r>
+              <a:t>Upload interface | Ref: fig:demo-screens-main</a:t>
+            </a:r>
+          </a:p>
+        </p:txBody>
+      </p:sp>
       <p:pic>
         <p:nvPicPr>
-          <p:cNvPr id="5" name="Picture 4" descr="fig_demo_analysis_result.png"/>
+          <p:cNvPr id="7" name="Picture 6" descr="fig_demo_analysis_result.png"/>
           <p:cNvPicPr>
             <a:picLocks noChangeAspect="1"/>
           </p:cNvPicPr>
@@ -16926,7 +20254,60 @@
       </p:pic>
       <p:sp>
         <p:nvSpPr>
-          <p:cNvPr id="6" name="TextBox 5"/>
+          <p:cNvPr id="8" name="Rectangle 7"/>
+          <p:cNvSpPr/>
+          <p:nvPr/>
+        </p:nvSpPr>
+        <p:spPr>
+          <a:xfrm>
+            <a:off x="8961120" y="3424996"/>
+            <a:ext cx="2743200" cy="292608"/>
+          </a:xfrm>
+          <a:prstGeom prst="rect">
+            <a:avLst/>
+          </a:prstGeom>
+          <a:solidFill>
+            <a:srgbClr val="F2F2F2"/>
+          </a:solidFill>
+          <a:ln>
+            <a:noFill/>
+          </a:ln>
+        </p:spPr>
+        <p:style>
+          <a:lnRef idx="1">
+            <a:schemeClr val="accent1"/>
+          </a:lnRef>
+          <a:fillRef idx="3">
+            <a:schemeClr val="accent1"/>
+          </a:fillRef>
+          <a:effectRef idx="2">
+            <a:schemeClr val="accent1"/>
+          </a:effectRef>
+          <a:fontRef idx="minor">
+            <a:schemeClr val="lt1"/>
+          </a:fontRef>
+        </p:style>
+        <p:txBody>
+          <a:bodyPr rtlCol="0" anchor="ctr" wrap="square" lIns="73152" rIns="73152"/>
+          <a:lstStyle/>
+          <a:p>
+            <a:pPr algn="ctr">
+              <a:defRPr sz="850">
+                <a:solidFill>
+                  <a:srgbClr val="666666"/>
+                </a:solidFill>
+                <a:latin typeface="Calibri"/>
+              </a:defRPr>
+            </a:pPr>
+            <a:r>
+              <a:t>Analysis result | Ref: fig:demo-screens-main</a:t>
+            </a:r>
+          </a:p>
+        </p:txBody>
+      </p:sp>
+      <p:sp>
+        <p:nvSpPr>
+          <p:cNvPr id="9" name="TextBox 8"/>
           <p:cNvSpPr txBox="1"/>
           <p:nvPr/>
         </p:nvSpPr>
@@ -16974,7 +20355,7 @@
     <p:bg>
       <p:bgPr>
         <a:solidFill>
-          <a:srgbClr val="FFFFFF"/>
+          <a:srgbClr val="F8FBFF"/>
         </a:solidFill>
         <a:effectLst/>
       </p:bgPr>
@@ -17034,14 +20415,57 @@
               </a:defRPr>
             </a:pPr>
             <a:r>
-              <a:t>[Backup] Full ROC-AUC — Dataset A ReadText (All Conditions)</a:t>
-            </a:r>
+              <a:t>Full ROC-AUC — Dataset A ReadText (All Conditions)</a:t>
+            </a:r>
+          </a:p>
+        </p:txBody>
+      </p:sp>
+      <p:sp>
+        <p:nvSpPr>
+          <p:cNvPr id="3" name="Rectangle 2"/>
+          <p:cNvSpPr/>
+          <p:nvPr/>
+        </p:nvSpPr>
+        <p:spPr>
+          <a:xfrm>
+            <a:off x="0" y="987552"/>
+            <a:ext cx="12191695" cy="18288"/>
+          </a:xfrm>
+          <a:prstGeom prst="rect">
+            <a:avLst/>
+          </a:prstGeom>
+          <a:solidFill>
+            <a:srgbClr val="3B82F6"/>
+          </a:solidFill>
+          <a:ln>
+            <a:noFill/>
+          </a:ln>
+        </p:spPr>
+        <p:style>
+          <a:lnRef idx="1">
+            <a:schemeClr val="accent1"/>
+          </a:lnRef>
+          <a:fillRef idx="3">
+            <a:schemeClr val="accent1"/>
+          </a:fillRef>
+          <a:effectRef idx="2">
+            <a:schemeClr val="accent1"/>
+          </a:effectRef>
+          <a:fontRef idx="minor">
+            <a:schemeClr val="lt1"/>
+          </a:fontRef>
+        </p:style>
+        <p:txBody>
+          <a:bodyPr rtlCol="0" anchor="ctr"/>
+          <a:lstStyle/>
+          <a:p>
+            <a:pPr algn="ctr"/>
           </a:p>
         </p:txBody>
       </p:sp>
       <p:graphicFrame>
         <p:nvGraphicFramePr>
-          <p:cNvPr id="3" name="Table 2"/>
+          <p:cNvPr id="4" name="Table 3"/>
           <p:cNvGraphicFramePr>
             <a:graphicFrameLocks noGrp="1"/>
           </p:cNvGraphicFramePr>
@@ -17049,7 +20473,7 @@
         </p:nvGraphicFramePr>
         <p:xfrm>
           <a:off x="457200" y="1371600"/>
-          <a:ext cx="11247117" cy="2743200"/>
+          <a:ext cx="11247117" cy="2359152"/>
         </p:xfrm>
         <a:graphic>
           <a:graphicData uri="http://schemas.openxmlformats.org/drawingml/2006/table">
@@ -17064,7 +20488,7 @@
                 <a:gridCol w="2205317"/>
                 <a:gridCol w="2205317"/>
               </a:tblGrid>
-              <a:tr h="457200">
+              <a:tr h="393192">
                 <a:tc>
                   <a:txBody>
                     <a:bodyPr/>
@@ -17186,7 +20610,7 @@
                   </a:tcPr>
                 </a:tc>
               </a:tr>
-              <a:tr h="457200">
+              <a:tr h="393192">
                 <a:tc>
                   <a:txBody>
                     <a:bodyPr/>
@@ -17308,7 +20732,7 @@
                   </a:tcPr>
                 </a:tc>
               </a:tr>
-              <a:tr h="457200">
+              <a:tr h="393192">
                 <a:tc>
                   <a:txBody>
                     <a:bodyPr/>
@@ -17430,7 +20854,7 @@
                   </a:tcPr>
                 </a:tc>
               </a:tr>
-              <a:tr h="457200">
+              <a:tr h="393192">
                 <a:tc>
                   <a:txBody>
                     <a:bodyPr/>
@@ -17552,7 +20976,7 @@
                   </a:tcPr>
                 </a:tc>
               </a:tr>
-              <a:tr h="457200">
+              <a:tr h="393192">
                 <a:tc>
                   <a:txBody>
                     <a:bodyPr/>
@@ -17674,7 +21098,7 @@
                   </a:tcPr>
                 </a:tc>
               </a:tr>
-              <a:tr h="457200">
+              <a:tr h="393192">
                 <a:tc>
                   <a:txBody>
                     <a:bodyPr/>
@@ -17800,6 +21224,138 @@
           </a:graphicData>
         </a:graphic>
       </p:graphicFrame>
+      <p:sp>
+        <p:nvSpPr>
+          <p:cNvPr id="5" name="Rectangle 4"/>
+          <p:cNvSpPr/>
+          <p:nvPr/>
+        </p:nvSpPr>
+        <p:spPr>
+          <a:xfrm>
+            <a:off x="457200" y="6108192"/>
+            <a:ext cx="11247120" cy="237744"/>
+          </a:xfrm>
+          <a:prstGeom prst="rect">
+            <a:avLst/>
+          </a:prstGeom>
+          <a:solidFill>
+            <a:srgbClr val="F2F2F2"/>
+          </a:solidFill>
+          <a:ln>
+            <a:noFill/>
+          </a:ln>
+        </p:spPr>
+        <p:style>
+          <a:lnRef idx="1">
+            <a:schemeClr val="accent1"/>
+          </a:lnRef>
+          <a:fillRef idx="3">
+            <a:schemeClr val="accent1"/>
+          </a:fillRef>
+          <a:effectRef idx="2">
+            <a:schemeClr val="accent1"/>
+          </a:effectRef>
+          <a:fontRef idx="minor">
+            <a:schemeClr val="lt1"/>
+          </a:fontRef>
+        </p:style>
+        <p:txBody>
+          <a:bodyPr rtlCol="0" anchor="ctr" wrap="square" lIns="109728" rIns="109728" tIns="18288"/>
+          <a:lstStyle/>
+          <a:p>
+            <a:pPr algn="l">
+              <a:defRPr sz="1000">
+                <a:solidFill>
+                  <a:srgbClr val="666666"/>
+                </a:solidFill>
+                <a:latin typeface="Calibri"/>
+              </a:defRPr>
+            </a:pPr>
+            <a:r>
+              <a:t>Appendix Table: ReadText ROC-AUC all conditions | [appendix-b-placeholder] | Source: Thesis manuscript and computed results</a:t>
+            </a:r>
+          </a:p>
+        </p:txBody>
+      </p:sp>
+      <p:sp>
+        <p:nvSpPr>
+          <p:cNvPr id="6" name="Rectangle 5"/>
+          <p:cNvSpPr/>
+          <p:nvPr/>
+        </p:nvSpPr>
+        <p:spPr>
+          <a:xfrm>
+            <a:off x="457200" y="6455664"/>
+            <a:ext cx="11247120" cy="9144"/>
+          </a:xfrm>
+          <a:prstGeom prst="rect">
+            <a:avLst/>
+          </a:prstGeom>
+          <a:solidFill>
+            <a:srgbClr val="E86C00"/>
+          </a:solidFill>
+          <a:ln>
+            <a:noFill/>
+          </a:ln>
+        </p:spPr>
+        <p:style>
+          <a:lnRef idx="1">
+            <a:schemeClr val="accent1"/>
+          </a:lnRef>
+          <a:fillRef idx="3">
+            <a:schemeClr val="accent1"/>
+          </a:fillRef>
+          <a:effectRef idx="2">
+            <a:schemeClr val="accent1"/>
+          </a:effectRef>
+          <a:fontRef idx="minor">
+            <a:schemeClr val="lt1"/>
+          </a:fontRef>
+        </p:style>
+        <p:txBody>
+          <a:bodyPr rtlCol="0" anchor="ctr"/>
+          <a:lstStyle/>
+          <a:p>
+            <a:pPr algn="ctr"/>
+          </a:p>
+        </p:txBody>
+      </p:sp>
+      <p:sp>
+        <p:nvSpPr>
+          <p:cNvPr id="7" name="TextBox 6"/>
+          <p:cNvSpPr txBox="1"/>
+          <p:nvPr/>
+        </p:nvSpPr>
+        <p:spPr>
+          <a:xfrm>
+            <a:off x="457200" y="6492240"/>
+            <a:ext cx="11247120" cy="219456"/>
+          </a:xfrm>
+          <a:prstGeom prst="rect">
+            <a:avLst/>
+          </a:prstGeom>
+          <a:noFill/>
+        </p:spPr>
+        <p:txBody>
+          <a:bodyPr wrap="square">
+            <a:spAutoFit/>
+          </a:bodyPr>
+          <a:lstStyle/>
+          <a:p>
+            <a:pPr algn="r">
+              <a:defRPr sz="900" b="0">
+                <a:solidFill>
+                  <a:srgbClr val="E86C00"/>
+                </a:solidFill>
+                <a:latin typeface="Calibri"/>
+              </a:defRPr>
+            </a:pPr>
+            <a:r>
+              <a:t>Διπλωματική Εργασία - Μάρτιος 2026</a:t>
+            </a:r>
+          </a:p>
+        </p:txBody>
+      </p:sp>
     </p:spTree>
   </p:cSld>
   <p:clrMapOvr>
@@ -17814,7 +21370,7 @@
     <p:bg>
       <p:bgPr>
         <a:solidFill>
-          <a:srgbClr val="FFFFFF"/>
+          <a:srgbClr val="F8FBFF"/>
         </a:solidFill>
         <a:effectLst/>
       </p:bgPr>
@@ -17881,7 +21437,50 @@
       </p:sp>
       <p:sp>
         <p:nvSpPr>
-          <p:cNvPr id="3" name="TextBox 2"/>
+          <p:cNvPr id="3" name="Rectangle 2"/>
+          <p:cNvSpPr/>
+          <p:nvPr/>
+        </p:nvSpPr>
+        <p:spPr>
+          <a:xfrm>
+            <a:off x="0" y="987552"/>
+            <a:ext cx="12191695" cy="18288"/>
+          </a:xfrm>
+          <a:prstGeom prst="rect">
+            <a:avLst/>
+          </a:prstGeom>
+          <a:solidFill>
+            <a:srgbClr val="3B82F6"/>
+          </a:solidFill>
+          <a:ln>
+            <a:noFill/>
+          </a:ln>
+        </p:spPr>
+        <p:style>
+          <a:lnRef idx="1">
+            <a:schemeClr val="accent1"/>
+          </a:lnRef>
+          <a:fillRef idx="3">
+            <a:schemeClr val="accent1"/>
+          </a:fillRef>
+          <a:effectRef idx="2">
+            <a:schemeClr val="accent1"/>
+          </a:effectRef>
+          <a:fontRef idx="minor">
+            <a:schemeClr val="lt1"/>
+          </a:fontRef>
+        </p:style>
+        <p:txBody>
+          <a:bodyPr rtlCol="0" anchor="ctr"/>
+          <a:lstStyle/>
+          <a:p>
+            <a:pPr algn="ctr"/>
+          </a:p>
+        </p:txBody>
+      </p:sp>
+      <p:sp>
+        <p:nvSpPr>
+          <p:cNvPr id="4" name="TextBox 3"/>
           <p:cNvSpPr txBox="1"/>
           <p:nvPr/>
         </p:nvSpPr>
@@ -17999,7 +21598,7 @@
       </p:sp>
       <p:pic>
         <p:nvPicPr>
-          <p:cNvPr id="4" name="Picture 3" descr="speech_signal_hc_vs_pd.png"/>
+          <p:cNvPr id="5" name="Picture 4" descr="speech_signal_hc_vs_pd.png"/>
           <p:cNvPicPr>
             <a:picLocks noChangeAspect="1"/>
           </p:cNvPicPr>
@@ -18021,6 +21620,138 @@
           </a:prstGeom>
         </p:spPr>
       </p:pic>
+      <p:sp>
+        <p:nvSpPr>
+          <p:cNvPr id="6" name="Rectangle 5"/>
+          <p:cNvSpPr/>
+          <p:nvPr/>
+        </p:nvSpPr>
+        <p:spPr>
+          <a:xfrm>
+            <a:off x="6888175" y="3204210"/>
+            <a:ext cx="5029200" cy="292608"/>
+          </a:xfrm>
+          <a:prstGeom prst="rect">
+            <a:avLst/>
+          </a:prstGeom>
+          <a:solidFill>
+            <a:srgbClr val="F2F2F2"/>
+          </a:solidFill>
+          <a:ln>
+            <a:noFill/>
+          </a:ln>
+        </p:spPr>
+        <p:style>
+          <a:lnRef idx="1">
+            <a:schemeClr val="accent1"/>
+          </a:lnRef>
+          <a:fillRef idx="3">
+            <a:schemeClr val="accent1"/>
+          </a:fillRef>
+          <a:effectRef idx="2">
+            <a:schemeClr val="accent1"/>
+          </a:effectRef>
+          <a:fontRef idx="minor">
+            <a:schemeClr val="lt1"/>
+          </a:fontRef>
+        </p:style>
+        <p:txBody>
+          <a:bodyPr rtlCol="0" anchor="ctr" wrap="square" lIns="73152" rIns="73152"/>
+          <a:lstStyle/>
+          <a:p>
+            <a:pPr algn="ctr">
+              <a:defRPr sz="850">
+                <a:solidFill>
+                  <a:srgbClr val="666666"/>
+                </a:solidFill>
+                <a:latin typeface="Calibri"/>
+              </a:defRPr>
+            </a:pPr>
+            <a:r>
+              <a:t>Figure 2.1: Speech signal comparison (HC vs PD) | Ref: fig:speech-signal-hc-vs-pd | Source: Adapted from Little et al. (2009)</a:t>
+            </a:r>
+          </a:p>
+        </p:txBody>
+      </p:sp>
+      <p:sp>
+        <p:nvSpPr>
+          <p:cNvPr id="7" name="Rectangle 6"/>
+          <p:cNvSpPr/>
+          <p:nvPr/>
+        </p:nvSpPr>
+        <p:spPr>
+          <a:xfrm>
+            <a:off x="457200" y="6455664"/>
+            <a:ext cx="11247120" cy="9144"/>
+          </a:xfrm>
+          <a:prstGeom prst="rect">
+            <a:avLst/>
+          </a:prstGeom>
+          <a:solidFill>
+            <a:srgbClr val="E86C00"/>
+          </a:solidFill>
+          <a:ln>
+            <a:noFill/>
+          </a:ln>
+        </p:spPr>
+        <p:style>
+          <a:lnRef idx="1">
+            <a:schemeClr val="accent1"/>
+          </a:lnRef>
+          <a:fillRef idx="3">
+            <a:schemeClr val="accent1"/>
+          </a:fillRef>
+          <a:effectRef idx="2">
+            <a:schemeClr val="accent1"/>
+          </a:effectRef>
+          <a:fontRef idx="minor">
+            <a:schemeClr val="lt1"/>
+          </a:fontRef>
+        </p:style>
+        <p:txBody>
+          <a:bodyPr rtlCol="0" anchor="ctr"/>
+          <a:lstStyle/>
+          <a:p>
+            <a:pPr algn="ctr"/>
+          </a:p>
+        </p:txBody>
+      </p:sp>
+      <p:sp>
+        <p:nvSpPr>
+          <p:cNvPr id="8" name="TextBox 7"/>
+          <p:cNvSpPr txBox="1"/>
+          <p:nvPr/>
+        </p:nvSpPr>
+        <p:spPr>
+          <a:xfrm>
+            <a:off x="457200" y="6492240"/>
+            <a:ext cx="11247120" cy="219456"/>
+          </a:xfrm>
+          <a:prstGeom prst="rect">
+            <a:avLst/>
+          </a:prstGeom>
+          <a:noFill/>
+        </p:spPr>
+        <p:txBody>
+          <a:bodyPr wrap="square">
+            <a:spAutoFit/>
+          </a:bodyPr>
+          <a:lstStyle/>
+          <a:p>
+            <a:pPr algn="r">
+              <a:defRPr sz="900" b="0">
+                <a:solidFill>
+                  <a:srgbClr val="E86C00"/>
+                </a:solidFill>
+                <a:latin typeface="Calibri"/>
+              </a:defRPr>
+            </a:pPr>
+            <a:r>
+              <a:t>Διπλωματική Εργασία - Μάρτιος 2026</a:t>
+            </a:r>
+          </a:p>
+        </p:txBody>
+      </p:sp>
     </p:spTree>
   </p:cSld>
   <p:clrMapOvr>
@@ -18035,7 +21766,7 @@
     <p:bg>
       <p:bgPr>
         <a:solidFill>
-          <a:srgbClr val="FFFFFF"/>
+          <a:srgbClr val="F8FBFF"/>
         </a:solidFill>
         <a:effectLst/>
       </p:bgPr>
@@ -18102,7 +21833,50 @@
       </p:sp>
       <p:sp>
         <p:nvSpPr>
-          <p:cNvPr id="3" name="TextBox 2"/>
+          <p:cNvPr id="3" name="Rectangle 2"/>
+          <p:cNvSpPr/>
+          <p:nvPr/>
+        </p:nvSpPr>
+        <p:spPr>
+          <a:xfrm>
+            <a:off x="0" y="987552"/>
+            <a:ext cx="12191695" cy="18288"/>
+          </a:xfrm>
+          <a:prstGeom prst="rect">
+            <a:avLst/>
+          </a:prstGeom>
+          <a:solidFill>
+            <a:srgbClr val="3B82F6"/>
+          </a:solidFill>
+          <a:ln>
+            <a:noFill/>
+          </a:ln>
+        </p:spPr>
+        <p:style>
+          <a:lnRef idx="1">
+            <a:schemeClr val="accent1"/>
+          </a:lnRef>
+          <a:fillRef idx="3">
+            <a:schemeClr val="accent1"/>
+          </a:fillRef>
+          <a:effectRef idx="2">
+            <a:schemeClr val="accent1"/>
+          </a:effectRef>
+          <a:fontRef idx="minor">
+            <a:schemeClr val="lt1"/>
+          </a:fontRef>
+        </p:style>
+        <p:txBody>
+          <a:bodyPr rtlCol="0" anchor="ctr"/>
+          <a:lstStyle/>
+          <a:p>
+            <a:pPr algn="ctr"/>
+          </a:p>
+        </p:txBody>
+      </p:sp>
+      <p:sp>
+        <p:nvSpPr>
+          <p:cNvPr id="4" name="TextBox 3"/>
           <p:cNvSpPr txBox="1"/>
           <p:nvPr/>
         </p:nvSpPr>
@@ -18218,6 +21992,85 @@
           </a:p>
         </p:txBody>
       </p:sp>
+      <p:sp>
+        <p:nvSpPr>
+          <p:cNvPr id="5" name="Rectangle 4"/>
+          <p:cNvSpPr/>
+          <p:nvPr/>
+        </p:nvSpPr>
+        <p:spPr>
+          <a:xfrm>
+            <a:off x="457200" y="6455664"/>
+            <a:ext cx="11247120" cy="9144"/>
+          </a:xfrm>
+          <a:prstGeom prst="rect">
+            <a:avLst/>
+          </a:prstGeom>
+          <a:solidFill>
+            <a:srgbClr val="E86C00"/>
+          </a:solidFill>
+          <a:ln>
+            <a:noFill/>
+          </a:ln>
+        </p:spPr>
+        <p:style>
+          <a:lnRef idx="1">
+            <a:schemeClr val="accent1"/>
+          </a:lnRef>
+          <a:fillRef idx="3">
+            <a:schemeClr val="accent1"/>
+          </a:fillRef>
+          <a:effectRef idx="2">
+            <a:schemeClr val="accent1"/>
+          </a:effectRef>
+          <a:fontRef idx="minor">
+            <a:schemeClr val="lt1"/>
+          </a:fontRef>
+        </p:style>
+        <p:txBody>
+          <a:bodyPr rtlCol="0" anchor="ctr"/>
+          <a:lstStyle/>
+          <a:p>
+            <a:pPr algn="ctr"/>
+          </a:p>
+        </p:txBody>
+      </p:sp>
+      <p:sp>
+        <p:nvSpPr>
+          <p:cNvPr id="6" name="TextBox 5"/>
+          <p:cNvSpPr txBox="1"/>
+          <p:nvPr/>
+        </p:nvSpPr>
+        <p:spPr>
+          <a:xfrm>
+            <a:off x="457200" y="6492240"/>
+            <a:ext cx="11247120" cy="219456"/>
+          </a:xfrm>
+          <a:prstGeom prst="rect">
+            <a:avLst/>
+          </a:prstGeom>
+          <a:noFill/>
+        </p:spPr>
+        <p:txBody>
+          <a:bodyPr wrap="square">
+            <a:spAutoFit/>
+          </a:bodyPr>
+          <a:lstStyle/>
+          <a:p>
+            <a:pPr algn="r">
+              <a:defRPr sz="900" b="0">
+                <a:solidFill>
+                  <a:srgbClr val="E86C00"/>
+                </a:solidFill>
+                <a:latin typeface="Calibri"/>
+              </a:defRPr>
+            </a:pPr>
+            <a:r>
+              <a:t>Διπλωματική Εργασία - Μάρτιος 2026</a:t>
+            </a:r>
+          </a:p>
+        </p:txBody>
+      </p:sp>
     </p:spTree>
   </p:cSld>
   <p:clrMapOvr>
@@ -18232,7 +22085,7 @@
     <p:bg>
       <p:bgPr>
         <a:solidFill>
-          <a:srgbClr val="FFFFFF"/>
+          <a:srgbClr val="F8FBFF"/>
         </a:solidFill>
         <a:effectLst/>
       </p:bgPr>
@@ -18299,7 +22152,50 @@
       </p:sp>
       <p:sp>
         <p:nvSpPr>
-          <p:cNvPr id="3" name="TextBox 2"/>
+          <p:cNvPr id="3" name="Rectangle 2"/>
+          <p:cNvSpPr/>
+          <p:nvPr/>
+        </p:nvSpPr>
+        <p:spPr>
+          <a:xfrm>
+            <a:off x="0" y="987552"/>
+            <a:ext cx="12191695" cy="18288"/>
+          </a:xfrm>
+          <a:prstGeom prst="rect">
+            <a:avLst/>
+          </a:prstGeom>
+          <a:solidFill>
+            <a:srgbClr val="3B82F6"/>
+          </a:solidFill>
+          <a:ln>
+            <a:noFill/>
+          </a:ln>
+        </p:spPr>
+        <p:style>
+          <a:lnRef idx="1">
+            <a:schemeClr val="accent1"/>
+          </a:lnRef>
+          <a:fillRef idx="3">
+            <a:schemeClr val="accent1"/>
+          </a:fillRef>
+          <a:effectRef idx="2">
+            <a:schemeClr val="accent1"/>
+          </a:effectRef>
+          <a:fontRef idx="minor">
+            <a:schemeClr val="lt1"/>
+          </a:fontRef>
+        </p:style>
+        <p:txBody>
+          <a:bodyPr rtlCol="0" anchor="ctr"/>
+          <a:lstStyle/>
+          <a:p>
+            <a:pPr algn="ctr"/>
+          </a:p>
+        </p:txBody>
+      </p:sp>
+      <p:sp>
+        <p:nvSpPr>
+          <p:cNvPr id="4" name="TextBox 3"/>
           <p:cNvSpPr txBox="1"/>
           <p:nvPr/>
         </p:nvSpPr>
@@ -18434,6 +22330,85 @@
           </a:p>
         </p:txBody>
       </p:sp>
+      <p:sp>
+        <p:nvSpPr>
+          <p:cNvPr id="5" name="Rectangle 4"/>
+          <p:cNvSpPr/>
+          <p:nvPr/>
+        </p:nvSpPr>
+        <p:spPr>
+          <a:xfrm>
+            <a:off x="457200" y="6455664"/>
+            <a:ext cx="11247120" cy="9144"/>
+          </a:xfrm>
+          <a:prstGeom prst="rect">
+            <a:avLst/>
+          </a:prstGeom>
+          <a:solidFill>
+            <a:srgbClr val="E86C00"/>
+          </a:solidFill>
+          <a:ln>
+            <a:noFill/>
+          </a:ln>
+        </p:spPr>
+        <p:style>
+          <a:lnRef idx="1">
+            <a:schemeClr val="accent1"/>
+          </a:lnRef>
+          <a:fillRef idx="3">
+            <a:schemeClr val="accent1"/>
+          </a:fillRef>
+          <a:effectRef idx="2">
+            <a:schemeClr val="accent1"/>
+          </a:effectRef>
+          <a:fontRef idx="minor">
+            <a:schemeClr val="lt1"/>
+          </a:fontRef>
+        </p:style>
+        <p:txBody>
+          <a:bodyPr rtlCol="0" anchor="ctr"/>
+          <a:lstStyle/>
+          <a:p>
+            <a:pPr algn="ctr"/>
+          </a:p>
+        </p:txBody>
+      </p:sp>
+      <p:sp>
+        <p:nvSpPr>
+          <p:cNvPr id="6" name="TextBox 5"/>
+          <p:cNvSpPr txBox="1"/>
+          <p:nvPr/>
+        </p:nvSpPr>
+        <p:spPr>
+          <a:xfrm>
+            <a:off x="457200" y="6492240"/>
+            <a:ext cx="11247120" cy="219456"/>
+          </a:xfrm>
+          <a:prstGeom prst="rect">
+            <a:avLst/>
+          </a:prstGeom>
+          <a:noFill/>
+        </p:spPr>
+        <p:txBody>
+          <a:bodyPr wrap="square">
+            <a:spAutoFit/>
+          </a:bodyPr>
+          <a:lstStyle/>
+          <a:p>
+            <a:pPr algn="r">
+              <a:defRPr sz="900" b="0">
+                <a:solidFill>
+                  <a:srgbClr val="E86C00"/>
+                </a:solidFill>
+                <a:latin typeface="Calibri"/>
+              </a:defRPr>
+            </a:pPr>
+            <a:r>
+              <a:t>Διπλωματική Εργασία - Μάρτιος 2026</a:t>
+            </a:r>
+          </a:p>
+        </p:txBody>
+      </p:sp>
     </p:spTree>
   </p:cSld>
   <p:clrMapOvr>
@@ -18448,7 +22423,7 @@
     <p:bg>
       <p:bgPr>
         <a:solidFill>
-          <a:srgbClr val="FFFFFF"/>
+          <a:srgbClr val="F8FBFF"/>
         </a:solidFill>
         <a:effectLst/>
       </p:bgPr>
@@ -18513,9 +22488,52 @@
           </a:p>
         </p:txBody>
       </p:sp>
+      <p:sp>
+        <p:nvSpPr>
+          <p:cNvPr id="3" name="Rectangle 2"/>
+          <p:cNvSpPr/>
+          <p:nvPr/>
+        </p:nvSpPr>
+        <p:spPr>
+          <a:xfrm>
+            <a:off x="0" y="987552"/>
+            <a:ext cx="12191695" cy="18288"/>
+          </a:xfrm>
+          <a:prstGeom prst="rect">
+            <a:avLst/>
+          </a:prstGeom>
+          <a:solidFill>
+            <a:srgbClr val="3B82F6"/>
+          </a:solidFill>
+          <a:ln>
+            <a:noFill/>
+          </a:ln>
+        </p:spPr>
+        <p:style>
+          <a:lnRef idx="1">
+            <a:schemeClr val="accent1"/>
+          </a:lnRef>
+          <a:fillRef idx="3">
+            <a:schemeClr val="accent1"/>
+          </a:fillRef>
+          <a:effectRef idx="2">
+            <a:schemeClr val="accent1"/>
+          </a:effectRef>
+          <a:fontRef idx="minor">
+            <a:schemeClr val="lt1"/>
+          </a:fontRef>
+        </p:style>
+        <p:txBody>
+          <a:bodyPr rtlCol="0" anchor="ctr"/>
+          <a:lstStyle/>
+          <a:p>
+            <a:pPr algn="ctr"/>
+          </a:p>
+        </p:txBody>
+      </p:sp>
       <p:graphicFrame>
         <p:nvGraphicFramePr>
-          <p:cNvPr id="3" name="Table 2"/>
+          <p:cNvPr id="4" name="Table 3"/>
           <p:cNvGraphicFramePr>
             <a:graphicFrameLocks noGrp="1"/>
           </p:cNvGraphicFramePr>
@@ -18523,7 +22541,7 @@
         </p:nvGraphicFramePr>
         <p:xfrm>
           <a:off x="457200" y="1371600"/>
-          <a:ext cx="11247120" cy="3200400"/>
+          <a:ext cx="11247120" cy="2752344"/>
         </p:xfrm>
         <a:graphic>
           <a:graphicData uri="http://schemas.openxmlformats.org/drawingml/2006/table">
@@ -18535,7 +22553,7 @@
                 <a:gridCol w="5623560"/>
                 <a:gridCol w="5623560"/>
               </a:tblGrid>
-              <a:tr h="457200">
+              <a:tr h="393192">
                 <a:tc>
                   <a:txBody>
                     <a:bodyPr/>
@@ -18585,7 +22603,7 @@
                   </a:tcPr>
                 </a:tc>
               </a:tr>
-              <a:tr h="457200">
+              <a:tr h="393192">
                 <a:tc>
                   <a:txBody>
                     <a:bodyPr/>
@@ -18635,7 +22653,7 @@
                   </a:tcPr>
                 </a:tc>
               </a:tr>
-              <a:tr h="457200">
+              <a:tr h="393192">
                 <a:tc>
                   <a:txBody>
                     <a:bodyPr/>
@@ -18685,7 +22703,7 @@
                   </a:tcPr>
                 </a:tc>
               </a:tr>
-              <a:tr h="457200">
+              <a:tr h="393192">
                 <a:tc>
                   <a:txBody>
                     <a:bodyPr/>
@@ -18735,7 +22753,7 @@
                   </a:tcPr>
                 </a:tc>
               </a:tr>
-              <a:tr h="457200">
+              <a:tr h="393192">
                 <a:tc>
                   <a:txBody>
                     <a:bodyPr/>
@@ -18785,7 +22803,7 @@
                   </a:tcPr>
                 </a:tc>
               </a:tr>
-              <a:tr h="457200">
+              <a:tr h="393192">
                 <a:tc>
                   <a:txBody>
                     <a:bodyPr/>
@@ -18835,7 +22853,7 @@
                   </a:tcPr>
                 </a:tc>
               </a:tr>
-              <a:tr h="457200">
+              <a:tr h="393192">
                 <a:tc>
                   <a:txBody>
                     <a:bodyPr/>
@@ -18889,6 +22907,138 @@
           </a:graphicData>
         </a:graphic>
       </p:graphicFrame>
+      <p:sp>
+        <p:nvSpPr>
+          <p:cNvPr id="5" name="Rectangle 4"/>
+          <p:cNvSpPr/>
+          <p:nvPr/>
+        </p:nvSpPr>
+        <p:spPr>
+          <a:xfrm>
+            <a:off x="457200" y="6108192"/>
+            <a:ext cx="11247120" cy="237744"/>
+          </a:xfrm>
+          <a:prstGeom prst="rect">
+            <a:avLst/>
+          </a:prstGeom>
+          <a:solidFill>
+            <a:srgbClr val="F2F2F2"/>
+          </a:solidFill>
+          <a:ln>
+            <a:noFill/>
+          </a:ln>
+        </p:spPr>
+        <p:style>
+          <a:lnRef idx="1">
+            <a:schemeClr val="accent1"/>
+          </a:lnRef>
+          <a:fillRef idx="3">
+            <a:schemeClr val="accent1"/>
+          </a:fillRef>
+          <a:effectRef idx="2">
+            <a:schemeClr val="accent1"/>
+          </a:effectRef>
+          <a:fontRef idx="minor">
+            <a:schemeClr val="lt1"/>
+          </a:fontRef>
+        </p:style>
+        <p:txBody>
+          <a:bodyPr rtlCol="0" anchor="ctr" wrap="square" lIns="109728" rIns="109728" tIns="18288"/>
+          <a:lstStyle/>
+          <a:p>
+            <a:pPr algn="l">
+              <a:defRPr sz="1000">
+                <a:solidFill>
+                  <a:srgbClr val="666666"/>
+                </a:solidFill>
+                <a:latin typeface="Calibri"/>
+              </a:defRPr>
+            </a:pPr>
+            <a:r>
+              <a:t>Table: Literature gap vs thesis positioning | [custom-placeholder] | Source: Thesis manuscript and computed results</a:t>
+            </a:r>
+          </a:p>
+        </p:txBody>
+      </p:sp>
+      <p:sp>
+        <p:nvSpPr>
+          <p:cNvPr id="6" name="Rectangle 5"/>
+          <p:cNvSpPr/>
+          <p:nvPr/>
+        </p:nvSpPr>
+        <p:spPr>
+          <a:xfrm>
+            <a:off x="457200" y="6455664"/>
+            <a:ext cx="11247120" cy="9144"/>
+          </a:xfrm>
+          <a:prstGeom prst="rect">
+            <a:avLst/>
+          </a:prstGeom>
+          <a:solidFill>
+            <a:srgbClr val="E86C00"/>
+          </a:solidFill>
+          <a:ln>
+            <a:noFill/>
+          </a:ln>
+        </p:spPr>
+        <p:style>
+          <a:lnRef idx="1">
+            <a:schemeClr val="accent1"/>
+          </a:lnRef>
+          <a:fillRef idx="3">
+            <a:schemeClr val="accent1"/>
+          </a:fillRef>
+          <a:effectRef idx="2">
+            <a:schemeClr val="accent1"/>
+          </a:effectRef>
+          <a:fontRef idx="minor">
+            <a:schemeClr val="lt1"/>
+          </a:fontRef>
+        </p:style>
+        <p:txBody>
+          <a:bodyPr rtlCol="0" anchor="ctr"/>
+          <a:lstStyle/>
+          <a:p>
+            <a:pPr algn="ctr"/>
+          </a:p>
+        </p:txBody>
+      </p:sp>
+      <p:sp>
+        <p:nvSpPr>
+          <p:cNvPr id="7" name="TextBox 6"/>
+          <p:cNvSpPr txBox="1"/>
+          <p:nvPr/>
+        </p:nvSpPr>
+        <p:spPr>
+          <a:xfrm>
+            <a:off x="457200" y="6492240"/>
+            <a:ext cx="11247120" cy="219456"/>
+          </a:xfrm>
+          <a:prstGeom prst="rect">
+            <a:avLst/>
+          </a:prstGeom>
+          <a:noFill/>
+        </p:spPr>
+        <p:txBody>
+          <a:bodyPr wrap="square">
+            <a:spAutoFit/>
+          </a:bodyPr>
+          <a:lstStyle/>
+          <a:p>
+            <a:pPr algn="r">
+              <a:defRPr sz="900" b="0">
+                <a:solidFill>
+                  <a:srgbClr val="E86C00"/>
+                </a:solidFill>
+                <a:latin typeface="Calibri"/>
+              </a:defRPr>
+            </a:pPr>
+            <a:r>
+              <a:t>Διπλωματική Εργασία - Μάρτιος 2026</a:t>
+            </a:r>
+          </a:p>
+        </p:txBody>
+      </p:sp>
     </p:spTree>
   </p:cSld>
   <p:clrMapOvr>
@@ -18903,7 +23053,7 @@
     <p:bg>
       <p:bgPr>
         <a:solidFill>
-          <a:srgbClr val="FFFFFF"/>
+          <a:srgbClr val="F8FBFF"/>
         </a:solidFill>
         <a:effectLst/>
       </p:bgPr>
@@ -18968,9 +23118,52 @@
           </a:p>
         </p:txBody>
       </p:sp>
+      <p:sp>
+        <p:nvSpPr>
+          <p:cNvPr id="3" name="Rectangle 2"/>
+          <p:cNvSpPr/>
+          <p:nvPr/>
+        </p:nvSpPr>
+        <p:spPr>
+          <a:xfrm>
+            <a:off x="0" y="987552"/>
+            <a:ext cx="12191695" cy="18288"/>
+          </a:xfrm>
+          <a:prstGeom prst="rect">
+            <a:avLst/>
+          </a:prstGeom>
+          <a:solidFill>
+            <a:srgbClr val="3B82F6"/>
+          </a:solidFill>
+          <a:ln>
+            <a:noFill/>
+          </a:ln>
+        </p:spPr>
+        <p:style>
+          <a:lnRef idx="1">
+            <a:schemeClr val="accent1"/>
+          </a:lnRef>
+          <a:fillRef idx="3">
+            <a:schemeClr val="accent1"/>
+          </a:fillRef>
+          <a:effectRef idx="2">
+            <a:schemeClr val="accent1"/>
+          </a:effectRef>
+          <a:fontRef idx="minor">
+            <a:schemeClr val="lt1"/>
+          </a:fontRef>
+        </p:style>
+        <p:txBody>
+          <a:bodyPr rtlCol="0" anchor="ctr"/>
+          <a:lstStyle/>
+          <a:p>
+            <a:pPr algn="ctr"/>
+          </a:p>
+        </p:txBody>
+      </p:sp>
       <p:graphicFrame>
         <p:nvGraphicFramePr>
-          <p:cNvPr id="3" name="Table 2"/>
+          <p:cNvPr id="4" name="Table 3"/>
           <p:cNvGraphicFramePr>
             <a:graphicFrameLocks noGrp="1"/>
           </p:cNvGraphicFramePr>
@@ -18978,7 +23171,7 @@
         </p:nvGraphicFramePr>
         <p:xfrm>
           <a:off x="457200" y="1371600"/>
-          <a:ext cx="11247120" cy="3657600"/>
+          <a:ext cx="11247120" cy="3145536"/>
         </p:xfrm>
         <a:graphic>
           <a:graphicData uri="http://schemas.openxmlformats.org/drawingml/2006/table">
@@ -18990,7 +23183,7 @@
                 <a:gridCol w="4217670"/>
                 <a:gridCol w="7029450"/>
               </a:tblGrid>
-              <a:tr h="457200">
+              <a:tr h="393192">
                 <a:tc>
                   <a:txBody>
                     <a:bodyPr/>
@@ -19040,7 +23233,7 @@
                   </a:tcPr>
                 </a:tc>
               </a:tr>
-              <a:tr h="457200">
+              <a:tr h="393192">
                 <a:tc>
                   <a:txBody>
                     <a:bodyPr/>
@@ -19090,7 +23283,7 @@
                   </a:tcPr>
                 </a:tc>
               </a:tr>
-              <a:tr h="457200">
+              <a:tr h="393192">
                 <a:tc>
                   <a:txBody>
                     <a:bodyPr/>
@@ -19140,7 +23333,7 @@
                   </a:tcPr>
                 </a:tc>
               </a:tr>
-              <a:tr h="457200">
+              <a:tr h="393192">
                 <a:tc>
                   <a:txBody>
                     <a:bodyPr/>
@@ -19190,7 +23383,7 @@
                   </a:tcPr>
                 </a:tc>
               </a:tr>
-              <a:tr h="457200">
+              <a:tr h="393192">
                 <a:tc>
                   <a:txBody>
                     <a:bodyPr/>
@@ -19240,7 +23433,7 @@
                   </a:tcPr>
                 </a:tc>
               </a:tr>
-              <a:tr h="457200">
+              <a:tr h="393192">
                 <a:tc>
                   <a:txBody>
                     <a:bodyPr/>
@@ -19290,7 +23483,7 @@
                   </a:tcPr>
                 </a:tc>
               </a:tr>
-              <a:tr h="457200">
+              <a:tr h="393192">
                 <a:tc>
                   <a:txBody>
                     <a:bodyPr/>
@@ -19340,7 +23533,7 @@
                   </a:tcPr>
                 </a:tc>
               </a:tr>
-              <a:tr h="457200">
+              <a:tr h="393192">
                 <a:tc>
                   <a:txBody>
                     <a:bodyPr/>
@@ -19394,6 +23587,138 @@
           </a:graphicData>
         </a:graphic>
       </p:graphicFrame>
+      <p:sp>
+        <p:nvSpPr>
+          <p:cNvPr id="5" name="Rectangle 4"/>
+          <p:cNvSpPr/>
+          <p:nvPr/>
+        </p:nvSpPr>
+        <p:spPr>
+          <a:xfrm>
+            <a:off x="457200" y="6108192"/>
+            <a:ext cx="11247120" cy="237744"/>
+          </a:xfrm>
+          <a:prstGeom prst="rect">
+            <a:avLst/>
+          </a:prstGeom>
+          <a:solidFill>
+            <a:srgbClr val="F2F2F2"/>
+          </a:solidFill>
+          <a:ln>
+            <a:noFill/>
+          </a:ln>
+        </p:spPr>
+        <p:style>
+          <a:lnRef idx="1">
+            <a:schemeClr val="accent1"/>
+          </a:lnRef>
+          <a:fillRef idx="3">
+            <a:schemeClr val="accent1"/>
+          </a:fillRef>
+          <a:effectRef idx="2">
+            <a:schemeClr val="accent1"/>
+          </a:effectRef>
+          <a:fontRef idx="minor">
+            <a:schemeClr val="lt1"/>
+          </a:fontRef>
+        </p:style>
+        <p:txBody>
+          <a:bodyPr rtlCol="0" anchor="ctr" wrap="square" lIns="109728" rIns="109728" tIns="18288"/>
+          <a:lstStyle/>
+          <a:p>
+            <a:pPr algn="l">
+              <a:defRPr sz="1000">
+                <a:solidFill>
+                  <a:srgbClr val="666666"/>
+                </a:solidFill>
+                <a:latin typeface="Calibri"/>
+              </a:defRPr>
+            </a:pPr>
+            <a:r>
+              <a:t>Table 3.1: Dataset A summary | tab:dataset-a-summary | Source: Thesis manuscript and computed results</a:t>
+            </a:r>
+          </a:p>
+        </p:txBody>
+      </p:sp>
+      <p:sp>
+        <p:nvSpPr>
+          <p:cNvPr id="6" name="Rectangle 5"/>
+          <p:cNvSpPr/>
+          <p:nvPr/>
+        </p:nvSpPr>
+        <p:spPr>
+          <a:xfrm>
+            <a:off x="457200" y="6455664"/>
+            <a:ext cx="11247120" cy="9144"/>
+          </a:xfrm>
+          <a:prstGeom prst="rect">
+            <a:avLst/>
+          </a:prstGeom>
+          <a:solidFill>
+            <a:srgbClr val="E86C00"/>
+          </a:solidFill>
+          <a:ln>
+            <a:noFill/>
+          </a:ln>
+        </p:spPr>
+        <p:style>
+          <a:lnRef idx="1">
+            <a:schemeClr val="accent1"/>
+          </a:lnRef>
+          <a:fillRef idx="3">
+            <a:schemeClr val="accent1"/>
+          </a:fillRef>
+          <a:effectRef idx="2">
+            <a:schemeClr val="accent1"/>
+          </a:effectRef>
+          <a:fontRef idx="minor">
+            <a:schemeClr val="lt1"/>
+          </a:fontRef>
+        </p:style>
+        <p:txBody>
+          <a:bodyPr rtlCol="0" anchor="ctr"/>
+          <a:lstStyle/>
+          <a:p>
+            <a:pPr algn="ctr"/>
+          </a:p>
+        </p:txBody>
+      </p:sp>
+      <p:sp>
+        <p:nvSpPr>
+          <p:cNvPr id="7" name="TextBox 6"/>
+          <p:cNvSpPr txBox="1"/>
+          <p:nvPr/>
+        </p:nvSpPr>
+        <p:spPr>
+          <a:xfrm>
+            <a:off x="457200" y="6492240"/>
+            <a:ext cx="11247120" cy="219456"/>
+          </a:xfrm>
+          <a:prstGeom prst="rect">
+            <a:avLst/>
+          </a:prstGeom>
+          <a:noFill/>
+        </p:spPr>
+        <p:txBody>
+          <a:bodyPr wrap="square">
+            <a:spAutoFit/>
+          </a:bodyPr>
+          <a:lstStyle/>
+          <a:p>
+            <a:pPr algn="r">
+              <a:defRPr sz="900" b="0">
+                <a:solidFill>
+                  <a:srgbClr val="E86C00"/>
+                </a:solidFill>
+                <a:latin typeface="Calibri"/>
+              </a:defRPr>
+            </a:pPr>
+            <a:r>
+              <a:t>Διπλωματική Εργασία - Μάρτιος 2026</a:t>
+            </a:r>
+          </a:p>
+        </p:txBody>
+      </p:sp>
     </p:spTree>
   </p:cSld>
   <p:clrMapOvr>
@@ -19408,7 +23733,7 @@
     <p:bg>
       <p:bgPr>
         <a:solidFill>
-          <a:srgbClr val="FFFFFF"/>
+          <a:srgbClr val="F8FBFF"/>
         </a:solidFill>
         <a:effectLst/>
       </p:bgPr>
@@ -19473,9 +23798,52 @@
           </a:p>
         </p:txBody>
       </p:sp>
+      <p:sp>
+        <p:nvSpPr>
+          <p:cNvPr id="3" name="Rectangle 2"/>
+          <p:cNvSpPr/>
+          <p:nvPr/>
+        </p:nvSpPr>
+        <p:spPr>
+          <a:xfrm>
+            <a:off x="0" y="987552"/>
+            <a:ext cx="12191695" cy="18288"/>
+          </a:xfrm>
+          <a:prstGeom prst="rect">
+            <a:avLst/>
+          </a:prstGeom>
+          <a:solidFill>
+            <a:srgbClr val="3B82F6"/>
+          </a:solidFill>
+          <a:ln>
+            <a:noFill/>
+          </a:ln>
+        </p:spPr>
+        <p:style>
+          <a:lnRef idx="1">
+            <a:schemeClr val="accent1"/>
+          </a:lnRef>
+          <a:fillRef idx="3">
+            <a:schemeClr val="accent1"/>
+          </a:fillRef>
+          <a:effectRef idx="2">
+            <a:schemeClr val="accent1"/>
+          </a:effectRef>
+          <a:fontRef idx="minor">
+            <a:schemeClr val="lt1"/>
+          </a:fontRef>
+        </p:style>
+        <p:txBody>
+          <a:bodyPr rtlCol="0" anchor="ctr"/>
+          <a:lstStyle/>
+          <a:p>
+            <a:pPr algn="ctr"/>
+          </a:p>
+        </p:txBody>
+      </p:sp>
       <p:graphicFrame>
         <p:nvGraphicFramePr>
-          <p:cNvPr id="3" name="Table 2"/>
+          <p:cNvPr id="4" name="Table 3"/>
           <p:cNvGraphicFramePr>
             <a:graphicFrameLocks noGrp="1"/>
           </p:cNvGraphicFramePr>
@@ -19483,7 +23851,7 @@
         </p:nvGraphicFramePr>
         <p:xfrm>
           <a:off x="457200" y="1371600"/>
-          <a:ext cx="11247120" cy="3200400"/>
+          <a:ext cx="11247120" cy="2752344"/>
         </p:xfrm>
         <a:graphic>
           <a:graphicData uri="http://schemas.openxmlformats.org/drawingml/2006/table">
@@ -19496,7 +23864,7 @@
                 <a:gridCol w="4061460"/>
                 <a:gridCol w="4061460"/>
               </a:tblGrid>
-              <a:tr h="457200">
+              <a:tr h="393192">
                 <a:tc>
                   <a:txBody>
                     <a:bodyPr/>
@@ -19570,7 +23938,7 @@
                   </a:tcPr>
                 </a:tc>
               </a:tr>
-              <a:tr h="457200">
+              <a:tr h="393192">
                 <a:tc>
                   <a:txBody>
                     <a:bodyPr/>
@@ -19644,7 +24012,7 @@
                   </a:tcPr>
                 </a:tc>
               </a:tr>
-              <a:tr h="457200">
+              <a:tr h="393192">
                 <a:tc>
                   <a:txBody>
                     <a:bodyPr/>
@@ -19718,7 +24086,7 @@
                   </a:tcPr>
                 </a:tc>
               </a:tr>
-              <a:tr h="457200">
+              <a:tr h="393192">
                 <a:tc>
                   <a:txBody>
                     <a:bodyPr/>
@@ -19792,7 +24160,7 @@
                   </a:tcPr>
                 </a:tc>
               </a:tr>
-              <a:tr h="457200">
+              <a:tr h="393192">
                 <a:tc>
                   <a:txBody>
                     <a:bodyPr/>
@@ -19866,7 +24234,7 @@
                   </a:tcPr>
                 </a:tc>
               </a:tr>
-              <a:tr h="457200">
+              <a:tr h="393192">
                 <a:tc>
                   <a:txBody>
                     <a:bodyPr/>
@@ -19940,7 +24308,7 @@
                   </a:tcPr>
                 </a:tc>
               </a:tr>
-              <a:tr h="457200">
+              <a:tr h="393192">
                 <a:tc>
                   <a:txBody>
                     <a:bodyPr/>
@@ -20018,6 +24386,138 @@
           </a:graphicData>
         </a:graphic>
       </p:graphicFrame>
+      <p:sp>
+        <p:nvSpPr>
+          <p:cNvPr id="5" name="Rectangle 4"/>
+          <p:cNvSpPr/>
+          <p:nvPr/>
+        </p:nvSpPr>
+        <p:spPr>
+          <a:xfrm>
+            <a:off x="457200" y="6108192"/>
+            <a:ext cx="11247120" cy="237744"/>
+          </a:xfrm>
+          <a:prstGeom prst="rect">
+            <a:avLst/>
+          </a:prstGeom>
+          <a:solidFill>
+            <a:srgbClr val="F2F2F2"/>
+          </a:solidFill>
+          <a:ln>
+            <a:noFill/>
+          </a:ln>
+        </p:spPr>
+        <p:style>
+          <a:lnRef idx="1">
+            <a:schemeClr val="accent1"/>
+          </a:lnRef>
+          <a:fillRef idx="3">
+            <a:schemeClr val="accent1"/>
+          </a:fillRef>
+          <a:effectRef idx="2">
+            <a:schemeClr val="accent1"/>
+          </a:effectRef>
+          <a:fontRef idx="minor">
+            <a:schemeClr val="lt1"/>
+          </a:fontRef>
+        </p:style>
+        <p:txBody>
+          <a:bodyPr rtlCol="0" anchor="ctr" wrap="square" lIns="109728" rIns="109728" tIns="18288"/>
+          <a:lstStyle/>
+          <a:p>
+            <a:pPr algn="l">
+              <a:defRPr sz="1000">
+                <a:solidFill>
+                  <a:srgbClr val="666666"/>
+                </a:solidFill>
+                <a:latin typeface="Calibri"/>
+              </a:defRPr>
+            </a:pPr>
+            <a:r>
+              <a:t>Table 3.3: Cross-dataset comparison | tab:cross-dataset-comparison | Source: Thesis manuscript and computed results</a:t>
+            </a:r>
+          </a:p>
+        </p:txBody>
+      </p:sp>
+      <p:sp>
+        <p:nvSpPr>
+          <p:cNvPr id="6" name="Rectangle 5"/>
+          <p:cNvSpPr/>
+          <p:nvPr/>
+        </p:nvSpPr>
+        <p:spPr>
+          <a:xfrm>
+            <a:off x="457200" y="6455664"/>
+            <a:ext cx="11247120" cy="9144"/>
+          </a:xfrm>
+          <a:prstGeom prst="rect">
+            <a:avLst/>
+          </a:prstGeom>
+          <a:solidFill>
+            <a:srgbClr val="E86C00"/>
+          </a:solidFill>
+          <a:ln>
+            <a:noFill/>
+          </a:ln>
+        </p:spPr>
+        <p:style>
+          <a:lnRef idx="1">
+            <a:schemeClr val="accent1"/>
+          </a:lnRef>
+          <a:fillRef idx="3">
+            <a:schemeClr val="accent1"/>
+          </a:fillRef>
+          <a:effectRef idx="2">
+            <a:schemeClr val="accent1"/>
+          </a:effectRef>
+          <a:fontRef idx="minor">
+            <a:schemeClr val="lt1"/>
+          </a:fontRef>
+        </p:style>
+        <p:txBody>
+          <a:bodyPr rtlCol="0" anchor="ctr"/>
+          <a:lstStyle/>
+          <a:p>
+            <a:pPr algn="ctr"/>
+          </a:p>
+        </p:txBody>
+      </p:sp>
+      <p:sp>
+        <p:nvSpPr>
+          <p:cNvPr id="7" name="TextBox 6"/>
+          <p:cNvSpPr txBox="1"/>
+          <p:nvPr/>
+        </p:nvSpPr>
+        <p:spPr>
+          <a:xfrm>
+            <a:off x="457200" y="6492240"/>
+            <a:ext cx="11247120" cy="219456"/>
+          </a:xfrm>
+          <a:prstGeom prst="rect">
+            <a:avLst/>
+          </a:prstGeom>
+          <a:noFill/>
+        </p:spPr>
+        <p:txBody>
+          <a:bodyPr wrap="square">
+            <a:spAutoFit/>
+          </a:bodyPr>
+          <a:lstStyle/>
+          <a:p>
+            <a:pPr algn="r">
+              <a:defRPr sz="900" b="0">
+                <a:solidFill>
+                  <a:srgbClr val="E86C00"/>
+                </a:solidFill>
+                <a:latin typeface="Calibri"/>
+              </a:defRPr>
+            </a:pPr>
+            <a:r>
+              <a:t>Διπλωματική Εργασία - Μάρτιος 2026</a:t>
+            </a:r>
+          </a:p>
+        </p:txBody>
+      </p:sp>
     </p:spTree>
   </p:cSld>
   <p:clrMapOvr>
